--- a/presentations/COPIL_Viasante_2026-09-14/COPIL_Selligent_Mutuelle_Viasante_14092026_v5.pptx
+++ b/presentations/COPIL_Viasante_2026-09-14/COPIL_Selligent_Mutuelle_Viasante_14092026_v5.pptx
@@ -330,6 +330,343 @@
 </file>
 
 <file path=ppt/charts/chart2.xml><?xml version="1.0" encoding="utf-8"?>
+<c:chartSpace xmlns:c="http://schemas.openxmlformats.org/drawingml/2006/chart" xmlns:a="http://schemas.openxmlformats.org/drawingml/2006/main" xmlns:r="http://schemas.openxmlformats.org/officeDocument/2006/relationships">
+  <c:date1904 val="0"/>
+  <c:roundedCorners val="1"/>
+  <c:chart>
+    <c:autoTitleDeleted val="1"/>
+    <c:plotArea>
+      <c:layout/>
+      <c:lineChart>
+        <c:varyColors val="0"/>
+        <c:ser>
+          <c:idx val="0"/>
+          <c:order val="0"/>
+          <c:tx>
+            <c:strRef>
+              <c:f>Sheet1!$B$1</c:f>
+              <c:strCache>
+                <c:ptCount val="1"/>
+                <c:pt idx="0">
+                  <c:v>Ucount</c:v>
+                </c:pt>
+              </c:strCache>
+            </c:strRef>
+          </c:tx>
+          <c:spPr>
+            <a:solidFill>
+              <a:srgbClr val="06404F"/>
+            </a:solidFill>
+            <a:ln w="31750" cap="flat">
+              <a:solidFill>
+                <a:srgbClr val="06404F"/>
+              </a:solidFill>
+              <a:prstDash val="solid"/>
+              <a:round/>
+            </a:ln>
+            <a:effectLst/>
+          </c:spPr>
+          <c:invertIfNegative val="0"/>
+          <c:dLbls>
+            <c:numFmt formatCode="#,##0" sourceLinked="0"/>
+            <c:txPr>
+              <a:bodyPr/>
+              <a:lstStyle/>
+              <a:p>
+                <a:pPr>
+                  <a:defRPr b="0" i="0" strike="noStrike" sz="1200" u="none">
+                    <a:solidFill>
+                      <a:srgbClr val="000000"/>
+                    </a:solidFill>
+                    <a:latin typeface="Arial"/>
+                  </a:defRPr>
+                </a:pPr>
+              </a:p>
+            </c:txPr>
+            <c:showLegendKey val="0"/>
+            <c:showVal val="0"/>
+            <c:showCatName val="0"/>
+            <c:showSerName val="0"/>
+            <c:showPercent val="0"/>
+            <c:showBubbleSize val="0"/>
+            <c:showLeaderLines val="0"/>
+          </c:dLbls>
+          <c:marker>
+            <c:symbol val="circle"/>
+            <c:size val="6"/>
+            <c:spPr>
+              <a:solidFill>
+                <a:srgbClr val="06404F"/>
+              </a:solidFill>
+              <a:ln w="9525" cap="flat">
+                <a:solidFill>
+                  <a:srgbClr val="06404F"/>
+                </a:solidFill>
+                <a:prstDash val="solid"/>
+                <a:round/>
+              </a:ln>
+              <a:effectLst/>
+            </c:spPr>
+          </c:marker>
+          <c:cat>
+            <c:multiLvlStrRef>
+              <c:f>Sheet1!$A$2:$A$16</c:f>
+              <c:multiLvlStrCache>
+                <c:ptCount val="15"/>
+                <c:lvl>
+                  <c:pt idx="0">
+                    <c:v>Juin 25</c:v>
+                  </c:pt>
+                  <c:pt idx="1">
+                    <c:v>Juil. 25</c:v>
+                  </c:pt>
+                  <c:pt idx="2">
+                    <c:v>Août 25</c:v>
+                  </c:pt>
+                  <c:pt idx="3">
+                    <c:v>Sept. 25</c:v>
+                  </c:pt>
+                  <c:pt idx="4">
+                    <c:v>Oct. 25</c:v>
+                  </c:pt>
+                  <c:pt idx="5">
+                    <c:v>Nov. 25</c:v>
+                  </c:pt>
+                  <c:pt idx="6">
+                    <c:v>Déc. 25</c:v>
+                  </c:pt>
+                  <c:pt idx="7">
+                    <c:v>Janv. 26</c:v>
+                  </c:pt>
+                  <c:pt idx="8">
+                    <c:v>Fév. 26</c:v>
+                  </c:pt>
+                  <c:pt idx="9">
+                    <c:v>Mars 26</c:v>
+                  </c:pt>
+                  <c:pt idx="10">
+                    <c:v>Avr. 26</c:v>
+                  </c:pt>
+                  <c:pt idx="11">
+                    <c:v>Mai 26</c:v>
+                  </c:pt>
+                  <c:pt idx="12">
+                    <c:v>Juin 26</c:v>
+                  </c:pt>
+                  <c:pt idx="13">
+                    <c:v>Juil. 26</c:v>
+                  </c:pt>
+                  <c:pt idx="14">
+                    <c:v>Août 26</c:v>
+                  </c:pt>
+                </c:lvl>
+              </c:multiLvlStrCache>
+            </c:multiLvlStrRef>
+          </c:cat>
+          <c:val>
+            <c:numRef>
+              <c:f>Sheet1!$B$2:$B$16</c:f>
+              <c:numCache>
+                <c:formatCode>General</c:formatCode>
+                <c:ptCount val="15"/>
+                <c:pt idx="0">
+                  <c:v>701932</c:v>
+                </c:pt>
+                <c:pt idx="1">
+                  <c:v>704132</c:v>
+                </c:pt>
+                <c:pt idx="2">
+                  <c:v>686466</c:v>
+                </c:pt>
+                <c:pt idx="3">
+                  <c:v>704410</c:v>
+                </c:pt>
+                <c:pt idx="4">
+                  <c:v>717070</c:v>
+                </c:pt>
+                <c:pt idx="5">
+                  <c:v>733930</c:v>
+                </c:pt>
+                <c:pt idx="6">
+                  <c:v>747925</c:v>
+                </c:pt>
+                <c:pt idx="7">
+                  <c:v>755189</c:v>
+                </c:pt>
+                <c:pt idx="8">
+                  <c:v>770614</c:v>
+                </c:pt>
+                <c:pt idx="9">
+                  <c:v>783378</c:v>
+                </c:pt>
+                <c:pt idx="10">
+                  <c:v>792265</c:v>
+                </c:pt>
+                <c:pt idx="11">
+                  <c:v>802916</c:v>
+                </c:pt>
+                <c:pt idx="12">
+                  <c:v>812472</c:v>
+                </c:pt>
+                <c:pt idx="13">
+                  <c:v>820039</c:v>
+                </c:pt>
+                <c:pt idx="14">
+                  <c:v>824913</c:v>
+                </c:pt>
+              </c:numCache>
+            </c:numRef>
+          </c:val>
+          <c:smooth val="0"/>
+        </c:ser>
+        <c:dLbls>
+          <c:numFmt formatCode="#,##0" sourceLinked="0"/>
+          <c:txPr>
+            <a:bodyPr/>
+            <a:lstStyle/>
+            <a:p>
+              <a:pPr>
+                <a:defRPr b="0" i="0" strike="noStrike" sz="1200" u="none">
+                  <a:solidFill>
+                    <a:srgbClr val="000000"/>
+                  </a:solidFill>
+                  <a:latin typeface="Arial"/>
+                </a:defRPr>
+              </a:pPr>
+            </a:p>
+          </c:txPr>
+          <c:showLegendKey val="0"/>
+          <c:showVal val="0"/>
+          <c:showCatName val="0"/>
+          <c:showSerName val="0"/>
+          <c:showPercent val="0"/>
+          <c:showBubbleSize val="0"/>
+          <c:showLeaderLines val="0"/>
+        </c:dLbls>
+        <c:marker val="1"/>
+        <c:axId val="2094734554"/>
+        <c:axId val="2094734552"/>
+        <c:axId val="2094734556"/>
+      </c:lineChart>
+      <c:catAx>
+        <c:axId val="2094734554"/>
+        <c:scaling>
+          <c:orientation val="minMax"/>
+        </c:scaling>
+        <c:delete val="0"/>
+        <c:axPos val="b"/>
+        <c:numFmt formatCode="General" sourceLinked="1"/>
+        <c:majorTickMark val="out"/>
+        <c:minorTickMark val="none"/>
+        <c:tickLblPos val="low"/>
+        <c:spPr>
+          <a:ln w="12700" cap="flat">
+            <a:solidFill>
+              <a:srgbClr val="888888"/>
+            </a:solidFill>
+            <a:prstDash val="solid"/>
+            <a:round/>
+          </a:ln>
+        </c:spPr>
+        <c:txPr>
+          <a:bodyPr rot="-2700000"/>
+          <a:lstStyle/>
+          <a:p>
+            <a:pPr>
+              <a:defRPr sz="900" b="0" i="0" u="none" strike="noStrike">
+                <a:solidFill>
+                  <a:srgbClr val="6B7B83"/>
+                </a:solidFill>
+                <a:latin typeface="Arial"/>
+              </a:defRPr>
+            </a:pPr>
+            <a:endParaRPr lang="en-US"/>
+          </a:p>
+        </c:txPr>
+        <c:crossAx val="2094734552"/>
+        <c:crosses val="autoZero"/>
+        <c:auto val="1"/>
+        <c:lblAlgn val="ctr"/>
+        <c:noMultiLvlLbl val="1"/>
+      </c:catAx>
+      <c:valAx>
+        <c:axId val="2094734552"/>
+        <c:scaling>
+          <c:orientation val="minMax"/>
+          <c:max val="850000"/>
+          <c:min val="650000"/>
+        </c:scaling>
+        <c:delete val="0"/>
+        <c:axPos val="l"/>
+        <c:majorGridlines>
+          <c:spPr>
+            <a:ln w="6350" cap="flat">
+              <a:solidFill>
+                <a:srgbClr val="E6ECEF"/>
+              </a:solidFill>
+              <a:prstDash val="solid"/>
+              <a:round/>
+            </a:ln>
+          </c:spPr>
+        </c:majorGridlines>
+        <c:numFmt formatCode="#,##0" sourceLinked="0"/>
+        <c:majorTickMark val="out"/>
+        <c:minorTickMark val="none"/>
+        <c:tickLblPos val="nextTo"/>
+        <c:spPr>
+          <a:ln w="12700" cap="flat">
+            <a:solidFill>
+              <a:srgbClr val="888888"/>
+            </a:solidFill>
+            <a:prstDash val="solid"/>
+            <a:round/>
+          </a:ln>
+        </c:spPr>
+        <c:txPr>
+          <a:bodyPr/>
+          <a:lstStyle/>
+          <a:p>
+            <a:pPr>
+              <a:defRPr sz="900" b="0" i="0" u="none" strike="noStrike">
+                <a:solidFill>
+                  <a:srgbClr val="6B7B83"/>
+                </a:solidFill>
+                <a:latin typeface="Arial"/>
+              </a:defRPr>
+            </a:pPr>
+            <a:endParaRPr lang="en-US"/>
+          </a:p>
+        </c:txPr>
+        <c:crossAx val="2094734554"/>
+        <c:crosses val="autoZero"/>
+        <c:crossBetween val="between"/>
+        <c:majorUnit val="50000"/>
+      </c:valAx>
+      <c:spPr>
+        <a:noFill/>
+        <a:ln>
+          <a:noFill/>
+        </a:ln>
+        <a:effectLst/>
+      </c:spPr>
+    </c:plotArea>
+    <c:plotVisOnly val="1"/>
+    <c:dispBlanksAs val="span"/>
+  </c:chart>
+  <c:spPr>
+    <a:noFill/>
+    <a:ln>
+      <a:noFill/>
+    </a:ln>
+    <a:effectLst/>
+  </c:spPr>
+  <c:externalData r:id="rId1">
+    <c:autoUpdate val="0"/>
+  </c:externalData>
+</c:chartSpace>
+</file>
+
+<file path=ppt/charts/chart3.xml><?xml version="1.0" encoding="utf-8"?>
 <c:chartSpace xmlns:c="http://schemas.openxmlformats.org/drawingml/2006/chart" xmlns:a="http://schemas.openxmlformats.org/drawingml/2006/main" xmlns:r="http://schemas.openxmlformats.org/officeDocument/2006/relationships">
   <c:date1904 val="0"/>
   <c:roundedCorners val="1"/>
@@ -753,343 +1090,6 @@
         </a:p>
       </c:txPr>
     </c:legend>
-    <c:plotVisOnly val="1"/>
-    <c:dispBlanksAs val="span"/>
-  </c:chart>
-  <c:spPr>
-    <a:noFill/>
-    <a:ln>
-      <a:noFill/>
-    </a:ln>
-    <a:effectLst/>
-  </c:spPr>
-  <c:externalData r:id="rId1">
-    <c:autoUpdate val="0"/>
-  </c:externalData>
-</c:chartSpace>
-</file>
-
-<file path=ppt/charts/chart3.xml><?xml version="1.0" encoding="utf-8"?>
-<c:chartSpace xmlns:c="http://schemas.openxmlformats.org/drawingml/2006/chart" xmlns:a="http://schemas.openxmlformats.org/drawingml/2006/main" xmlns:r="http://schemas.openxmlformats.org/officeDocument/2006/relationships">
-  <c:date1904 val="0"/>
-  <c:roundedCorners val="1"/>
-  <c:chart>
-    <c:autoTitleDeleted val="1"/>
-    <c:plotArea>
-      <c:layout/>
-      <c:lineChart>
-        <c:varyColors val="0"/>
-        <c:ser>
-          <c:idx val="0"/>
-          <c:order val="0"/>
-          <c:tx>
-            <c:strRef>
-              <c:f>Sheet1!$B$1</c:f>
-              <c:strCache>
-                <c:ptCount val="1"/>
-                <c:pt idx="0">
-                  <c:v>Ucount</c:v>
-                </c:pt>
-              </c:strCache>
-            </c:strRef>
-          </c:tx>
-          <c:spPr>
-            <a:solidFill>
-              <a:srgbClr val="06404F"/>
-            </a:solidFill>
-            <a:ln w="31750" cap="flat">
-              <a:solidFill>
-                <a:srgbClr val="06404F"/>
-              </a:solidFill>
-              <a:prstDash val="solid"/>
-              <a:round/>
-            </a:ln>
-            <a:effectLst/>
-          </c:spPr>
-          <c:invertIfNegative val="0"/>
-          <c:dLbls>
-            <c:numFmt formatCode="#,##0" sourceLinked="0"/>
-            <c:txPr>
-              <a:bodyPr/>
-              <a:lstStyle/>
-              <a:p>
-                <a:pPr>
-                  <a:defRPr b="0" i="0" strike="noStrike" sz="1200" u="none">
-                    <a:solidFill>
-                      <a:srgbClr val="000000"/>
-                    </a:solidFill>
-                    <a:latin typeface="Arial"/>
-                  </a:defRPr>
-                </a:pPr>
-              </a:p>
-            </c:txPr>
-            <c:showLegendKey val="0"/>
-            <c:showVal val="0"/>
-            <c:showCatName val="0"/>
-            <c:showSerName val="0"/>
-            <c:showPercent val="0"/>
-            <c:showBubbleSize val="0"/>
-            <c:showLeaderLines val="0"/>
-          </c:dLbls>
-          <c:marker>
-            <c:symbol val="circle"/>
-            <c:size val="6"/>
-            <c:spPr>
-              <a:solidFill>
-                <a:srgbClr val="06404F"/>
-              </a:solidFill>
-              <a:ln w="9525" cap="flat">
-                <a:solidFill>
-                  <a:srgbClr val="06404F"/>
-                </a:solidFill>
-                <a:prstDash val="solid"/>
-                <a:round/>
-              </a:ln>
-              <a:effectLst/>
-            </c:spPr>
-          </c:marker>
-          <c:cat>
-            <c:multiLvlStrRef>
-              <c:f>Sheet1!$A$2:$A$16</c:f>
-              <c:multiLvlStrCache>
-                <c:ptCount val="15"/>
-                <c:lvl>
-                  <c:pt idx="0">
-                    <c:v>Juin 25</c:v>
-                  </c:pt>
-                  <c:pt idx="1">
-                    <c:v>Juil. 25</c:v>
-                  </c:pt>
-                  <c:pt idx="2">
-                    <c:v>Août 25</c:v>
-                  </c:pt>
-                  <c:pt idx="3">
-                    <c:v>Sept. 25</c:v>
-                  </c:pt>
-                  <c:pt idx="4">
-                    <c:v>Oct. 25</c:v>
-                  </c:pt>
-                  <c:pt idx="5">
-                    <c:v>Nov. 25</c:v>
-                  </c:pt>
-                  <c:pt idx="6">
-                    <c:v>Déc. 25</c:v>
-                  </c:pt>
-                  <c:pt idx="7">
-                    <c:v>Janv. 26</c:v>
-                  </c:pt>
-                  <c:pt idx="8">
-                    <c:v>Fév. 26</c:v>
-                  </c:pt>
-                  <c:pt idx="9">
-                    <c:v>Mars 26</c:v>
-                  </c:pt>
-                  <c:pt idx="10">
-                    <c:v>Avr. 26</c:v>
-                  </c:pt>
-                  <c:pt idx="11">
-                    <c:v>Mai 26</c:v>
-                  </c:pt>
-                  <c:pt idx="12">
-                    <c:v>Juin 26</c:v>
-                  </c:pt>
-                  <c:pt idx="13">
-                    <c:v>Juil. 26</c:v>
-                  </c:pt>
-                  <c:pt idx="14">
-                    <c:v>Août 26</c:v>
-                  </c:pt>
-                </c:lvl>
-              </c:multiLvlStrCache>
-            </c:multiLvlStrRef>
-          </c:cat>
-          <c:val>
-            <c:numRef>
-              <c:f>Sheet1!$B$2:$B$16</c:f>
-              <c:numCache>
-                <c:formatCode>General</c:formatCode>
-                <c:ptCount val="15"/>
-                <c:pt idx="0">
-                  <c:v>701932</c:v>
-                </c:pt>
-                <c:pt idx="1">
-                  <c:v>704132</c:v>
-                </c:pt>
-                <c:pt idx="2">
-                  <c:v>686466</c:v>
-                </c:pt>
-                <c:pt idx="3">
-                  <c:v>704410</c:v>
-                </c:pt>
-                <c:pt idx="4">
-                  <c:v>717070</c:v>
-                </c:pt>
-                <c:pt idx="5">
-                  <c:v>733930</c:v>
-                </c:pt>
-                <c:pt idx="6">
-                  <c:v>747925</c:v>
-                </c:pt>
-                <c:pt idx="7">
-                  <c:v>755189</c:v>
-                </c:pt>
-                <c:pt idx="8">
-                  <c:v>770614</c:v>
-                </c:pt>
-                <c:pt idx="9">
-                  <c:v>783378</c:v>
-                </c:pt>
-                <c:pt idx="10">
-                  <c:v>792265</c:v>
-                </c:pt>
-                <c:pt idx="11">
-                  <c:v>802916</c:v>
-                </c:pt>
-                <c:pt idx="12">
-                  <c:v>812472</c:v>
-                </c:pt>
-                <c:pt idx="13">
-                  <c:v>820039</c:v>
-                </c:pt>
-                <c:pt idx="14">
-                  <c:v>824913</c:v>
-                </c:pt>
-              </c:numCache>
-            </c:numRef>
-          </c:val>
-          <c:smooth val="0"/>
-        </c:ser>
-        <c:dLbls>
-          <c:numFmt formatCode="#,##0" sourceLinked="0"/>
-          <c:txPr>
-            <a:bodyPr/>
-            <a:lstStyle/>
-            <a:p>
-              <a:pPr>
-                <a:defRPr b="0" i="0" strike="noStrike" sz="1200" u="none">
-                  <a:solidFill>
-                    <a:srgbClr val="000000"/>
-                  </a:solidFill>
-                  <a:latin typeface="Arial"/>
-                </a:defRPr>
-              </a:pPr>
-            </a:p>
-          </c:txPr>
-          <c:showLegendKey val="0"/>
-          <c:showVal val="0"/>
-          <c:showCatName val="0"/>
-          <c:showSerName val="0"/>
-          <c:showPercent val="0"/>
-          <c:showBubbleSize val="0"/>
-          <c:showLeaderLines val="0"/>
-        </c:dLbls>
-        <c:marker val="1"/>
-        <c:axId val="2094734554"/>
-        <c:axId val="2094734552"/>
-        <c:axId val="2094734556"/>
-      </c:lineChart>
-      <c:catAx>
-        <c:axId val="2094734554"/>
-        <c:scaling>
-          <c:orientation val="minMax"/>
-        </c:scaling>
-        <c:delete val="0"/>
-        <c:axPos val="b"/>
-        <c:numFmt formatCode="General" sourceLinked="1"/>
-        <c:majorTickMark val="out"/>
-        <c:minorTickMark val="none"/>
-        <c:tickLblPos val="low"/>
-        <c:spPr>
-          <a:ln w="12700" cap="flat">
-            <a:solidFill>
-              <a:srgbClr val="888888"/>
-            </a:solidFill>
-            <a:prstDash val="solid"/>
-            <a:round/>
-          </a:ln>
-        </c:spPr>
-        <c:txPr>
-          <a:bodyPr rot="-2700000"/>
-          <a:lstStyle/>
-          <a:p>
-            <a:pPr>
-              <a:defRPr sz="900" b="0" i="0" u="none" strike="noStrike">
-                <a:solidFill>
-                  <a:srgbClr val="6B7B83"/>
-                </a:solidFill>
-                <a:latin typeface="Arial"/>
-              </a:defRPr>
-            </a:pPr>
-            <a:endParaRPr lang="en-US"/>
-          </a:p>
-        </c:txPr>
-        <c:crossAx val="2094734552"/>
-        <c:crosses val="autoZero"/>
-        <c:auto val="1"/>
-        <c:lblAlgn val="ctr"/>
-        <c:noMultiLvlLbl val="1"/>
-      </c:catAx>
-      <c:valAx>
-        <c:axId val="2094734552"/>
-        <c:scaling>
-          <c:orientation val="minMax"/>
-          <c:max val="850000"/>
-          <c:min val="650000"/>
-        </c:scaling>
-        <c:delete val="0"/>
-        <c:axPos val="l"/>
-        <c:majorGridlines>
-          <c:spPr>
-            <a:ln w="6350" cap="flat">
-              <a:solidFill>
-                <a:srgbClr val="E6ECEF"/>
-              </a:solidFill>
-              <a:prstDash val="solid"/>
-              <a:round/>
-            </a:ln>
-          </c:spPr>
-        </c:majorGridlines>
-        <c:numFmt formatCode="#,##0" sourceLinked="0"/>
-        <c:majorTickMark val="out"/>
-        <c:minorTickMark val="none"/>
-        <c:tickLblPos val="nextTo"/>
-        <c:spPr>
-          <a:ln w="12700" cap="flat">
-            <a:solidFill>
-              <a:srgbClr val="888888"/>
-            </a:solidFill>
-            <a:prstDash val="solid"/>
-            <a:round/>
-          </a:ln>
-        </c:spPr>
-        <c:txPr>
-          <a:bodyPr/>
-          <a:lstStyle/>
-          <a:p>
-            <a:pPr>
-              <a:defRPr sz="900" b="0" i="0" u="none" strike="noStrike">
-                <a:solidFill>
-                  <a:srgbClr val="6B7B83"/>
-                </a:solidFill>
-                <a:latin typeface="Arial"/>
-              </a:defRPr>
-            </a:pPr>
-            <a:endParaRPr lang="en-US"/>
-          </a:p>
-        </c:txPr>
-        <c:crossAx val="2094734554"/>
-        <c:crosses val="autoZero"/>
-        <c:crossBetween val="between"/>
-        <c:majorUnit val="50000"/>
-      </c:valAx>
-      <c:spPr>
-        <a:noFill/>
-        <a:ln>
-          <a:noFill/>
-        </a:ln>
-        <a:effectLst/>
-      </c:spPr>
-    </c:plotArea>
     <c:plotVisOnly val="1"/>
     <c:dispBlanksAs val="span"/>
   </c:chart>
@@ -4913,6 +4913,423 @@
     <p:bg>
       <p:bgPr>
         <a:solidFill>
+          <a:srgbClr val="06404F"/>
+        </a:solidFill>
+      </p:bgPr>
+    </p:bg>
+    <p:spTree>
+      <p:nvGrpSpPr>
+        <p:cNvPr id="1" name=""/>
+        <p:cNvGrpSpPr/>
+        <p:nvPr/>
+      </p:nvGrpSpPr>
+      <p:grpSpPr>
+        <a:xfrm>
+          <a:off x="0" y="0"/>
+          <a:ext cx="0" cy="0"/>
+          <a:chOff x="0" y="0"/>
+          <a:chExt cx="0" cy="0"/>
+        </a:xfrm>
+      </p:grpSpPr>
+      <p:pic>
+        <p:nvPicPr>
+          <p:cNvPr id="2" name="Image 0" descr="/tmp/claude-0/-home-user-IqraQuest/536b9ae9-447b-5fe8-88fd-3a84bf7ca86c/scratchpad/work/logo_white.png">    </p:cNvPr>
+          <p:cNvPicPr>
+            <a:picLocks noChangeAspect="1"/>
+          </p:cNvPicPr>
+          <p:nvPr/>
+        </p:nvPicPr>
+        <p:blipFill>
+          <a:blip r:embed="rId1"/>
+          <a:stretch>
+            <a:fillRect/>
+          </a:stretch>
+        </p:blipFill>
+        <p:spPr>
+          <a:xfrm>
+            <a:off x="502920" y="347472"/>
+            <a:ext cx="1463040" cy="526895"/>
+          </a:xfrm>
+          <a:prstGeom prst="rect">
+            <a:avLst/>
+          </a:prstGeom>
+        </p:spPr>
+      </p:pic>
+      <p:sp>
+        <p:nvSpPr>
+          <p:cNvPr id="3" name="Shape 0"/>
+          <p:cNvSpPr/>
+          <p:nvPr/>
+        </p:nvSpPr>
+        <p:spPr>
+          <a:xfrm>
+            <a:off x="8778240" y="1097280"/>
+            <a:ext cx="4754880" cy="4754880"/>
+          </a:xfrm>
+          <a:prstGeom prst="ellipse">
+            <a:avLst/>
+          </a:prstGeom>
+          <a:solidFill>
+            <a:srgbClr val="0F6B7A">
+              <a:alpha val="45000"/>
+            </a:srgbClr>
+          </a:solidFill>
+          <a:ln w="12700">
+            <a:solidFill>
+              <a:srgbClr val="0F6B7A"/>
+            </a:solidFill>
+            <a:prstDash val="solid"/>
+          </a:ln>
+        </p:spPr>
+      </p:sp>
+      <p:sp>
+        <p:nvSpPr>
+          <p:cNvPr id="4" name="Shape 1"/>
+          <p:cNvSpPr/>
+          <p:nvPr/>
+        </p:nvSpPr>
+        <p:spPr>
+          <a:xfrm>
+            <a:off x="8138160" y="4206240"/>
+            <a:ext cx="1463040" cy="1463040"/>
+          </a:xfrm>
+          <a:prstGeom prst="ellipse">
+            <a:avLst/>
+          </a:prstGeom>
+          <a:solidFill>
+            <a:srgbClr val="F28C28">
+              <a:alpha val="85000"/>
+            </a:srgbClr>
+          </a:solidFill>
+          <a:ln w="12700">
+            <a:solidFill>
+              <a:srgbClr val="F28C28"/>
+            </a:solidFill>
+            <a:prstDash val="solid"/>
+          </a:ln>
+        </p:spPr>
+      </p:sp>
+      <p:sp>
+        <p:nvSpPr>
+          <p:cNvPr id="5" name="Text 2"/>
+          <p:cNvSpPr txBox="1"/>
+          <p:nvPr/>
+        </p:nvSpPr>
+        <p:spPr>
+          <a:xfrm>
+            <a:off x="502920" y="1417320"/>
+            <a:ext cx="2743200" cy="822960"/>
+          </a:xfrm>
+          <a:prstGeom prst="rect">
+            <a:avLst/>
+          </a:prstGeom>
+          <a:noFill/>
+          <a:ln/>
+        </p:spPr>
+        <p:txBody>
+          <a:bodyPr wrap="square" lIns="0" tIns="0" rIns="0" bIns="0" rtlCol="0" anchor="ctr"/>
+          <a:lstStyle/>
+          <a:p>
+            <a:pPr indent="0" marL="0">
+              <a:buNone/>
+            </a:pPr>
+            <a:r>
+              <a:rPr lang="en-US" sz="5600" b="1" dirty="0">
+                <a:solidFill>
+                  <a:srgbClr val="F28C28"/>
+                </a:solidFill>
+                <a:latin typeface="Calibri" pitchFamily="34" charset="0"/>
+                <a:ea typeface="Calibri" pitchFamily="34" charset="-122"/>
+                <a:cs typeface="Calibri" pitchFamily="34" charset="-120"/>
+              </a:rPr>
+              <a:t>02</a:t>
+            </a:r>
+            <a:endParaRPr lang="en-US" sz="5600" dirty="0"/>
+          </a:p>
+        </p:txBody>
+      </p:sp>
+      <p:sp>
+        <p:nvSpPr>
+          <p:cNvPr id="6" name="Text 3"/>
+          <p:cNvSpPr txBox="1"/>
+          <p:nvPr/>
+        </p:nvSpPr>
+        <p:spPr>
+          <a:xfrm>
+            <a:off x="502920" y="2240280"/>
+            <a:ext cx="8503920" cy="1234440"/>
+          </a:xfrm>
+          <a:prstGeom prst="rect">
+            <a:avLst/>
+          </a:prstGeom>
+          <a:noFill/>
+          <a:ln/>
+        </p:spPr>
+        <p:txBody>
+          <a:bodyPr wrap="square" lIns="0" tIns="0" rIns="0" bIns="0" rtlCol="0" anchor="ctr"/>
+          <a:lstStyle/>
+          <a:p>
+            <a:pPr indent="0" marL="0">
+              <a:buNone/>
+            </a:pPr>
+            <a:r>
+              <a:rPr lang="en-US" sz="3600" b="1" dirty="0">
+                <a:solidFill>
+                  <a:srgbClr val="FFFFFF"/>
+                </a:solidFill>
+                <a:latin typeface="Calibri" pitchFamily="34" charset="0"/>
+                <a:ea typeface="Calibri" pitchFamily="34" charset="-122"/>
+                <a:cs typeface="Calibri" pitchFamily="34" charset="-120"/>
+              </a:rPr>
+              <a:t>Engage — votre plateforme marketing</a:t>
+            </a:r>
+            <a:endParaRPr lang="en-US" sz="3600" dirty="0"/>
+          </a:p>
+        </p:txBody>
+      </p:sp>
+      <p:sp>
+        <p:nvSpPr>
+          <p:cNvPr id="7" name="Text 4"/>
+          <p:cNvSpPr txBox="1"/>
+          <p:nvPr/>
+        </p:nvSpPr>
+        <p:spPr>
+          <a:xfrm>
+            <a:off x="502920" y="3520440"/>
+            <a:ext cx="8503920" cy="411480"/>
+          </a:xfrm>
+          <a:prstGeom prst="rect">
+            <a:avLst/>
+          </a:prstGeom>
+          <a:noFill/>
+          <a:ln/>
+        </p:spPr>
+        <p:txBody>
+          <a:bodyPr wrap="square" lIns="0" tIns="0" rIns="0" bIns="0" rtlCol="0" anchor="ctr"/>
+          <a:lstStyle/>
+          <a:p>
+            <a:pPr indent="0" marL="0">
+              <a:buNone/>
+            </a:pPr>
+            <a:r>
+              <a:rPr lang="en-US" sz="1800" dirty="0">
+                <a:solidFill>
+                  <a:srgbClr val="CFE3E7"/>
+                </a:solidFill>
+                <a:latin typeface="Calibri" pitchFamily="34" charset="0"/>
+                <a:ea typeface="Calibri" pitchFamily="34" charset="-122"/>
+                <a:cs typeface="Calibri" pitchFamily="34" charset="-120"/>
+              </a:rPr>
+              <a:t>Continuité, capacité, performance, canaux et conformité</a:t>
+            </a:r>
+            <a:endParaRPr lang="en-US" sz="1800" dirty="0"/>
+          </a:p>
+        </p:txBody>
+      </p:sp>
+      <p:sp>
+        <p:nvSpPr>
+          <p:cNvPr id="8" name="Text 5"/>
+          <p:cNvSpPr txBox="1"/>
+          <p:nvPr/>
+        </p:nvSpPr>
+        <p:spPr>
+          <a:xfrm>
+            <a:off x="502920" y="4160520"/>
+            <a:ext cx="6858000" cy="1737360"/>
+          </a:xfrm>
+          <a:prstGeom prst="rect">
+            <a:avLst/>
+          </a:prstGeom>
+          <a:noFill/>
+          <a:ln/>
+        </p:spPr>
+        <p:txBody>
+          <a:bodyPr wrap="square" lIns="0" tIns="0" rIns="0" bIns="0" rtlCol="0" anchor="t"/>
+          <a:lstStyle/>
+          <a:p>
+            <a:pPr marL="152400" indent="-152400">
+              <a:spcAft>
+                <a:spcPts val="300"/>
+              </a:spcAft>
+              <a:buSzPct val="100000"/>
+              <a:buChar char="•"/>
+            </a:pPr>
+            <a:r>
+              <a:rPr lang="en-US" sz="1300" dirty="0">
+                <a:solidFill>
+                  <a:srgbClr val="E6F0F2"/>
+                </a:solidFill>
+                <a:latin typeface="Calibri" pitchFamily="34" charset="0"/>
+                <a:ea typeface="Calibri" pitchFamily="34" charset="-122"/>
+                <a:cs typeface="Calibri" pitchFamily="34" charset="-120"/>
+              </a:rPr>
+              <a:t>Selligent by Zeta : ce qui change, ce qui ne change pas</a:t>
+            </a:r>
+            <a:endParaRPr lang="en-US" sz="1300" dirty="0"/>
+          </a:p>
+          <a:p>
+            <a:pPr marL="152400" indent="-152400">
+              <a:spcAft>
+                <a:spcPts val="300"/>
+              </a:spcAft>
+              <a:buSzPct val="100000"/>
+              <a:buChar char="•"/>
+            </a:pPr>
+            <a:r>
+              <a:rPr lang="en-US" sz="1300" dirty="0">
+                <a:solidFill>
+                  <a:srgbClr val="E6F0F2"/>
+                </a:solidFill>
+                <a:latin typeface="Calibri" pitchFamily="34" charset="0"/>
+                <a:ea typeface="Calibri" pitchFamily="34" charset="-122"/>
+                <a:cs typeface="Calibri" pitchFamily="34" charset="-120"/>
+              </a:rPr>
+              <a:t>Taille de la base de données Engage</a:t>
+            </a:r>
+            <a:endParaRPr lang="en-US" sz="1300" dirty="0"/>
+          </a:p>
+          <a:p>
+            <a:pPr marL="152400" indent="-152400">
+              <a:spcAft>
+                <a:spcPts val="300"/>
+              </a:spcAft>
+              <a:buSzPct val="100000"/>
+              <a:buChar char="•"/>
+            </a:pPr>
+            <a:r>
+              <a:rPr lang="en-US" sz="1300" dirty="0">
+                <a:solidFill>
+                  <a:srgbClr val="E6F0F2"/>
+                </a:solidFill>
+                <a:latin typeface="Calibri" pitchFamily="34" charset="0"/>
+                <a:ea typeface="Calibri" pitchFamily="34" charset="-122"/>
+                <a:cs typeface="Calibri" pitchFamily="34" charset="-120"/>
+              </a:rPr>
+              <a:t>Performance email vs secteur</a:t>
+            </a:r>
+            <a:endParaRPr lang="en-US" sz="1300" dirty="0"/>
+          </a:p>
+          <a:p>
+            <a:pPr marL="152400" indent="-152400">
+              <a:spcAft>
+                <a:spcPts val="300"/>
+              </a:spcAft>
+              <a:buSzPct val="100000"/>
+              <a:buChar char="•"/>
+            </a:pPr>
+            <a:r>
+              <a:rPr lang="en-US" sz="1300" dirty="0">
+                <a:solidFill>
+                  <a:srgbClr val="E6F0F2"/>
+                </a:solidFill>
+                <a:latin typeface="Calibri" pitchFamily="34" charset="0"/>
+                <a:ea typeface="Calibri" pitchFamily="34" charset="-122"/>
+                <a:cs typeface="Calibri" pitchFamily="34" charset="-120"/>
+              </a:rPr>
+              <a:t>Volumes SMS</a:t>
+            </a:r>
+            <a:endParaRPr lang="en-US" sz="1300" dirty="0"/>
+          </a:p>
+          <a:p>
+            <a:pPr marL="152400" indent="-152400">
+              <a:spcAft>
+                <a:spcPts val="300"/>
+              </a:spcAft>
+              <a:buSzPct val="100000"/>
+              <a:buChar char="•"/>
+            </a:pPr>
+            <a:r>
+              <a:rPr lang="en-US" sz="1300" dirty="0">
+                <a:solidFill>
+                  <a:srgbClr val="E6F0F2"/>
+                </a:solidFill>
+                <a:latin typeface="Calibri" pitchFamily="34" charset="0"/>
+                <a:ea typeface="Calibri" pitchFamily="34" charset="-122"/>
+                <a:cs typeface="Calibri" pitchFamily="34" charset="-120"/>
+              </a:rPr>
+              <a:t>Connecteur RCS LinkMobility</a:t>
+            </a:r>
+            <a:endParaRPr lang="en-US" sz="1300" dirty="0"/>
+          </a:p>
+          <a:p>
+            <a:pPr marL="152400" indent="-152400">
+              <a:spcAft>
+                <a:spcPts val="300"/>
+              </a:spcAft>
+              <a:buSzPct val="100000"/>
+              <a:buChar char="•"/>
+            </a:pPr>
+            <a:r>
+              <a:rPr lang="en-US" sz="1300" dirty="0">
+                <a:solidFill>
+                  <a:srgbClr val="E6F0F2"/>
+                </a:solidFill>
+                <a:latin typeface="Calibri" pitchFamily="34" charset="0"/>
+                <a:ea typeface="Calibri" pitchFamily="34" charset="-122"/>
+                <a:cs typeface="Calibri" pitchFamily="34" charset="-120"/>
+              </a:rPr>
+              <a:t>Nouveau SSO Engage : trajectoire</a:t>
+            </a:r>
+            <a:endParaRPr lang="en-US" sz="1300" dirty="0"/>
+          </a:p>
+          <a:p>
+            <a:pPr marL="152400" indent="-152400">
+              <a:spcAft>
+                <a:spcPts val="300"/>
+              </a:spcAft>
+              <a:buSzPct val="100000"/>
+              <a:buChar char="•"/>
+            </a:pPr>
+            <a:r>
+              <a:rPr lang="en-US" sz="1300" dirty="0">
+                <a:solidFill>
+                  <a:srgbClr val="E6F0F2"/>
+                </a:solidFill>
+                <a:latin typeface="Calibri" pitchFamily="34" charset="0"/>
+                <a:ea typeface="Calibri" pitchFamily="34" charset="-122"/>
+                <a:cs typeface="Calibri" pitchFamily="34" charset="-120"/>
+              </a:rPr>
+              <a:t>Pixel d’ouverture et exigences CNIL</a:t>
+            </a:r>
+            <a:endParaRPr lang="en-US" sz="1300" dirty="0"/>
+          </a:p>
+          <a:p>
+            <a:pPr marL="152400" indent="-152400">
+              <a:spcAft>
+                <a:spcPts val="300"/>
+              </a:spcAft>
+              <a:buSzPct val="100000"/>
+              <a:buChar char="•"/>
+            </a:pPr>
+            <a:r>
+              <a:rPr lang="en-US" sz="1300" dirty="0">
+                <a:solidFill>
+                  <a:srgbClr val="E6F0F2"/>
+                </a:solidFill>
+                <a:latin typeface="Calibri" pitchFamily="34" charset="0"/>
+                <a:ea typeface="Calibri" pitchFamily="34" charset="-122"/>
+                <a:cs typeface="Calibri" pitchFamily="34" charset="-120"/>
+              </a:rPr>
+              <a:t>Roadmap Engage 2026–2027</a:t>
+            </a:r>
+            <a:endParaRPr lang="en-US" sz="1300" dirty="0"/>
+          </a:p>
+        </p:txBody>
+      </p:sp>
+    </p:spTree>
+  </p:cSld>
+  <p:clrMapOvr>
+    <a:masterClrMapping/>
+  </p:clrMapOvr>
+</p:sld>
+</file>
+
+<file path=ppt/slides/slide11.xml><?xml version="1.0" encoding="utf-8"?>
+<p:sld xmlns:a="http://schemas.openxmlformats.org/drawingml/2006/main" xmlns:r="http://schemas.openxmlformats.org/officeDocument/2006/relationships" xmlns:p="http://schemas.openxmlformats.org/presentationml/2006/main">
+  <p:cSld name="Slide 11">
+    <p:bg>
+      <p:bgPr>
+        <a:solidFill>
           <a:srgbClr val="FFFFFF"/>
         </a:solidFill>
       </p:bgPr>
@@ -5015,7 +5432,7 @@
                 <a:ea typeface="Calibri" pitchFamily="34" charset="-122"/>
                 <a:cs typeface="Calibri" pitchFamily="34" charset="-120"/>
               </a:rPr>
-              <a:t>CDM</a:t>
+              <a:t>ENGAGE</a:t>
             </a:r>
             <a:endParaRPr lang="en-US" sz="900" dirty="0"/>
           </a:p>
@@ -5046,7 +5463,7 @@
               <a:buNone/>
             </a:pPr>
             <a:r>
-              <a:rPr lang="en-US" sz="2600" b="1" dirty="0">
+              <a:rPr lang="en-US" sz="2200" b="1" dirty="0">
                 <a:solidFill>
                   <a:srgbClr val="06404F"/>
                 </a:solidFill>
@@ -5054,9 +5471,9 @@
                 <a:ea typeface="Calibri" pitchFamily="34" charset="-122"/>
                 <a:cs typeface="Calibri" pitchFamily="34" charset="-120"/>
               </a:rPr>
-              <a:t>Roadmap CDM : cinq étapes de fin 2026 à fin 2027</a:t>
-            </a:r>
-            <a:endParaRPr lang="en-US" sz="2600" dirty="0"/>
+              <a:t>Selligent by Zeta : ce qui change, ce qui ne change pas</a:t>
+            </a:r>
+            <a:endParaRPr lang="en-US" sz="2200" dirty="0"/>
           </a:p>
         </p:txBody>
       </p:sp>
@@ -5093,7 +5510,7 @@
                 <a:ea typeface="Calibri" pitchFamily="34" charset="-122"/>
                 <a:cs typeface="Calibri" pitchFamily="34" charset="-120"/>
               </a:rPr>
-              <a:t>Votre CRM évolue de l’ergonomie et de la qualité de donnée vers l’automatisation, puis l’intelligence artificielle en fin de parcours.</a:t>
+              <a:t>Selligent fait désormais partie de Zeta Global. Pour Mutuelle Viasanté, la continuité prime : mêmes équipes, mêmes conditions, une plateforme qui continue d’investir.</a:t>
             </a:r>
             <a:endParaRPr lang="en-US" sz="1300" dirty="0"/>
           </a:p>
@@ -5132,7 +5549,7 @@
                 <a:ea typeface="Calibri" pitchFamily="34" charset="-122"/>
                 <a:cs typeface="Calibri" pitchFamily="34" charset="-120"/>
               </a:rPr>
-              <a:t>10</a:t>
+              <a:t>11</a:t>
             </a:r>
             <a:endParaRPr lang="en-US" sz="900" dirty="0"/>
           </a:p>
@@ -5146,123 +5563,12 @@
         </p:nvSpPr>
         <p:spPr>
           <a:xfrm>
-            <a:off x="1541038" y="2697480"/>
-            <a:ext cx="9109619" cy="0"/>
-          </a:xfrm>
-          <a:prstGeom prst="line">
-            <a:avLst/>
-          </a:prstGeom>
-          <a:noFill/>
-          <a:ln w="31750">
-            <a:solidFill>
-              <a:srgbClr val="D6E0E3"/>
-            </a:solidFill>
-            <a:prstDash val="solid"/>
-          </a:ln>
-        </p:spPr>
-      </p:sp>
-      <p:sp>
-        <p:nvSpPr>
-          <p:cNvPr id="9" name="Text 6"/>
-          <p:cNvSpPr txBox="1"/>
-          <p:nvPr/>
-        </p:nvSpPr>
-        <p:spPr>
-          <a:xfrm>
-            <a:off x="502920" y="2011680"/>
-            <a:ext cx="2076237" cy="320040"/>
-          </a:xfrm>
-          <a:prstGeom prst="rect">
-            <a:avLst/>
-          </a:prstGeom>
-          <a:noFill/>
-          <a:ln/>
-        </p:spPr>
-        <p:txBody>
-          <a:bodyPr wrap="square" lIns="0" tIns="0" rIns="0" bIns="0" rtlCol="0" anchor="ctr"/>
-          <a:lstStyle/>
-          <a:p>
-            <a:pPr algn="ctr" indent="0" marL="0">
-              <a:buNone/>
-            </a:pPr>
-            <a:r>
-              <a:rPr lang="en-US" sz="1300" b="1" dirty="0">
-                <a:solidFill>
-                  <a:srgbClr val="F28C28"/>
-                </a:solidFill>
-                <a:latin typeface="Calibri" pitchFamily="34" charset="0"/>
-                <a:ea typeface="Calibri" pitchFamily="34" charset="-122"/>
-                <a:cs typeface="Calibri" pitchFamily="34" charset="-120"/>
-              </a:rPr>
-              <a:t>Fin 2026</a:t>
-            </a:r>
-            <a:endParaRPr lang="en-US" sz="1300" dirty="0"/>
-          </a:p>
-        </p:txBody>
-      </p:sp>
-      <p:sp>
-        <p:nvSpPr>
-          <p:cNvPr id="10" name="Shape 7"/>
-          <p:cNvSpPr/>
-          <p:nvPr/>
-        </p:nvSpPr>
-        <p:spPr>
-          <a:xfrm>
-            <a:off x="1266718" y="2423160"/>
-            <a:ext cx="548640" cy="548640"/>
-          </a:xfrm>
-          <a:prstGeom prst="ellipse">
-            <a:avLst/>
-          </a:prstGeom>
-          <a:solidFill>
-            <a:srgbClr val="06404F"/>
-          </a:solidFill>
-          <a:ln w="12700">
-            <a:solidFill>
-              <a:srgbClr val="06404F"/>
-            </a:solidFill>
-            <a:prstDash val="solid"/>
-          </a:ln>
-        </p:spPr>
-      </p:sp>
-      <p:pic>
-        <p:nvPicPr>
-          <p:cNvPr id="11" name="Image 1" descr="preencoded.png">    </p:cNvPr>
-          <p:cNvPicPr>
-            <a:picLocks noChangeAspect="1"/>
-          </p:cNvPicPr>
-          <p:nvPr/>
-        </p:nvPicPr>
-        <p:blipFill>
-          <a:blip r:embed="rId2"/>
-          <a:stretch>
-            <a:fillRect/>
-          </a:stretch>
-        </p:blipFill>
-        <p:spPr>
-          <a:xfrm>
-            <a:off x="1409365" y="2565806"/>
-            <a:ext cx="263347" cy="263347"/>
-          </a:xfrm>
-          <a:prstGeom prst="rect">
-            <a:avLst/>
-          </a:prstGeom>
-        </p:spPr>
-      </p:pic>
-      <p:sp>
-        <p:nvSpPr>
-          <p:cNvPr id="12" name="Shape 8"/>
-          <p:cNvSpPr/>
-          <p:nvPr/>
-        </p:nvSpPr>
-        <p:spPr>
-          <a:xfrm>
-            <a:off x="502920" y="3383280"/>
-            <a:ext cx="2076237" cy="2286000"/>
+            <a:off x="502920" y="1965960"/>
+            <a:ext cx="2645588" cy="3840480"/>
           </a:xfrm>
           <a:prstGeom prst="roundRect">
             <a:avLst>
-              <a:gd name="adj" fmla="val 5285"/>
+              <a:gd name="adj" fmla="val 4148"/>
             </a:avLst>
           </a:prstGeom>
           <a:solidFill>
@@ -5285,178 +5591,13 @@
       </p:sp>
       <p:sp>
         <p:nvSpPr>
-          <p:cNvPr id="13" name="Text 9"/>
-          <p:cNvSpPr txBox="1"/>
-          <p:nvPr/>
-        </p:nvSpPr>
-        <p:spPr>
-          <a:xfrm>
-            <a:off x="704088" y="3566160"/>
-            <a:ext cx="1673901" cy="566928"/>
-          </a:xfrm>
-          <a:prstGeom prst="rect">
-            <a:avLst/>
-          </a:prstGeom>
-          <a:noFill/>
-          <a:ln/>
-        </p:spPr>
-        <p:txBody>
-          <a:bodyPr wrap="square" lIns="0" tIns="0" rIns="0" bIns="0" rtlCol="0" anchor="ctr"/>
-          <a:lstStyle/>
-          <a:p>
-            <a:pPr indent="0" marL="0">
-              <a:buNone/>
-            </a:pPr>
-            <a:r>
-              <a:rPr lang="en-US" sz="1400" b="1" dirty="0">
-                <a:solidFill>
-                  <a:srgbClr val="06404F"/>
-                </a:solidFill>
-                <a:latin typeface="Calibri" pitchFamily="34" charset="0"/>
-                <a:ea typeface="Calibri" pitchFamily="34" charset="-122"/>
-                <a:cs typeface="Calibri" pitchFamily="34" charset="-120"/>
-              </a:rPr>
-              <a:t>Expérience utilisateur</a:t>
-            </a:r>
-            <a:endParaRPr lang="en-US" sz="1400" dirty="0"/>
-          </a:p>
-        </p:txBody>
-      </p:sp>
-      <p:sp>
-        <p:nvSpPr>
-          <p:cNvPr id="14" name="Shape 10"/>
+          <p:cNvPr id="9" name="Shape 6"/>
           <p:cNvSpPr/>
           <p:nvPr/>
         </p:nvSpPr>
         <p:spPr>
           <a:xfrm>
-            <a:off x="704088" y="4187952"/>
-            <a:ext cx="1673901" cy="0"/>
-          </a:xfrm>
-          <a:prstGeom prst="line">
-            <a:avLst/>
-          </a:prstGeom>
-          <a:noFill/>
-          <a:ln w="9525">
-            <a:solidFill>
-              <a:srgbClr val="D6E0E3"/>
-            </a:solidFill>
-            <a:prstDash val="solid"/>
-          </a:ln>
-        </p:spPr>
-      </p:sp>
-      <p:sp>
-        <p:nvSpPr>
-          <p:cNvPr id="15" name="Text 11"/>
-          <p:cNvSpPr txBox="1"/>
-          <p:nvPr/>
-        </p:nvSpPr>
-        <p:spPr>
-          <a:xfrm>
-            <a:off x="704088" y="4297680"/>
-            <a:ext cx="1673901" cy="1234440"/>
-          </a:xfrm>
-          <a:prstGeom prst="rect">
-            <a:avLst/>
-          </a:prstGeom>
-          <a:noFill/>
-          <a:ln/>
-        </p:spPr>
-        <p:txBody>
-          <a:bodyPr wrap="square" lIns="0" tIns="0" rIns="0" bIns="0" rtlCol="0" anchor="t"/>
-          <a:lstStyle/>
-          <a:p>
-            <a:pPr marL="152400" indent="-152400">
-              <a:spcAft>
-                <a:spcPts val="500"/>
-              </a:spcAft>
-              <a:buSzPct val="100000"/>
-              <a:buChar char="•"/>
-            </a:pPr>
-            <a:r>
-              <a:rPr lang="en-US" sz="1050" dirty="0">
-                <a:solidFill>
-                  <a:srgbClr val="1F2A30"/>
-                </a:solidFill>
-                <a:latin typeface="Calibri" pitchFamily="34" charset="0"/>
-                <a:ea typeface="Calibri" pitchFamily="34" charset="-122"/>
-                <a:cs typeface="Calibri" pitchFamily="34" charset="-120"/>
-              </a:rPr>
-              <a:t>Interface modernisée, vues personnalisables</a:t>
-            </a:r>
-            <a:endParaRPr lang="en-US" sz="1050" dirty="0"/>
-          </a:p>
-          <a:p>
-            <a:pPr marL="152400" indent="-152400">
-              <a:spcAft>
-                <a:spcPts val="500"/>
-              </a:spcAft>
-              <a:buSzPct val="100000"/>
-              <a:buChar char="•"/>
-            </a:pPr>
-            <a:r>
-              <a:rPr lang="en-US" sz="1050" dirty="0">
-                <a:solidFill>
-                  <a:srgbClr val="1F2A30"/>
-                </a:solidFill>
-                <a:latin typeface="Calibri" pitchFamily="34" charset="0"/>
-                <a:ea typeface="Calibri" pitchFamily="34" charset="-122"/>
-                <a:cs typeface="Calibri" pitchFamily="34" charset="-120"/>
-              </a:rPr>
-              <a:t>Navigation simplifiée vers les fonctions clés</a:t>
-            </a:r>
-            <a:endParaRPr lang="en-US" sz="1050" dirty="0"/>
-          </a:p>
-        </p:txBody>
-      </p:sp>
-      <p:sp>
-        <p:nvSpPr>
-          <p:cNvPr id="16" name="Text 12"/>
-          <p:cNvSpPr txBox="1"/>
-          <p:nvPr/>
-        </p:nvSpPr>
-        <p:spPr>
-          <a:xfrm>
-            <a:off x="2780325" y="2011680"/>
-            <a:ext cx="2076237" cy="320040"/>
-          </a:xfrm>
-          <a:prstGeom prst="rect">
-            <a:avLst/>
-          </a:prstGeom>
-          <a:noFill/>
-          <a:ln/>
-        </p:spPr>
-        <p:txBody>
-          <a:bodyPr wrap="square" lIns="0" tIns="0" rIns="0" bIns="0" rtlCol="0" anchor="ctr"/>
-          <a:lstStyle/>
-          <a:p>
-            <a:pPr algn="ctr" indent="0" marL="0">
-              <a:buNone/>
-            </a:pPr>
-            <a:r>
-              <a:rPr lang="en-US" sz="1300" b="1" dirty="0">
-                <a:solidFill>
-                  <a:srgbClr val="F28C28"/>
-                </a:solidFill>
-                <a:latin typeface="Calibri" pitchFamily="34" charset="0"/>
-                <a:ea typeface="Calibri" pitchFamily="34" charset="-122"/>
-                <a:cs typeface="Calibri" pitchFamily="34" charset="-120"/>
-              </a:rPr>
-              <a:t>Q1 2027</a:t>
-            </a:r>
-            <a:endParaRPr lang="en-US" sz="1300" dirty="0"/>
-          </a:p>
-        </p:txBody>
-      </p:sp>
-      <p:sp>
-        <p:nvSpPr>
-          <p:cNvPr id="17" name="Shape 13"/>
-          <p:cNvSpPr/>
-          <p:nvPr/>
-        </p:nvSpPr>
-        <p:spPr>
-          <a:xfrm>
-            <a:off x="3544123" y="2423160"/>
+            <a:off x="704088" y="2167128"/>
             <a:ext cx="548640" cy="548640"/>
           </a:xfrm>
           <a:prstGeom prst="ellipse">
@@ -5475,21 +5616,21 @@
       </p:sp>
       <p:pic>
         <p:nvPicPr>
-          <p:cNvPr id="18" name="Image 2" descr="preencoded.png">    </p:cNvPr>
+          <p:cNvPr id="10" name="Image 1" descr="preencoded.png">    </p:cNvPr>
           <p:cNvPicPr>
             <a:picLocks noChangeAspect="1"/>
           </p:cNvPicPr>
           <p:nvPr/>
         </p:nvPicPr>
         <p:blipFill>
-          <a:blip r:embed="rId3"/>
+          <a:blip r:embed="rId2"/>
           <a:stretch>
             <a:fillRect/>
           </a:stretch>
         </p:blipFill>
         <p:spPr>
           <a:xfrm>
-            <a:off x="3686769" y="2565806"/>
+            <a:off x="846734" y="2309774"/>
             <a:ext cx="263347" cy="263347"/>
           </a:xfrm>
           <a:prstGeom prst="rect">
@@ -5499,18 +5640,144 @@
       </p:pic>
       <p:sp>
         <p:nvSpPr>
-          <p:cNvPr id="19" name="Shape 14"/>
+          <p:cNvPr id="11" name="Text 7"/>
+          <p:cNvSpPr txBox="1"/>
+          <p:nvPr/>
+        </p:nvSpPr>
+        <p:spPr>
+          <a:xfrm>
+            <a:off x="704088" y="2834640"/>
+            <a:ext cx="2243252" cy="640080"/>
+          </a:xfrm>
+          <a:prstGeom prst="rect">
+            <a:avLst/>
+          </a:prstGeom>
+          <a:noFill/>
+          <a:ln/>
+        </p:spPr>
+        <p:txBody>
+          <a:bodyPr wrap="square" lIns="0" tIns="0" rIns="0" bIns="0" rtlCol="0" anchor="ctr"/>
+          <a:lstStyle/>
+          <a:p>
+            <a:pPr indent="0" marL="0">
+              <a:buNone/>
+            </a:pPr>
+            <a:r>
+              <a:rPr lang="en-US" sz="1350" b="1" dirty="0">
+                <a:solidFill>
+                  <a:srgbClr val="06404F"/>
+                </a:solidFill>
+                <a:latin typeface="Calibri" pitchFamily="34" charset="0"/>
+                <a:ea typeface="Calibri" pitchFamily="34" charset="-122"/>
+                <a:cs typeface="Calibri" pitchFamily="34" charset="-120"/>
+              </a:rPr>
+              <a:t>Un investissement produit continu</a:t>
+            </a:r>
+            <a:endParaRPr lang="en-US" sz="1350" dirty="0"/>
+          </a:p>
+        </p:txBody>
+      </p:sp>
+      <p:sp>
+        <p:nvSpPr>
+          <p:cNvPr id="12" name="Shape 8"/>
           <p:cNvSpPr/>
           <p:nvPr/>
         </p:nvSpPr>
         <p:spPr>
           <a:xfrm>
-            <a:off x="2780325" y="3383280"/>
-            <a:ext cx="2076237" cy="2286000"/>
+            <a:off x="704088" y="3566160"/>
+            <a:ext cx="2243252" cy="0"/>
+          </a:xfrm>
+          <a:prstGeom prst="line">
+            <a:avLst/>
+          </a:prstGeom>
+          <a:noFill/>
+          <a:ln w="9525">
+            <a:solidFill>
+              <a:srgbClr val="D6E0E3"/>
+            </a:solidFill>
+            <a:prstDash val="solid"/>
+          </a:ln>
+        </p:spPr>
+      </p:sp>
+      <p:sp>
+        <p:nvSpPr>
+          <p:cNvPr id="13" name="Text 9"/>
+          <p:cNvSpPr txBox="1"/>
+          <p:nvPr/>
+        </p:nvSpPr>
+        <p:spPr>
+          <a:xfrm>
+            <a:off x="704088" y="3703320"/>
+            <a:ext cx="2243252" cy="1965960"/>
+          </a:xfrm>
+          <a:prstGeom prst="rect">
+            <a:avLst/>
+          </a:prstGeom>
+          <a:noFill/>
+          <a:ln/>
+        </p:spPr>
+        <p:txBody>
+          <a:bodyPr wrap="square" lIns="0" tIns="0" rIns="0" bIns="0" rtlCol="0" anchor="t"/>
+          <a:lstStyle/>
+          <a:p>
+            <a:pPr marL="152400" indent="-152400">
+              <a:spcAft>
+                <a:spcPts val="600"/>
+              </a:spcAft>
+              <a:buSzPct val="100000"/>
+              <a:buChar char="•"/>
+            </a:pPr>
+            <a:r>
+              <a:rPr lang="en-US" sz="1100" dirty="0">
+                <a:solidFill>
+                  <a:srgbClr val="1F2A30"/>
+                </a:solidFill>
+                <a:latin typeface="Calibri" pitchFamily="34" charset="0"/>
+                <a:ea typeface="Calibri" pitchFamily="34" charset="-122"/>
+                <a:cs typeface="Calibri" pitchFamily="34" charset="-120"/>
+              </a:rPr>
+              <a:t>Équipes produit et ingénierie en Belgique, renforcées par des équipes dédiées à l’IA et à la donnée.</a:t>
+            </a:r>
+            <a:endParaRPr lang="en-US" sz="1100" dirty="0"/>
+          </a:p>
+          <a:p>
+            <a:pPr marL="152400" indent="-152400">
+              <a:spcAft>
+                <a:spcPts val="600"/>
+              </a:spcAft>
+              <a:buSzPct val="100000"/>
+              <a:buChar char="•"/>
+            </a:pPr>
+            <a:r>
+              <a:rPr lang="en-US" sz="1100" dirty="0">
+                <a:solidFill>
+                  <a:srgbClr val="1F2A30"/>
+                </a:solidFill>
+                <a:latin typeface="Calibri" pitchFamily="34" charset="0"/>
+                <a:ea typeface="Calibri" pitchFamily="34" charset="-122"/>
+                <a:cs typeface="Calibri" pitchFamily="34" charset="-120"/>
+              </a:rPr>
+              <a:t>Roadmap Engage active : conformité, données, orchestration, intelligence.</a:t>
+            </a:r>
+            <a:endParaRPr lang="en-US" sz="1100" dirty="0"/>
+          </a:p>
+        </p:txBody>
+      </p:sp>
+      <p:sp>
+        <p:nvSpPr>
+          <p:cNvPr id="14" name="Shape 10"/>
+          <p:cNvSpPr/>
+          <p:nvPr/>
+        </p:nvSpPr>
+        <p:spPr>
+          <a:xfrm>
+            <a:off x="3349676" y="1965960"/>
+            <a:ext cx="2645588" cy="3840480"/>
           </a:xfrm>
           <a:prstGeom prst="roundRect">
             <a:avLst>
-              <a:gd name="adj" fmla="val 5285"/>
+              <a:gd name="adj" fmla="val 4148"/>
             </a:avLst>
           </a:prstGeom>
           <a:solidFill>
@@ -5533,178 +5800,13 @@
       </p:sp>
       <p:sp>
         <p:nvSpPr>
-          <p:cNvPr id="20" name="Text 15"/>
-          <p:cNvSpPr txBox="1"/>
-          <p:nvPr/>
-        </p:nvSpPr>
-        <p:spPr>
-          <a:xfrm>
-            <a:off x="2981493" y="3566160"/>
-            <a:ext cx="1673901" cy="566928"/>
-          </a:xfrm>
-          <a:prstGeom prst="rect">
-            <a:avLst/>
-          </a:prstGeom>
-          <a:noFill/>
-          <a:ln/>
-        </p:spPr>
-        <p:txBody>
-          <a:bodyPr wrap="square" lIns="0" tIns="0" rIns="0" bIns="0" rtlCol="0" anchor="ctr"/>
-          <a:lstStyle/>
-          <a:p>
-            <a:pPr indent="0" marL="0">
-              <a:buNone/>
-            </a:pPr>
-            <a:r>
-              <a:rPr lang="en-US" sz="1400" b="1" dirty="0">
-                <a:solidFill>
-                  <a:srgbClr val="06404F"/>
-                </a:solidFill>
-                <a:latin typeface="Calibri" pitchFamily="34" charset="0"/>
-                <a:ea typeface="Calibri" pitchFamily="34" charset="-122"/>
-                <a:cs typeface="Calibri" pitchFamily="34" charset="-120"/>
-              </a:rPr>
-              <a:t>Vue client 360°</a:t>
-            </a:r>
-            <a:endParaRPr lang="en-US" sz="1400" dirty="0"/>
-          </a:p>
-        </p:txBody>
-      </p:sp>
-      <p:sp>
-        <p:nvSpPr>
-          <p:cNvPr id="21" name="Shape 16"/>
+          <p:cNvPr id="15" name="Shape 11"/>
           <p:cNvSpPr/>
           <p:nvPr/>
         </p:nvSpPr>
         <p:spPr>
           <a:xfrm>
-            <a:off x="2981493" y="4187952"/>
-            <a:ext cx="1673901" cy="0"/>
-          </a:xfrm>
-          <a:prstGeom prst="line">
-            <a:avLst/>
-          </a:prstGeom>
-          <a:noFill/>
-          <a:ln w="9525">
-            <a:solidFill>
-              <a:srgbClr val="D6E0E3"/>
-            </a:solidFill>
-            <a:prstDash val="solid"/>
-          </a:ln>
-        </p:spPr>
-      </p:sp>
-      <p:sp>
-        <p:nvSpPr>
-          <p:cNvPr id="22" name="Text 17"/>
-          <p:cNvSpPr txBox="1"/>
-          <p:nvPr/>
-        </p:nvSpPr>
-        <p:spPr>
-          <a:xfrm>
-            <a:off x="2981493" y="4297680"/>
-            <a:ext cx="1673901" cy="1234440"/>
-          </a:xfrm>
-          <a:prstGeom prst="rect">
-            <a:avLst/>
-          </a:prstGeom>
-          <a:noFill/>
-          <a:ln/>
-        </p:spPr>
-        <p:txBody>
-          <a:bodyPr wrap="square" lIns="0" tIns="0" rIns="0" bIns="0" rtlCol="0" anchor="t"/>
-          <a:lstStyle/>
-          <a:p>
-            <a:pPr marL="152400" indent="-152400">
-              <a:spcAft>
-                <a:spcPts val="500"/>
-              </a:spcAft>
-              <a:buSzPct val="100000"/>
-              <a:buChar char="•"/>
-            </a:pPr>
-            <a:r>
-              <a:rPr lang="en-US" sz="1050" dirty="0">
-                <a:solidFill>
-                  <a:srgbClr val="1F2A30"/>
-                </a:solidFill>
-                <a:latin typeface="Calibri" pitchFamily="34" charset="0"/>
-                <a:ea typeface="Calibri" pitchFamily="34" charset="-122"/>
-                <a:cs typeface="Calibri" pitchFamily="34" charset="-120"/>
-              </a:rPr>
-              <a:t>Historique, interactions, incidents et opportunités réunis</a:t>
-            </a:r>
-            <a:endParaRPr lang="en-US" sz="1050" dirty="0"/>
-          </a:p>
-          <a:p>
-            <a:pPr marL="152400" indent="-152400">
-              <a:spcAft>
-                <a:spcPts val="500"/>
-              </a:spcAft>
-              <a:buSzPct val="100000"/>
-              <a:buChar char="•"/>
-            </a:pPr>
-            <a:r>
-              <a:rPr lang="en-US" sz="1050" dirty="0">
-                <a:solidFill>
-                  <a:srgbClr val="1F2A30"/>
-                </a:solidFill>
-                <a:latin typeface="Calibri" pitchFamily="34" charset="0"/>
-                <a:ea typeface="Calibri" pitchFamily="34" charset="-122"/>
-                <a:cs typeface="Calibri" pitchFamily="34" charset="-120"/>
-              </a:rPr>
-              <a:t>Dédoublonnage centralisé et validation automatique</a:t>
-            </a:r>
-            <a:endParaRPr lang="en-US" sz="1050" dirty="0"/>
-          </a:p>
-        </p:txBody>
-      </p:sp>
-      <p:sp>
-        <p:nvSpPr>
-          <p:cNvPr id="23" name="Text 18"/>
-          <p:cNvSpPr txBox="1"/>
-          <p:nvPr/>
-        </p:nvSpPr>
-        <p:spPr>
-          <a:xfrm>
-            <a:off x="5057729" y="2011680"/>
-            <a:ext cx="2076237" cy="320040"/>
-          </a:xfrm>
-          <a:prstGeom prst="rect">
-            <a:avLst/>
-          </a:prstGeom>
-          <a:noFill/>
-          <a:ln/>
-        </p:spPr>
-        <p:txBody>
-          <a:bodyPr wrap="square" lIns="0" tIns="0" rIns="0" bIns="0" rtlCol="0" anchor="ctr"/>
-          <a:lstStyle/>
-          <a:p>
-            <a:pPr algn="ctr" indent="0" marL="0">
-              <a:buNone/>
-            </a:pPr>
-            <a:r>
-              <a:rPr lang="en-US" sz="1300" b="1" dirty="0">
-                <a:solidFill>
-                  <a:srgbClr val="F28C28"/>
-                </a:solidFill>
-                <a:latin typeface="Calibri" pitchFamily="34" charset="0"/>
-                <a:ea typeface="Calibri" pitchFamily="34" charset="-122"/>
-                <a:cs typeface="Calibri" pitchFamily="34" charset="-120"/>
-              </a:rPr>
-              <a:t>Q2 2027</a:t>
-            </a:r>
-            <a:endParaRPr lang="en-US" sz="1300" dirty="0"/>
-          </a:p>
-        </p:txBody>
-      </p:sp>
-      <p:sp>
-        <p:nvSpPr>
-          <p:cNvPr id="24" name="Shape 19"/>
-          <p:cNvSpPr/>
-          <p:nvPr/>
-        </p:nvSpPr>
-        <p:spPr>
-          <a:xfrm>
-            <a:off x="5821528" y="2423160"/>
+            <a:off x="3550844" y="2167128"/>
             <a:ext cx="548640" cy="548640"/>
           </a:xfrm>
           <a:prstGeom prst="ellipse">
@@ -5723,21 +5825,21 @@
       </p:sp>
       <p:pic>
         <p:nvPicPr>
-          <p:cNvPr id="25" name="Image 3" descr="preencoded.png">    </p:cNvPr>
+          <p:cNvPr id="16" name="Image 2" descr="preencoded.png">    </p:cNvPr>
           <p:cNvPicPr>
             <a:picLocks noChangeAspect="1"/>
           </p:cNvPicPr>
           <p:nvPr/>
         </p:nvPicPr>
         <p:blipFill>
-          <a:blip r:embed="rId4"/>
+          <a:blip r:embed="rId3"/>
           <a:stretch>
             <a:fillRect/>
           </a:stretch>
         </p:blipFill>
         <p:spPr>
           <a:xfrm>
-            <a:off x="5964174" y="2565806"/>
+            <a:off x="3693490" y="2309774"/>
             <a:ext cx="263347" cy="263347"/>
           </a:xfrm>
           <a:prstGeom prst="rect">
@@ -5747,18 +5849,144 @@
       </p:pic>
       <p:sp>
         <p:nvSpPr>
-          <p:cNvPr id="26" name="Shape 20"/>
+          <p:cNvPr id="17" name="Text 12"/>
+          <p:cNvSpPr txBox="1"/>
+          <p:nvPr/>
+        </p:nvSpPr>
+        <p:spPr>
+          <a:xfrm>
+            <a:off x="3550844" y="2834640"/>
+            <a:ext cx="2243252" cy="640080"/>
+          </a:xfrm>
+          <a:prstGeom prst="rect">
+            <a:avLst/>
+          </a:prstGeom>
+          <a:noFill/>
+          <a:ln/>
+        </p:spPr>
+        <p:txBody>
+          <a:bodyPr wrap="square" lIns="0" tIns="0" rIns="0" bIns="0" rtlCol="0" anchor="ctr"/>
+          <a:lstStyle/>
+          <a:p>
+            <a:pPr indent="0" marL="0">
+              <a:buNone/>
+            </a:pPr>
+            <a:r>
+              <a:rPr lang="en-US" sz="1350" b="1" dirty="0">
+                <a:solidFill>
+                  <a:srgbClr val="06404F"/>
+                </a:solidFill>
+                <a:latin typeface="Calibri" pitchFamily="34" charset="0"/>
+                <a:ea typeface="Calibri" pitchFamily="34" charset="-122"/>
+                <a:cs typeface="Calibri" pitchFamily="34" charset="-120"/>
+              </a:rPr>
+              <a:t>Aucune migration imposée</a:t>
+            </a:r>
+            <a:endParaRPr lang="en-US" sz="1350" dirty="0"/>
+          </a:p>
+        </p:txBody>
+      </p:sp>
+      <p:sp>
+        <p:nvSpPr>
+          <p:cNvPr id="18" name="Shape 13"/>
           <p:cNvSpPr/>
           <p:nvPr/>
         </p:nvSpPr>
         <p:spPr>
           <a:xfrm>
-            <a:off x="5057729" y="3383280"/>
-            <a:ext cx="2076237" cy="2286000"/>
+            <a:off x="3550844" y="3566160"/>
+            <a:ext cx="2243252" cy="0"/>
+          </a:xfrm>
+          <a:prstGeom prst="line">
+            <a:avLst/>
+          </a:prstGeom>
+          <a:noFill/>
+          <a:ln w="9525">
+            <a:solidFill>
+              <a:srgbClr val="D6E0E3"/>
+            </a:solidFill>
+            <a:prstDash val="solid"/>
+          </a:ln>
+        </p:spPr>
+      </p:sp>
+      <p:sp>
+        <p:nvSpPr>
+          <p:cNvPr id="19" name="Text 14"/>
+          <p:cNvSpPr txBox="1"/>
+          <p:nvPr/>
+        </p:nvSpPr>
+        <p:spPr>
+          <a:xfrm>
+            <a:off x="3550844" y="3703320"/>
+            <a:ext cx="2243252" cy="1965960"/>
+          </a:xfrm>
+          <a:prstGeom prst="rect">
+            <a:avLst/>
+          </a:prstGeom>
+          <a:noFill/>
+          <a:ln/>
+        </p:spPr>
+        <p:txBody>
+          <a:bodyPr wrap="square" lIns="0" tIns="0" rIns="0" bIns="0" rtlCol="0" anchor="t"/>
+          <a:lstStyle/>
+          <a:p>
+            <a:pPr marL="152400" indent="-152400">
+              <a:spcAft>
+                <a:spcPts val="600"/>
+              </a:spcAft>
+              <a:buSzPct val="100000"/>
+              <a:buChar char="•"/>
+            </a:pPr>
+            <a:r>
+              <a:rPr lang="en-US" sz="1100" dirty="0">
+                <a:solidFill>
+                  <a:srgbClr val="1F2A30"/>
+                </a:solidFill>
+                <a:latin typeface="Calibri" pitchFamily="34" charset="0"/>
+                <a:ea typeface="Calibri" pitchFamily="34" charset="-122"/>
+                <a:cs typeface="Calibri" pitchFamily="34" charset="-120"/>
+              </a:rPr>
+              <a:t>Priorité : tirer le meilleur de votre plateforme actuelle.</a:t>
+            </a:r>
+            <a:endParaRPr lang="en-US" sz="1100" dirty="0"/>
+          </a:p>
+          <a:p>
+            <a:pPr marL="152400" indent="-152400">
+              <a:spcAft>
+                <a:spcPts val="600"/>
+              </a:spcAft>
+              <a:buSzPct val="100000"/>
+              <a:buChar char="•"/>
+            </a:pPr>
+            <a:r>
+              <a:rPr lang="en-US" sz="1100" dirty="0">
+                <a:solidFill>
+                  <a:srgbClr val="1F2A30"/>
+                </a:solidFill>
+                <a:latin typeface="Calibri" pitchFamily="34" charset="0"/>
+                <a:ea typeface="Calibri" pitchFamily="34" charset="-122"/>
+                <a:cs typeface="Calibri" pitchFamily="34" charset="-120"/>
+              </a:rPr>
+              <a:t>Les capacités Zeta (IA, données) viennent en complément, uniquement si elles servent vos besoins.</a:t>
+            </a:r>
+            <a:endParaRPr lang="en-US" sz="1100" dirty="0"/>
+          </a:p>
+        </p:txBody>
+      </p:sp>
+      <p:sp>
+        <p:nvSpPr>
+          <p:cNvPr id="20" name="Shape 15"/>
+          <p:cNvSpPr/>
+          <p:nvPr/>
+        </p:nvSpPr>
+        <p:spPr>
+          <a:xfrm>
+            <a:off x="6196432" y="1965960"/>
+            <a:ext cx="2645588" cy="3840480"/>
           </a:xfrm>
           <a:prstGeom prst="roundRect">
             <a:avLst>
-              <a:gd name="adj" fmla="val 5285"/>
+              <a:gd name="adj" fmla="val 4148"/>
             </a:avLst>
           </a:prstGeom>
           <a:solidFill>
@@ -5781,178 +6009,13 @@
       </p:sp>
       <p:sp>
         <p:nvSpPr>
-          <p:cNvPr id="27" name="Text 21"/>
-          <p:cNvSpPr txBox="1"/>
-          <p:nvPr/>
-        </p:nvSpPr>
-        <p:spPr>
-          <a:xfrm>
-            <a:off x="5258897" y="3566160"/>
-            <a:ext cx="1673901" cy="566928"/>
-          </a:xfrm>
-          <a:prstGeom prst="rect">
-            <a:avLst/>
-          </a:prstGeom>
-          <a:noFill/>
-          <a:ln/>
-        </p:spPr>
-        <p:txBody>
-          <a:bodyPr wrap="square" lIns="0" tIns="0" rIns="0" bIns="0" rtlCol="0" anchor="ctr"/>
-          <a:lstStyle/>
-          <a:p>
-            <a:pPr indent="0" marL="0">
-              <a:buNone/>
-            </a:pPr>
-            <a:r>
-              <a:rPr lang="en-US" sz="1400" b="1" dirty="0">
-                <a:solidFill>
-                  <a:srgbClr val="06404F"/>
-                </a:solidFill>
-                <a:latin typeface="Calibri" pitchFamily="34" charset="0"/>
-                <a:ea typeface="Calibri" pitchFamily="34" charset="-122"/>
-                <a:cs typeface="Calibri" pitchFamily="34" charset="-120"/>
-              </a:rPr>
-              <a:t>Automatisation</a:t>
-            </a:r>
-            <a:endParaRPr lang="en-US" sz="1400" dirty="0"/>
-          </a:p>
-        </p:txBody>
-      </p:sp>
-      <p:sp>
-        <p:nvSpPr>
-          <p:cNvPr id="28" name="Shape 22"/>
+          <p:cNvPr id="21" name="Shape 16"/>
           <p:cNvSpPr/>
           <p:nvPr/>
         </p:nvSpPr>
         <p:spPr>
           <a:xfrm>
-            <a:off x="5258897" y="4187952"/>
-            <a:ext cx="1673901" cy="0"/>
-          </a:xfrm>
-          <a:prstGeom prst="line">
-            <a:avLst/>
-          </a:prstGeom>
-          <a:noFill/>
-          <a:ln w="9525">
-            <a:solidFill>
-              <a:srgbClr val="D6E0E3"/>
-            </a:solidFill>
-            <a:prstDash val="solid"/>
-          </a:ln>
-        </p:spPr>
-      </p:sp>
-      <p:sp>
-        <p:nvSpPr>
-          <p:cNvPr id="29" name="Text 23"/>
-          <p:cNvSpPr txBox="1"/>
-          <p:nvPr/>
-        </p:nvSpPr>
-        <p:spPr>
-          <a:xfrm>
-            <a:off x="5258897" y="4297680"/>
-            <a:ext cx="1673901" cy="1234440"/>
-          </a:xfrm>
-          <a:prstGeom prst="rect">
-            <a:avLst/>
-          </a:prstGeom>
-          <a:noFill/>
-          <a:ln/>
-        </p:spPr>
-        <p:txBody>
-          <a:bodyPr wrap="square" lIns="0" tIns="0" rIns="0" bIns="0" rtlCol="0" anchor="t"/>
-          <a:lstStyle/>
-          <a:p>
-            <a:pPr marL="152400" indent="-152400">
-              <a:spcAft>
-                <a:spcPts val="500"/>
-              </a:spcAft>
-              <a:buSzPct val="100000"/>
-              <a:buChar char="•"/>
-            </a:pPr>
-            <a:r>
-              <a:rPr lang="en-US" sz="1050" dirty="0">
-                <a:solidFill>
-                  <a:srgbClr val="1F2A30"/>
-                </a:solidFill>
-                <a:latin typeface="Calibri" pitchFamily="34" charset="0"/>
-                <a:ea typeface="Calibri" pitchFamily="34" charset="-122"/>
-                <a:cs typeface="Calibri" pitchFamily="34" charset="-120"/>
-              </a:rPr>
-              <a:t>Workflows de relance et gestion d’incidents</a:t>
-            </a:r>
-            <a:endParaRPr lang="en-US" sz="1050" dirty="0"/>
-          </a:p>
-          <a:p>
-            <a:pPr marL="152400" indent="-152400">
-              <a:spcAft>
-                <a:spcPts val="500"/>
-              </a:spcAft>
-              <a:buSzPct val="100000"/>
-              <a:buChar char="•"/>
-            </a:pPr>
-            <a:r>
-              <a:rPr lang="en-US" sz="1050" dirty="0">
-                <a:solidFill>
-                  <a:srgbClr val="1F2A30"/>
-                </a:solidFill>
-                <a:latin typeface="Calibri" pitchFamily="34" charset="0"/>
-                <a:ea typeface="Calibri" pitchFamily="34" charset="-122"/>
-                <a:cs typeface="Calibri" pitchFamily="34" charset="-120"/>
-              </a:rPr>
-              <a:t>Rappels intelligents sur les échéances clés</a:t>
-            </a:r>
-            <a:endParaRPr lang="en-US" sz="1050" dirty="0"/>
-          </a:p>
-        </p:txBody>
-      </p:sp>
-      <p:sp>
-        <p:nvSpPr>
-          <p:cNvPr id="30" name="Text 24"/>
-          <p:cNvSpPr txBox="1"/>
-          <p:nvPr/>
-        </p:nvSpPr>
-        <p:spPr>
-          <a:xfrm>
-            <a:off x="7335134" y="2011680"/>
-            <a:ext cx="2076237" cy="320040"/>
-          </a:xfrm>
-          <a:prstGeom prst="rect">
-            <a:avLst/>
-          </a:prstGeom>
-          <a:noFill/>
-          <a:ln/>
-        </p:spPr>
-        <p:txBody>
-          <a:bodyPr wrap="square" lIns="0" tIns="0" rIns="0" bIns="0" rtlCol="0" anchor="ctr"/>
-          <a:lstStyle/>
-          <a:p>
-            <a:pPr algn="ctr" indent="0" marL="0">
-              <a:buNone/>
-            </a:pPr>
-            <a:r>
-              <a:rPr lang="en-US" sz="1300" b="1" dirty="0">
-                <a:solidFill>
-                  <a:srgbClr val="F28C28"/>
-                </a:solidFill>
-                <a:latin typeface="Calibri" pitchFamily="34" charset="0"/>
-                <a:ea typeface="Calibri" pitchFamily="34" charset="-122"/>
-                <a:cs typeface="Calibri" pitchFamily="34" charset="-120"/>
-              </a:rPr>
-              <a:t>Q3 2027</a:t>
-            </a:r>
-            <a:endParaRPr lang="en-US" sz="1300" dirty="0"/>
-          </a:p>
-        </p:txBody>
-      </p:sp>
-      <p:sp>
-        <p:nvSpPr>
-          <p:cNvPr id="31" name="Shape 25"/>
-          <p:cNvSpPr/>
-          <p:nvPr/>
-        </p:nvSpPr>
-        <p:spPr>
-          <a:xfrm>
-            <a:off x="8098932" y="2423160"/>
+            <a:off x="6397600" y="2167128"/>
             <a:ext cx="548640" cy="548640"/>
           </a:xfrm>
           <a:prstGeom prst="ellipse">
@@ -5971,21 +6034,21 @@
       </p:sp>
       <p:pic>
         <p:nvPicPr>
-          <p:cNvPr id="32" name="Image 4" descr="preencoded.png">    </p:cNvPr>
+          <p:cNvPr id="22" name="Image 3" descr="preencoded.png">    </p:cNvPr>
           <p:cNvPicPr>
             <a:picLocks noChangeAspect="1"/>
           </p:cNvPicPr>
           <p:nvPr/>
         </p:nvPicPr>
         <p:blipFill>
-          <a:blip r:embed="rId5"/>
+          <a:blip r:embed="rId4"/>
           <a:stretch>
             <a:fillRect/>
           </a:stretch>
         </p:blipFill>
         <p:spPr>
           <a:xfrm>
-            <a:off x="8241579" y="2565806"/>
+            <a:off x="6540246" y="2309774"/>
             <a:ext cx="263347" cy="263347"/>
           </a:xfrm>
           <a:prstGeom prst="rect">
@@ -5995,18 +6058,144 @@
       </p:pic>
       <p:sp>
         <p:nvSpPr>
-          <p:cNvPr id="33" name="Shape 26"/>
+          <p:cNvPr id="23" name="Text 17"/>
+          <p:cNvSpPr txBox="1"/>
+          <p:nvPr/>
+        </p:nvSpPr>
+        <p:spPr>
+          <a:xfrm>
+            <a:off x="6397600" y="2834640"/>
+            <a:ext cx="2243252" cy="640080"/>
+          </a:xfrm>
+          <a:prstGeom prst="rect">
+            <a:avLst/>
+          </a:prstGeom>
+          <a:noFill/>
+          <a:ln/>
+        </p:spPr>
+        <p:txBody>
+          <a:bodyPr wrap="square" lIns="0" tIns="0" rIns="0" bIns="0" rtlCol="0" anchor="ctr"/>
+          <a:lstStyle/>
+          <a:p>
+            <a:pPr indent="0" marL="0">
+              <a:buNone/>
+            </a:pPr>
+            <a:r>
+              <a:rPr lang="en-US" sz="1350" b="1" dirty="0">
+                <a:solidFill>
+                  <a:srgbClr val="06404F"/>
+                </a:solidFill>
+                <a:latin typeface="Calibri" pitchFamily="34" charset="0"/>
+                <a:ea typeface="Calibri" pitchFamily="34" charset="-122"/>
+                <a:cs typeface="Calibri" pitchFamily="34" charset="-120"/>
+              </a:rPr>
+              <a:t>Vos conditions préservées</a:t>
+            </a:r>
+            <a:endParaRPr lang="en-US" sz="1350" dirty="0"/>
+          </a:p>
+        </p:txBody>
+      </p:sp>
+      <p:sp>
+        <p:nvSpPr>
+          <p:cNvPr id="24" name="Shape 18"/>
           <p:cNvSpPr/>
           <p:nvPr/>
         </p:nvSpPr>
         <p:spPr>
           <a:xfrm>
-            <a:off x="7335134" y="3383280"/>
-            <a:ext cx="2076237" cy="2286000"/>
+            <a:off x="6397600" y="3566160"/>
+            <a:ext cx="2243252" cy="0"/>
+          </a:xfrm>
+          <a:prstGeom prst="line">
+            <a:avLst/>
+          </a:prstGeom>
+          <a:noFill/>
+          <a:ln w="9525">
+            <a:solidFill>
+              <a:srgbClr val="D6E0E3"/>
+            </a:solidFill>
+            <a:prstDash val="solid"/>
+          </a:ln>
+        </p:spPr>
+      </p:sp>
+      <p:sp>
+        <p:nvSpPr>
+          <p:cNvPr id="25" name="Text 19"/>
+          <p:cNvSpPr txBox="1"/>
+          <p:nvPr/>
+        </p:nvSpPr>
+        <p:spPr>
+          <a:xfrm>
+            <a:off x="6397600" y="3703320"/>
+            <a:ext cx="2243252" cy="1965960"/>
+          </a:xfrm>
+          <a:prstGeom prst="rect">
+            <a:avLst/>
+          </a:prstGeom>
+          <a:noFill/>
+          <a:ln/>
+        </p:spPr>
+        <p:txBody>
+          <a:bodyPr wrap="square" lIns="0" tIns="0" rIns="0" bIns="0" rtlCol="0" anchor="t"/>
+          <a:lstStyle/>
+          <a:p>
+            <a:pPr marL="152400" indent="-152400">
+              <a:spcAft>
+                <a:spcPts val="600"/>
+              </a:spcAft>
+              <a:buSzPct val="100000"/>
+              <a:buChar char="•"/>
+            </a:pPr>
+            <a:r>
+              <a:rPr lang="en-US" sz="1100" dirty="0">
+                <a:solidFill>
+                  <a:srgbClr val="1F2A30"/>
+                </a:solidFill>
+                <a:latin typeface="Calibri" pitchFamily="34" charset="0"/>
+                <a:ea typeface="Calibri" pitchFamily="34" charset="-122"/>
+                <a:cs typeface="Calibri" pitchFamily="34" charset="-120"/>
+              </a:rPr>
+              <a:t>Aucun changement tarifaire imposé au renouvellement pour les clients Selligent.</a:t>
+            </a:r>
+            <a:endParaRPr lang="en-US" sz="1100" dirty="0"/>
+          </a:p>
+          <a:p>
+            <a:pPr marL="152400" indent="-152400">
+              <a:spcAft>
+                <a:spcPts val="600"/>
+              </a:spcAft>
+              <a:buSzPct val="100000"/>
+              <a:buChar char="•"/>
+            </a:pPr>
+            <a:r>
+              <a:rPr lang="en-US" sz="1100" dirty="0">
+                <a:solidFill>
+                  <a:srgbClr val="1F2A30"/>
+                </a:solidFill>
+                <a:latin typeface="Calibri" pitchFamily="34" charset="0"/>
+                <a:ea typeface="Calibri" pitchFamily="34" charset="-122"/>
+                <a:cs typeface="Calibri" pitchFamily="34" charset="-120"/>
+              </a:rPr>
+              <a:t>Vos modules et vos usages restent inchangés.</a:t>
+            </a:r>
+            <a:endParaRPr lang="en-US" sz="1100" dirty="0"/>
+          </a:p>
+        </p:txBody>
+      </p:sp>
+      <p:sp>
+        <p:nvSpPr>
+          <p:cNvPr id="26" name="Shape 20"/>
+          <p:cNvSpPr/>
+          <p:nvPr/>
+        </p:nvSpPr>
+        <p:spPr>
+          <a:xfrm>
+            <a:off x="9043187" y="1965960"/>
+            <a:ext cx="2645588" cy="3840480"/>
           </a:xfrm>
           <a:prstGeom prst="roundRect">
             <a:avLst>
-              <a:gd name="adj" fmla="val 5285"/>
+              <a:gd name="adj" fmla="val 4148"/>
             </a:avLst>
           </a:prstGeom>
           <a:solidFill>
@@ -6029,14 +6218,63 @@
       </p:sp>
       <p:sp>
         <p:nvSpPr>
-          <p:cNvPr id="34" name="Text 27"/>
+          <p:cNvPr id="27" name="Shape 21"/>
+          <p:cNvSpPr/>
+          <p:nvPr/>
+        </p:nvSpPr>
+        <p:spPr>
+          <a:xfrm>
+            <a:off x="9244355" y="2167128"/>
+            <a:ext cx="548640" cy="548640"/>
+          </a:xfrm>
+          <a:prstGeom prst="ellipse">
+            <a:avLst/>
+          </a:prstGeom>
+          <a:solidFill>
+            <a:srgbClr val="06404F"/>
+          </a:solidFill>
+          <a:ln w="12700">
+            <a:solidFill>
+              <a:srgbClr val="06404F"/>
+            </a:solidFill>
+            <a:prstDash val="solid"/>
+          </a:ln>
+        </p:spPr>
+      </p:sp>
+      <p:pic>
+        <p:nvPicPr>
+          <p:cNvPr id="28" name="Image 4" descr="preencoded.png">    </p:cNvPr>
+          <p:cNvPicPr>
+            <a:picLocks noChangeAspect="1"/>
+          </p:cNvPicPr>
+          <p:nvPr/>
+        </p:nvPicPr>
+        <p:blipFill>
+          <a:blip r:embed="rId5"/>
+          <a:stretch>
+            <a:fillRect/>
+          </a:stretch>
+        </p:blipFill>
+        <p:spPr>
+          <a:xfrm>
+            <a:off x="9387002" y="2309774"/>
+            <a:ext cx="263347" cy="263347"/>
+          </a:xfrm>
+          <a:prstGeom prst="rect">
+            <a:avLst/>
+          </a:prstGeom>
+        </p:spPr>
+      </p:pic>
+      <p:sp>
+        <p:nvSpPr>
+          <p:cNvPr id="29" name="Text 22"/>
           <p:cNvSpPr txBox="1"/>
           <p:nvPr/>
         </p:nvSpPr>
         <p:spPr>
           <a:xfrm>
-            <a:off x="7536302" y="3566160"/>
-            <a:ext cx="1673901" cy="566928"/>
+            <a:off x="9244355" y="2834640"/>
+            <a:ext cx="2243252" cy="640080"/>
           </a:xfrm>
           <a:prstGeom prst="rect">
             <a:avLst/>
@@ -6052,7 +6290,7 @@
               <a:buNone/>
             </a:pPr>
             <a:r>
-              <a:rPr lang="en-US" sz="1400" b="1" dirty="0">
+              <a:rPr lang="en-US" sz="1350" b="1" dirty="0">
                 <a:solidFill>
                   <a:srgbClr val="06404F"/>
                 </a:solidFill>
@@ -6060,22 +6298,22 @@
                 <a:ea typeface="Calibri" pitchFamily="34" charset="-122"/>
                 <a:cs typeface="Calibri" pitchFamily="34" charset="-120"/>
               </a:rPr>
-              <a:t>Analytique avancée</a:t>
-            </a:r>
-            <a:endParaRPr lang="en-US" sz="1400" dirty="0"/>
-          </a:p>
-        </p:txBody>
-      </p:sp>
-      <p:sp>
-        <p:nvSpPr>
-          <p:cNvPr id="35" name="Shape 28"/>
+              <a:t>Europe, RGPD et proximité</a:t>
+            </a:r>
+            <a:endParaRPr lang="en-US" sz="1350" dirty="0"/>
+          </a:p>
+        </p:txBody>
+      </p:sp>
+      <p:sp>
+        <p:nvSpPr>
+          <p:cNvPr id="30" name="Shape 23"/>
           <p:cNvSpPr/>
           <p:nvPr/>
         </p:nvSpPr>
         <p:spPr>
           <a:xfrm>
-            <a:off x="7536302" y="4187952"/>
-            <a:ext cx="1673901" cy="0"/>
+            <a:off x="9244355" y="3566160"/>
+            <a:ext cx="2243252" cy="0"/>
           </a:xfrm>
           <a:prstGeom prst="line">
             <a:avLst/>
@@ -6091,14 +6329,14 @@
       </p:sp>
       <p:sp>
         <p:nvSpPr>
-          <p:cNvPr id="36" name="Text 29"/>
+          <p:cNvPr id="31" name="Text 24"/>
           <p:cNvSpPr txBox="1"/>
           <p:nvPr/>
         </p:nvSpPr>
         <p:spPr>
           <a:xfrm>
-            <a:off x="7536302" y="4297680"/>
-            <a:ext cx="1673901" cy="1234440"/>
+            <a:off x="9244355" y="3703320"/>
+            <a:ext cx="2243252" cy="1965960"/>
           </a:xfrm>
           <a:prstGeom prst="rect">
             <a:avLst/>
@@ -6112,13 +6350,13 @@
           <a:p>
             <a:pPr marL="152400" indent="-152400">
               <a:spcAft>
-                <a:spcPts val="500"/>
+                <a:spcPts val="600"/>
               </a:spcAft>
               <a:buSzPct val="100000"/>
               <a:buChar char="•"/>
             </a:pPr>
             <a:r>
-              <a:rPr lang="en-US" sz="1050" dirty="0">
+              <a:rPr lang="en-US" sz="1100" dirty="0">
                 <a:solidFill>
                   <a:srgbClr val="1F2A30"/>
                 </a:solidFill>
@@ -6126,20 +6364,20 @@
                 <a:ea typeface="Calibri" pitchFamily="34" charset="-122"/>
                 <a:cs typeface="Calibri" pitchFamily="34" charset="-120"/>
               </a:rPr>
-              <a:t>Tableaux de bord ventes et service client</a:t>
-            </a:r>
-            <a:endParaRPr lang="en-US" sz="1050" dirty="0"/>
+              <a:t>Stratégie produit fondée sur le marché européen et sur les retours des clients.</a:t>
+            </a:r>
+            <a:endParaRPr lang="en-US" sz="1100" dirty="0"/>
           </a:p>
           <a:p>
             <a:pPr marL="152400" indent="-152400">
               <a:spcAft>
-                <a:spcPts val="500"/>
+                <a:spcPts val="600"/>
               </a:spcAft>
               <a:buSzPct val="100000"/>
               <a:buChar char="•"/>
             </a:pPr>
             <a:r>
-              <a:rPr lang="en-US" sz="1050" dirty="0">
+              <a:rPr lang="en-US" sz="1100" dirty="0">
                 <a:solidFill>
                   <a:srgbClr val="1F2A30"/>
                 </a:solidFill>
@@ -6147,692 +6385,9 @@
                 <a:ea typeface="Calibri" pitchFamily="34" charset="-122"/>
                 <a:cs typeface="Calibri" pitchFamily="34" charset="-120"/>
               </a:rPr>
-              <a:t>Segmentation dynamique et rapports prédictifs</a:t>
-            </a:r>
-            <a:endParaRPr lang="en-US" sz="1050" dirty="0"/>
-          </a:p>
-        </p:txBody>
-      </p:sp>
-      <p:sp>
-        <p:nvSpPr>
-          <p:cNvPr id="37" name="Text 30"/>
-          <p:cNvSpPr txBox="1"/>
-          <p:nvPr/>
-        </p:nvSpPr>
-        <p:spPr>
-          <a:xfrm>
-            <a:off x="9612539" y="2011680"/>
-            <a:ext cx="2076237" cy="320040"/>
-          </a:xfrm>
-          <a:prstGeom prst="rect">
-            <a:avLst/>
-          </a:prstGeom>
-          <a:noFill/>
-          <a:ln/>
-        </p:spPr>
-        <p:txBody>
-          <a:bodyPr wrap="square" lIns="0" tIns="0" rIns="0" bIns="0" rtlCol="0" anchor="ctr"/>
-          <a:lstStyle/>
-          <a:p>
-            <a:pPr algn="ctr" indent="0" marL="0">
-              <a:buNone/>
-            </a:pPr>
-            <a:r>
-              <a:rPr lang="en-US" sz="1300" b="1" dirty="0">
-                <a:solidFill>
-                  <a:srgbClr val="F28C28"/>
-                </a:solidFill>
-                <a:latin typeface="Calibri" pitchFamily="34" charset="0"/>
-                <a:ea typeface="Calibri" pitchFamily="34" charset="-122"/>
-                <a:cs typeface="Calibri" pitchFamily="34" charset="-120"/>
-              </a:rPr>
-              <a:t>Q4 2027</a:t>
-            </a:r>
-            <a:endParaRPr lang="en-US" sz="1300" dirty="0"/>
-          </a:p>
-        </p:txBody>
-      </p:sp>
-      <p:sp>
-        <p:nvSpPr>
-          <p:cNvPr id="38" name="Shape 31"/>
-          <p:cNvSpPr/>
-          <p:nvPr/>
-        </p:nvSpPr>
-        <p:spPr>
-          <a:xfrm>
-            <a:off x="10376337" y="2423160"/>
-            <a:ext cx="548640" cy="548640"/>
-          </a:xfrm>
-          <a:prstGeom prst="ellipse">
-            <a:avLst/>
-          </a:prstGeom>
-          <a:solidFill>
-            <a:srgbClr val="F28C28"/>
-          </a:solidFill>
-          <a:ln w="12700">
-            <a:solidFill>
-              <a:srgbClr val="F28C28"/>
-            </a:solidFill>
-            <a:prstDash val="solid"/>
-          </a:ln>
-        </p:spPr>
-      </p:sp>
-      <p:pic>
-        <p:nvPicPr>
-          <p:cNvPr id="39" name="Image 5" descr="preencoded.png">    </p:cNvPr>
-          <p:cNvPicPr>
-            <a:picLocks noChangeAspect="1"/>
-          </p:cNvPicPr>
-          <p:nvPr/>
-        </p:nvPicPr>
-        <p:blipFill>
-          <a:blip r:embed="rId6"/>
-          <a:stretch>
-            <a:fillRect/>
-          </a:stretch>
-        </p:blipFill>
-        <p:spPr>
-          <a:xfrm>
-            <a:off x="10518983" y="2565806"/>
-            <a:ext cx="263347" cy="263347"/>
-          </a:xfrm>
-          <a:prstGeom prst="rect">
-            <a:avLst/>
-          </a:prstGeom>
-        </p:spPr>
-      </p:pic>
-      <p:sp>
-        <p:nvSpPr>
-          <p:cNvPr id="40" name="Shape 32"/>
-          <p:cNvSpPr/>
-          <p:nvPr/>
-        </p:nvSpPr>
-        <p:spPr>
-          <a:xfrm>
-            <a:off x="9612539" y="3383280"/>
-            <a:ext cx="2076237" cy="2286000"/>
-          </a:xfrm>
-          <a:prstGeom prst="roundRect">
-            <a:avLst>
-              <a:gd name="adj" fmla="val 5285"/>
-            </a:avLst>
-          </a:prstGeom>
-          <a:solidFill>
-            <a:srgbClr val="FFFFFF"/>
-          </a:solidFill>
-          <a:ln w="12700">
-            <a:solidFill>
-              <a:srgbClr val="FFFFFF"/>
-            </a:solidFill>
-            <a:prstDash val="solid"/>
-          </a:ln>
-          <a:effectLst>
-            <a:outerShdw sx="100000" sy="100000" kx="0" ky="0" algn="bl" rotWithShape="0" blurRad="76200" dist="25400" dir="5400000">
-              <a:srgbClr val="000000">
-                <a:alpha val="10000"/>
-              </a:srgbClr>
-            </a:outerShdw>
-          </a:effectLst>
-        </p:spPr>
-      </p:sp>
-      <p:sp>
-        <p:nvSpPr>
-          <p:cNvPr id="41" name="Text 33"/>
-          <p:cNvSpPr txBox="1"/>
-          <p:nvPr/>
-        </p:nvSpPr>
-        <p:spPr>
-          <a:xfrm>
-            <a:off x="9813707" y="3566160"/>
-            <a:ext cx="1673901" cy="566928"/>
-          </a:xfrm>
-          <a:prstGeom prst="rect">
-            <a:avLst/>
-          </a:prstGeom>
-          <a:noFill/>
-          <a:ln/>
-        </p:spPr>
-        <p:txBody>
-          <a:bodyPr wrap="square" lIns="0" tIns="0" rIns="0" bIns="0" rtlCol="0" anchor="ctr"/>
-          <a:lstStyle/>
-          <a:p>
-            <a:pPr indent="0" marL="0">
-              <a:buNone/>
-            </a:pPr>
-            <a:r>
-              <a:rPr lang="en-US" sz="1400" b="1" dirty="0">
-                <a:solidFill>
-                  <a:srgbClr val="06404F"/>
-                </a:solidFill>
-                <a:latin typeface="Calibri" pitchFamily="34" charset="0"/>
-                <a:ea typeface="Calibri" pitchFamily="34" charset="-122"/>
-                <a:cs typeface="Calibri" pitchFamily="34" charset="-120"/>
-              </a:rPr>
-              <a:t>Intelligence artificielle</a:t>
-            </a:r>
-            <a:endParaRPr lang="en-US" sz="1400" dirty="0"/>
-          </a:p>
-        </p:txBody>
-      </p:sp>
-      <p:sp>
-        <p:nvSpPr>
-          <p:cNvPr id="42" name="Shape 34"/>
-          <p:cNvSpPr/>
-          <p:nvPr/>
-        </p:nvSpPr>
-        <p:spPr>
-          <a:xfrm>
-            <a:off x="9813707" y="4187952"/>
-            <a:ext cx="1673901" cy="0"/>
-          </a:xfrm>
-          <a:prstGeom prst="line">
-            <a:avLst/>
-          </a:prstGeom>
-          <a:noFill/>
-          <a:ln w="9525">
-            <a:solidFill>
-              <a:srgbClr val="D6E0E3"/>
-            </a:solidFill>
-            <a:prstDash val="solid"/>
-          </a:ln>
-        </p:spPr>
-      </p:sp>
-      <p:sp>
-        <p:nvSpPr>
-          <p:cNvPr id="43" name="Text 35"/>
-          <p:cNvSpPr txBox="1"/>
-          <p:nvPr/>
-        </p:nvSpPr>
-        <p:spPr>
-          <a:xfrm>
-            <a:off x="9813707" y="4297680"/>
-            <a:ext cx="1673901" cy="1234440"/>
-          </a:xfrm>
-          <a:prstGeom prst="rect">
-            <a:avLst/>
-          </a:prstGeom>
-          <a:noFill/>
-          <a:ln/>
-        </p:spPr>
-        <p:txBody>
-          <a:bodyPr wrap="square" lIns="0" tIns="0" rIns="0" bIns="0" rtlCol="0" anchor="t"/>
-          <a:lstStyle/>
-          <a:p>
-            <a:pPr marL="152400" indent="-152400">
-              <a:spcAft>
-                <a:spcPts val="500"/>
-              </a:spcAft>
-              <a:buSzPct val="100000"/>
-              <a:buChar char="•"/>
-            </a:pPr>
-            <a:r>
-              <a:rPr lang="en-US" sz="1050" dirty="0">
-                <a:solidFill>
-                  <a:srgbClr val="1F2A30"/>
-                </a:solidFill>
-                <a:latin typeface="Calibri" pitchFamily="34" charset="0"/>
-                <a:ea typeface="Calibri" pitchFamily="34" charset="-122"/>
-                <a:cs typeface="Calibri" pitchFamily="34" charset="-120"/>
-              </a:rPr>
-              <a:t>Suggestions d’actions et priorisation des tâches</a:t>
-            </a:r>
-            <a:endParaRPr lang="en-US" sz="1050" dirty="0"/>
-          </a:p>
-          <a:p>
-            <a:pPr marL="152400" indent="-152400">
-              <a:spcAft>
-                <a:spcPts val="500"/>
-              </a:spcAft>
-              <a:buSzPct val="100000"/>
-              <a:buChar char="•"/>
-            </a:pPr>
-            <a:r>
-              <a:rPr lang="en-US" sz="1050" dirty="0">
-                <a:solidFill>
-                  <a:srgbClr val="1F2A30"/>
-                </a:solidFill>
-                <a:latin typeface="Calibri" pitchFamily="34" charset="0"/>
-                <a:ea typeface="Calibri" pitchFamily="34" charset="-122"/>
-                <a:cs typeface="Calibri" pitchFamily="34" charset="-120"/>
-              </a:rPr>
-              <a:t>Aide à la rédaction, auto-complétion, recherche intelligente</a:t>
-            </a:r>
-            <a:endParaRPr lang="en-US" sz="1050" dirty="0"/>
-          </a:p>
-        </p:txBody>
-      </p:sp>
-      <p:sp>
-        <p:nvSpPr>
-          <p:cNvPr id="44" name="Text 36"/>
-          <p:cNvSpPr txBox="1"/>
-          <p:nvPr/>
-        </p:nvSpPr>
-        <p:spPr>
-          <a:xfrm>
-            <a:off x="502920" y="5897880"/>
-            <a:ext cx="11185855" cy="320040"/>
-          </a:xfrm>
-          <a:prstGeom prst="rect">
-            <a:avLst/>
-          </a:prstGeom>
-          <a:noFill/>
-          <a:ln/>
-        </p:spPr>
-        <p:txBody>
-          <a:bodyPr wrap="square" lIns="0" tIns="0" rIns="0" bIns="0" rtlCol="0" anchor="ctr"/>
-          <a:lstStyle/>
-          <a:p>
-            <a:pPr algn="ctr" indent="0" marL="0">
-              <a:buNone/>
-            </a:pPr>
-            <a:r>
-              <a:rPr lang="en-US" sz="1250" b="1" dirty="0">
-                <a:solidFill>
-                  <a:srgbClr val="06404F"/>
-                </a:solidFill>
-                <a:latin typeface="Calibri" pitchFamily="34" charset="0"/>
-                <a:ea typeface="Calibri" pitchFamily="34" charset="-122"/>
-                <a:cs typeface="Calibri" pitchFamily="34" charset="-120"/>
-              </a:rPr>
-              <a:t>Quelles étapes sont prioritaires pour vos équipes ?</a:t>
-            </a:r>
-            <a:endParaRPr lang="en-US" sz="1250" dirty="0"/>
-          </a:p>
-        </p:txBody>
-      </p:sp>
-    </p:spTree>
-  </p:cSld>
-  <p:clrMapOvr>
-    <a:masterClrMapping/>
-  </p:clrMapOvr>
-</p:sld>
-</file>
-
-<file path=ppt/slides/slide11.xml><?xml version="1.0" encoding="utf-8"?>
-<p:sld xmlns:a="http://schemas.openxmlformats.org/drawingml/2006/main" xmlns:r="http://schemas.openxmlformats.org/officeDocument/2006/relationships" xmlns:p="http://schemas.openxmlformats.org/presentationml/2006/main">
-  <p:cSld name="Slide 11">
-    <p:bg>
-      <p:bgPr>
-        <a:solidFill>
-          <a:srgbClr val="06404F"/>
-        </a:solidFill>
-      </p:bgPr>
-    </p:bg>
-    <p:spTree>
-      <p:nvGrpSpPr>
-        <p:cNvPr id="1" name=""/>
-        <p:cNvGrpSpPr/>
-        <p:nvPr/>
-      </p:nvGrpSpPr>
-      <p:grpSpPr>
-        <a:xfrm>
-          <a:off x="0" y="0"/>
-          <a:ext cx="0" cy="0"/>
-          <a:chOff x="0" y="0"/>
-          <a:chExt cx="0" cy="0"/>
-        </a:xfrm>
-      </p:grpSpPr>
-      <p:pic>
-        <p:nvPicPr>
-          <p:cNvPr id="2" name="Image 0" descr="/tmp/claude-0/-home-user-IqraQuest/536b9ae9-447b-5fe8-88fd-3a84bf7ca86c/scratchpad/work/logo_white.png">    </p:cNvPr>
-          <p:cNvPicPr>
-            <a:picLocks noChangeAspect="1"/>
-          </p:cNvPicPr>
-          <p:nvPr/>
-        </p:nvPicPr>
-        <p:blipFill>
-          <a:blip r:embed="rId1"/>
-          <a:stretch>
-            <a:fillRect/>
-          </a:stretch>
-        </p:blipFill>
-        <p:spPr>
-          <a:xfrm>
-            <a:off x="502920" y="347472"/>
-            <a:ext cx="1463040" cy="526895"/>
-          </a:xfrm>
-          <a:prstGeom prst="rect">
-            <a:avLst/>
-          </a:prstGeom>
-        </p:spPr>
-      </p:pic>
-      <p:sp>
-        <p:nvSpPr>
-          <p:cNvPr id="3" name="Shape 0"/>
-          <p:cNvSpPr/>
-          <p:nvPr/>
-        </p:nvSpPr>
-        <p:spPr>
-          <a:xfrm>
-            <a:off x="8778240" y="1097280"/>
-            <a:ext cx="4754880" cy="4754880"/>
-          </a:xfrm>
-          <a:prstGeom prst="ellipse">
-            <a:avLst/>
-          </a:prstGeom>
-          <a:solidFill>
-            <a:srgbClr val="0F6B7A">
-              <a:alpha val="45000"/>
-            </a:srgbClr>
-          </a:solidFill>
-          <a:ln w="12700">
-            <a:solidFill>
-              <a:srgbClr val="0F6B7A"/>
-            </a:solidFill>
-            <a:prstDash val="solid"/>
-          </a:ln>
-        </p:spPr>
-      </p:sp>
-      <p:sp>
-        <p:nvSpPr>
-          <p:cNvPr id="4" name="Shape 1"/>
-          <p:cNvSpPr/>
-          <p:nvPr/>
-        </p:nvSpPr>
-        <p:spPr>
-          <a:xfrm>
-            <a:off x="8138160" y="4206240"/>
-            <a:ext cx="1463040" cy="1463040"/>
-          </a:xfrm>
-          <a:prstGeom prst="ellipse">
-            <a:avLst/>
-          </a:prstGeom>
-          <a:solidFill>
-            <a:srgbClr val="F28C28">
-              <a:alpha val="85000"/>
-            </a:srgbClr>
-          </a:solidFill>
-          <a:ln w="12700">
-            <a:solidFill>
-              <a:srgbClr val="F28C28"/>
-            </a:solidFill>
-            <a:prstDash val="solid"/>
-          </a:ln>
-        </p:spPr>
-      </p:sp>
-      <p:sp>
-        <p:nvSpPr>
-          <p:cNvPr id="5" name="Text 2"/>
-          <p:cNvSpPr txBox="1"/>
-          <p:nvPr/>
-        </p:nvSpPr>
-        <p:spPr>
-          <a:xfrm>
-            <a:off x="502920" y="1417320"/>
-            <a:ext cx="2743200" cy="822960"/>
-          </a:xfrm>
-          <a:prstGeom prst="rect">
-            <a:avLst/>
-          </a:prstGeom>
-          <a:noFill/>
-          <a:ln/>
-        </p:spPr>
-        <p:txBody>
-          <a:bodyPr wrap="square" lIns="0" tIns="0" rIns="0" bIns="0" rtlCol="0" anchor="ctr"/>
-          <a:lstStyle/>
-          <a:p>
-            <a:pPr indent="0" marL="0">
-              <a:buNone/>
-            </a:pPr>
-            <a:r>
-              <a:rPr lang="en-US" sz="5600" b="1" dirty="0">
-                <a:solidFill>
-                  <a:srgbClr val="F28C28"/>
-                </a:solidFill>
-                <a:latin typeface="Calibri" pitchFamily="34" charset="0"/>
-                <a:ea typeface="Calibri" pitchFamily="34" charset="-122"/>
-                <a:cs typeface="Calibri" pitchFamily="34" charset="-120"/>
-              </a:rPr>
-              <a:t>02</a:t>
-            </a:r>
-            <a:endParaRPr lang="en-US" sz="5600" dirty="0"/>
-          </a:p>
-        </p:txBody>
-      </p:sp>
-      <p:sp>
-        <p:nvSpPr>
-          <p:cNvPr id="6" name="Text 3"/>
-          <p:cNvSpPr txBox="1"/>
-          <p:nvPr/>
-        </p:nvSpPr>
-        <p:spPr>
-          <a:xfrm>
-            <a:off x="502920" y="2240280"/>
-            <a:ext cx="8503920" cy="1234440"/>
-          </a:xfrm>
-          <a:prstGeom prst="rect">
-            <a:avLst/>
-          </a:prstGeom>
-          <a:noFill/>
-          <a:ln/>
-        </p:spPr>
-        <p:txBody>
-          <a:bodyPr wrap="square" lIns="0" tIns="0" rIns="0" bIns="0" rtlCol="0" anchor="ctr"/>
-          <a:lstStyle/>
-          <a:p>
-            <a:pPr indent="0" marL="0">
-              <a:buNone/>
-            </a:pPr>
-            <a:r>
-              <a:rPr lang="en-US" sz="3600" b="1" dirty="0">
-                <a:solidFill>
-                  <a:srgbClr val="FFFFFF"/>
-                </a:solidFill>
-                <a:latin typeface="Calibri" pitchFamily="34" charset="0"/>
-                <a:ea typeface="Calibri" pitchFamily="34" charset="-122"/>
-                <a:cs typeface="Calibri" pitchFamily="34" charset="-120"/>
-              </a:rPr>
-              <a:t>Engage — votre plateforme marketing</a:t>
-            </a:r>
-            <a:endParaRPr lang="en-US" sz="3600" dirty="0"/>
-          </a:p>
-        </p:txBody>
-      </p:sp>
-      <p:sp>
-        <p:nvSpPr>
-          <p:cNvPr id="7" name="Text 4"/>
-          <p:cNvSpPr txBox="1"/>
-          <p:nvPr/>
-        </p:nvSpPr>
-        <p:spPr>
-          <a:xfrm>
-            <a:off x="502920" y="3520440"/>
-            <a:ext cx="8503920" cy="411480"/>
-          </a:xfrm>
-          <a:prstGeom prst="rect">
-            <a:avLst/>
-          </a:prstGeom>
-          <a:noFill/>
-          <a:ln/>
-        </p:spPr>
-        <p:txBody>
-          <a:bodyPr wrap="square" lIns="0" tIns="0" rIns="0" bIns="0" rtlCol="0" anchor="ctr"/>
-          <a:lstStyle/>
-          <a:p>
-            <a:pPr indent="0" marL="0">
-              <a:buNone/>
-            </a:pPr>
-            <a:r>
-              <a:rPr lang="en-US" sz="1800" dirty="0">
-                <a:solidFill>
-                  <a:srgbClr val="CFE3E7"/>
-                </a:solidFill>
-                <a:latin typeface="Calibri" pitchFamily="34" charset="0"/>
-                <a:ea typeface="Calibri" pitchFamily="34" charset="-122"/>
-                <a:cs typeface="Calibri" pitchFamily="34" charset="-120"/>
-              </a:rPr>
-              <a:t>Continuité, performance, canaux, produit et conformité</a:t>
-            </a:r>
-            <a:endParaRPr lang="en-US" sz="1800" dirty="0"/>
-          </a:p>
-        </p:txBody>
-      </p:sp>
-      <p:sp>
-        <p:nvSpPr>
-          <p:cNvPr id="8" name="Text 5"/>
-          <p:cNvSpPr txBox="1"/>
-          <p:nvPr/>
-        </p:nvSpPr>
-        <p:spPr>
-          <a:xfrm>
-            <a:off x="502920" y="4160520"/>
-            <a:ext cx="6858000" cy="1737360"/>
-          </a:xfrm>
-          <a:prstGeom prst="rect">
-            <a:avLst/>
-          </a:prstGeom>
-          <a:noFill/>
-          <a:ln/>
-        </p:spPr>
-        <p:txBody>
-          <a:bodyPr wrap="square" lIns="0" tIns="0" rIns="0" bIns="0" rtlCol="0" anchor="t"/>
-          <a:lstStyle/>
-          <a:p>
-            <a:pPr marL="152400" indent="-152400">
-              <a:spcAft>
-                <a:spcPts val="300"/>
-              </a:spcAft>
-              <a:buSzPct val="100000"/>
-              <a:buChar char="•"/>
-            </a:pPr>
-            <a:r>
-              <a:rPr lang="en-US" sz="1300" dirty="0">
-                <a:solidFill>
-                  <a:srgbClr val="E6F0F2"/>
-                </a:solidFill>
-                <a:latin typeface="Calibri" pitchFamily="34" charset="0"/>
-                <a:ea typeface="Calibri" pitchFamily="34" charset="-122"/>
-                <a:cs typeface="Calibri" pitchFamily="34" charset="-120"/>
-              </a:rPr>
-              <a:t>Selligent by Zeta : ce qui change, ce qui ne change pas</a:t>
-            </a:r>
-            <a:endParaRPr lang="en-US" sz="1300" dirty="0"/>
-          </a:p>
-          <a:p>
-            <a:pPr marL="152400" indent="-152400">
-              <a:spcAft>
-                <a:spcPts val="300"/>
-              </a:spcAft>
-              <a:buSzPct val="100000"/>
-              <a:buChar char="•"/>
-            </a:pPr>
-            <a:r>
-              <a:rPr lang="en-US" sz="1300" dirty="0">
-                <a:solidFill>
-                  <a:srgbClr val="E6F0F2"/>
-                </a:solidFill>
-                <a:latin typeface="Calibri" pitchFamily="34" charset="0"/>
-                <a:ea typeface="Calibri" pitchFamily="34" charset="-122"/>
-                <a:cs typeface="Calibri" pitchFamily="34" charset="-120"/>
-              </a:rPr>
-              <a:t>Performance email vs secteur</a:t>
-            </a:r>
-            <a:endParaRPr lang="en-US" sz="1300" dirty="0"/>
-          </a:p>
-          <a:p>
-            <a:pPr marL="152400" indent="-152400">
-              <a:spcAft>
-                <a:spcPts val="300"/>
-              </a:spcAft>
-              <a:buSzPct val="100000"/>
-              <a:buChar char="•"/>
-            </a:pPr>
-            <a:r>
-              <a:rPr lang="en-US" sz="1300" dirty="0">
-                <a:solidFill>
-                  <a:srgbClr val="E6F0F2"/>
-                </a:solidFill>
-                <a:latin typeface="Calibri" pitchFamily="34" charset="0"/>
-                <a:ea typeface="Calibri" pitchFamily="34" charset="-122"/>
-                <a:cs typeface="Calibri" pitchFamily="34" charset="-120"/>
-              </a:rPr>
-              <a:t>Volumes SMS</a:t>
-            </a:r>
-            <a:endParaRPr lang="en-US" sz="1300" dirty="0"/>
-          </a:p>
-          <a:p>
-            <a:pPr marL="152400" indent="-152400">
-              <a:spcAft>
-                <a:spcPts val="300"/>
-              </a:spcAft>
-              <a:buSzPct val="100000"/>
-              <a:buChar char="•"/>
-            </a:pPr>
-            <a:r>
-              <a:rPr lang="en-US" sz="1300" dirty="0">
-                <a:solidFill>
-                  <a:srgbClr val="E6F0F2"/>
-                </a:solidFill>
-                <a:latin typeface="Calibri" pitchFamily="34" charset="0"/>
-                <a:ea typeface="Calibri" pitchFamily="34" charset="-122"/>
-                <a:cs typeface="Calibri" pitchFamily="34" charset="-120"/>
-              </a:rPr>
-              <a:t>Connecteur RCS LinkMobility</a:t>
-            </a:r>
-            <a:endParaRPr lang="en-US" sz="1300" dirty="0"/>
-          </a:p>
-          <a:p>
-            <a:pPr marL="152400" indent="-152400">
-              <a:spcAft>
-                <a:spcPts val="300"/>
-              </a:spcAft>
-              <a:buSzPct val="100000"/>
-              <a:buChar char="•"/>
-            </a:pPr>
-            <a:r>
-              <a:rPr lang="en-US" sz="1300" dirty="0">
-                <a:solidFill>
-                  <a:srgbClr val="E6F0F2"/>
-                </a:solidFill>
-                <a:latin typeface="Calibri" pitchFamily="34" charset="0"/>
-                <a:ea typeface="Calibri" pitchFamily="34" charset="-122"/>
-                <a:cs typeface="Calibri" pitchFamily="34" charset="-120"/>
-              </a:rPr>
-              <a:t>Nouveau SSO Engage : trajectoire</a:t>
-            </a:r>
-            <a:endParaRPr lang="en-US" sz="1300" dirty="0"/>
-          </a:p>
-          <a:p>
-            <a:pPr marL="152400" indent="-152400">
-              <a:spcAft>
-                <a:spcPts val="300"/>
-              </a:spcAft>
-              <a:buSzPct val="100000"/>
-              <a:buChar char="•"/>
-            </a:pPr>
-            <a:r>
-              <a:rPr lang="en-US" sz="1300" dirty="0">
-                <a:solidFill>
-                  <a:srgbClr val="E6F0F2"/>
-                </a:solidFill>
-                <a:latin typeface="Calibri" pitchFamily="34" charset="0"/>
-                <a:ea typeface="Calibri" pitchFamily="34" charset="-122"/>
-                <a:cs typeface="Calibri" pitchFamily="34" charset="-120"/>
-              </a:rPr>
-              <a:t>Pixel d’ouverture et exigences CNIL</a:t>
-            </a:r>
-            <a:endParaRPr lang="en-US" sz="1300" dirty="0"/>
-          </a:p>
-          <a:p>
-            <a:pPr marL="152400" indent="-152400">
-              <a:spcAft>
-                <a:spcPts val="300"/>
-              </a:spcAft>
-              <a:buSzPct val="100000"/>
-              <a:buChar char="•"/>
-            </a:pPr>
-            <a:r>
-              <a:rPr lang="en-US" sz="1300" dirty="0">
-                <a:solidFill>
-                  <a:srgbClr val="E6F0F2"/>
-                </a:solidFill>
-                <a:latin typeface="Calibri" pitchFamily="34" charset="0"/>
-                <a:ea typeface="Calibri" pitchFamily="34" charset="-122"/>
-                <a:cs typeface="Calibri" pitchFamily="34" charset="-120"/>
-              </a:rPr>
-              <a:t>Roadmap Engage 2026–2027</a:t>
-            </a:r>
-            <a:endParaRPr lang="en-US" sz="1300" dirty="0"/>
+              <a:t>RGPD, confidentialité et réglementation européenne restent prioritaires ; vos interlocuteurs restent les mêmes.</a:t>
+            </a:r>
+            <a:endParaRPr lang="en-US" sz="1100" dirty="0"/>
           </a:p>
         </p:txBody>
       </p:sp>
@@ -6991,7 +6546,7 @@
                 <a:ea typeface="Calibri" pitchFamily="34" charset="-122"/>
                 <a:cs typeface="Calibri" pitchFamily="34" charset="-120"/>
               </a:rPr>
-              <a:t>Selligent by Zeta : ce qui change, ce qui ne change pas</a:t>
+              <a:t>Base de données Engage : 47 GB sur 50, anticipons ensemble</a:t>
             </a:r>
             <a:endParaRPr lang="en-US" sz="2200" dirty="0"/>
           </a:p>
@@ -7030,7 +6585,7 @@
                 <a:ea typeface="Calibri" pitchFamily="34" charset="-122"/>
                 <a:cs typeface="Calibri" pitchFamily="34" charset="-120"/>
               </a:rPr>
-              <a:t>Selligent fait désormais partie de Zeta Global. Pour Mutuelle Viasanté, la continuité prime : mêmes équipes, mêmes conditions, une plateforme qui continue d’investir.</a:t>
+              <a:t>+3 GB en six mois, par paliers, et un plateau à 47 GB depuis juin : 3 GB de marge, soit environ six mois si le rythme du premier semestre reprend.</a:t>
             </a:r>
             <a:endParaRPr lang="en-US" sz="1300" dirty="0"/>
           </a:p>
@@ -7084,11 +6639,11 @@
         <p:spPr>
           <a:xfrm>
             <a:off x="502920" y="1965960"/>
-            <a:ext cx="2645588" cy="3840480"/>
+            <a:ext cx="6766560" cy="4251960"/>
           </a:xfrm>
           <a:prstGeom prst="roundRect">
             <a:avLst>
-              <a:gd name="adj" fmla="val 4148"/>
+              <a:gd name="adj" fmla="val 2581"/>
             </a:avLst>
           </a:prstGeom>
           <a:solidFill>
@@ -7111,63 +6666,14 @@
       </p:sp>
       <p:sp>
         <p:nvSpPr>
-          <p:cNvPr id="9" name="Shape 6"/>
-          <p:cNvSpPr/>
-          <p:nvPr/>
-        </p:nvSpPr>
-        <p:spPr>
-          <a:xfrm>
-            <a:off x="704088" y="2167128"/>
-            <a:ext cx="548640" cy="548640"/>
-          </a:xfrm>
-          <a:prstGeom prst="ellipse">
-            <a:avLst/>
-          </a:prstGeom>
-          <a:solidFill>
-            <a:srgbClr val="06404F"/>
-          </a:solidFill>
-          <a:ln w="12700">
-            <a:solidFill>
-              <a:srgbClr val="06404F"/>
-            </a:solidFill>
-            <a:prstDash val="solid"/>
-          </a:ln>
-        </p:spPr>
-      </p:sp>
-      <p:pic>
-        <p:nvPicPr>
-          <p:cNvPr id="10" name="Image 1" descr="preencoded.png">    </p:cNvPr>
-          <p:cNvPicPr>
-            <a:picLocks noChangeAspect="1"/>
-          </p:cNvPicPr>
-          <p:nvPr/>
-        </p:nvPicPr>
-        <p:blipFill>
-          <a:blip r:embed="rId2"/>
-          <a:stretch>
-            <a:fillRect/>
-          </a:stretch>
-        </p:blipFill>
-        <p:spPr>
-          <a:xfrm>
-            <a:off x="846734" y="2309774"/>
-            <a:ext cx="263347" cy="263347"/>
-          </a:xfrm>
-          <a:prstGeom prst="rect">
-            <a:avLst/>
-          </a:prstGeom>
-        </p:spPr>
-      </p:pic>
-      <p:sp>
-        <p:nvSpPr>
-          <p:cNvPr id="11" name="Text 7"/>
+          <p:cNvPr id="9" name="Text 6"/>
           <p:cNvSpPr txBox="1"/>
           <p:nvPr/>
         </p:nvSpPr>
         <p:spPr>
           <a:xfrm>
-            <a:off x="704088" y="2834640"/>
-            <a:ext cx="2243252" cy="640080"/>
+            <a:off x="731520" y="2103120"/>
+            <a:ext cx="6309360" cy="274320"/>
           </a:xfrm>
           <a:prstGeom prst="rect">
             <a:avLst/>
@@ -7176,128 +6682,57 @@
           <a:ln/>
         </p:spPr>
         <p:txBody>
-          <a:bodyPr wrap="square" lIns="0" tIns="0" rIns="0" bIns="0" rtlCol="0" anchor="ctr"/>
+          <a:bodyPr wrap="square" lIns="0" tIns="0" rIns="0" bIns="0" rtlCol="0" anchor="t"/>
           <a:lstStyle/>
           <a:p>
             <a:pPr indent="0" marL="0">
               <a:buNone/>
             </a:pPr>
             <a:r>
-              <a:rPr lang="en-US" sz="1350" b="1" dirty="0">
-                <a:solidFill>
-                  <a:srgbClr val="06404F"/>
-                </a:solidFill>
-                <a:latin typeface="Calibri" pitchFamily="34" charset="0"/>
-                <a:ea typeface="Calibri" pitchFamily="34" charset="-122"/>
-                <a:cs typeface="Calibri" pitchFamily="34" charset="-120"/>
-              </a:rPr>
-              <a:t>Un investissement produit continu</a:t>
-            </a:r>
-            <a:endParaRPr lang="en-US" sz="1350" dirty="0"/>
-          </a:p>
-        </p:txBody>
-      </p:sp>
-      <p:sp>
-        <p:nvSpPr>
-          <p:cNvPr id="12" name="Shape 8"/>
+              <a:rPr lang="en-US" sz="1100" b="1" dirty="0">
+                <a:solidFill>
+                  <a:srgbClr val="6B7B83"/>
+                </a:solidFill>
+                <a:latin typeface="Calibri" pitchFamily="34" charset="0"/>
+                <a:ea typeface="Calibri" pitchFamily="34" charset="-122"/>
+                <a:cs typeface="Calibri" pitchFamily="34" charset="-120"/>
+              </a:rPr>
+              <a:t>Taille de la base de données Engage (GB, moyenne mensuelle) — mars à août 2026</a:t>
+            </a:r>
+            <a:endParaRPr lang="en-US" sz="1100" dirty="0"/>
+          </a:p>
+        </p:txBody>
+      </p:sp>
+      <p:graphicFrame>
+        <p:nvGraphicFramePr>
+          <p:cNvPr id="10" name="Chart 0" descr=""/>
+          <p:cNvGraphicFramePr/>
+          <p:nvPr/>
+        </p:nvGraphicFramePr>
+        <p:xfrm>
+          <a:off x="685800" y="2423160"/>
+          <a:ext cx="6400800" cy="3383280"/>
+        </p:xfrm>
+        <a:graphic xmlns:a="http://schemas.openxmlformats.org/drawingml/2006/main">
+          <a:graphicData uri="http://schemas.openxmlformats.org/drawingml/2006/chart">
+            <c:chart xmlns:c="http://schemas.openxmlformats.org/drawingml/2006/chart" r:id="rId2"/>
+          </a:graphicData>
+        </a:graphic>
+      </p:graphicFrame>
+      <p:sp>
+        <p:nvSpPr>
+          <p:cNvPr id="11" name="Shape 7"/>
           <p:cNvSpPr/>
           <p:nvPr/>
         </p:nvSpPr>
         <p:spPr>
           <a:xfrm>
-            <a:off x="704088" y="3566160"/>
-            <a:ext cx="2243252" cy="0"/>
-          </a:xfrm>
-          <a:prstGeom prst="line">
-            <a:avLst/>
-          </a:prstGeom>
-          <a:noFill/>
-          <a:ln w="9525">
-            <a:solidFill>
-              <a:srgbClr val="D6E0E3"/>
-            </a:solidFill>
-            <a:prstDash val="solid"/>
-          </a:ln>
-        </p:spPr>
-      </p:sp>
-      <p:sp>
-        <p:nvSpPr>
-          <p:cNvPr id="13" name="Text 9"/>
-          <p:cNvSpPr txBox="1"/>
-          <p:nvPr/>
-        </p:nvSpPr>
-        <p:spPr>
-          <a:xfrm>
-            <a:off x="704088" y="3703320"/>
-            <a:ext cx="2243252" cy="1965960"/>
-          </a:xfrm>
-          <a:prstGeom prst="rect">
-            <a:avLst/>
-          </a:prstGeom>
-          <a:noFill/>
-          <a:ln/>
-        </p:spPr>
-        <p:txBody>
-          <a:bodyPr wrap="square" lIns="0" tIns="0" rIns="0" bIns="0" rtlCol="0" anchor="t"/>
-          <a:lstStyle/>
-          <a:p>
-            <a:pPr marL="152400" indent="-152400">
-              <a:spcAft>
-                <a:spcPts val="600"/>
-              </a:spcAft>
-              <a:buSzPct val="100000"/>
-              <a:buChar char="•"/>
-            </a:pPr>
-            <a:r>
-              <a:rPr lang="en-US" sz="1100" dirty="0">
-                <a:solidFill>
-                  <a:srgbClr val="1F2A30"/>
-                </a:solidFill>
-                <a:latin typeface="Calibri" pitchFamily="34" charset="0"/>
-                <a:ea typeface="Calibri" pitchFamily="34" charset="-122"/>
-                <a:cs typeface="Calibri" pitchFamily="34" charset="-120"/>
-              </a:rPr>
-              <a:t>Équipes produit et ingénierie en Belgique, renforcées par des équipes dédiées à l’IA et à la donnée.</a:t>
-            </a:r>
-            <a:endParaRPr lang="en-US" sz="1100" dirty="0"/>
-          </a:p>
-          <a:p>
-            <a:pPr marL="152400" indent="-152400">
-              <a:spcAft>
-                <a:spcPts val="600"/>
-              </a:spcAft>
-              <a:buSzPct val="100000"/>
-              <a:buChar char="•"/>
-            </a:pPr>
-            <a:r>
-              <a:rPr lang="en-US" sz="1100" dirty="0">
-                <a:solidFill>
-                  <a:srgbClr val="1F2A30"/>
-                </a:solidFill>
-                <a:latin typeface="Calibri" pitchFamily="34" charset="0"/>
-                <a:ea typeface="Calibri" pitchFamily="34" charset="-122"/>
-                <a:cs typeface="Calibri" pitchFamily="34" charset="-120"/>
-              </a:rPr>
-              <a:t>Roadmap Engage active : conformité, données, orchestration, intelligence.</a:t>
-            </a:r>
-            <a:endParaRPr lang="en-US" sz="1100" dirty="0"/>
-          </a:p>
-        </p:txBody>
-      </p:sp>
-      <p:sp>
-        <p:nvSpPr>
-          <p:cNvPr id="14" name="Shape 10"/>
-          <p:cNvSpPr/>
-          <p:nvPr/>
-        </p:nvSpPr>
-        <p:spPr>
-          <a:xfrm>
-            <a:off x="3349676" y="1965960"/>
-            <a:ext cx="2645588" cy="3840480"/>
+            <a:off x="7543800" y="1965960"/>
+            <a:ext cx="4144975" cy="1417320"/>
           </a:xfrm>
           <a:prstGeom prst="roundRect">
             <a:avLst>
-              <a:gd name="adj" fmla="val 4148"/>
+              <a:gd name="adj" fmla="val 7742"/>
             </a:avLst>
           </a:prstGeom>
           <a:solidFill>
@@ -7320,24 +6755,24 @@
       </p:sp>
       <p:sp>
         <p:nvSpPr>
-          <p:cNvPr id="15" name="Shape 11"/>
+          <p:cNvPr id="12" name="Shape 8"/>
           <p:cNvSpPr/>
           <p:nvPr/>
         </p:nvSpPr>
         <p:spPr>
           <a:xfrm>
-            <a:off x="3550844" y="2167128"/>
-            <a:ext cx="548640" cy="548640"/>
+            <a:off x="7744968" y="2167128"/>
+            <a:ext cx="457200" cy="457200"/>
           </a:xfrm>
           <a:prstGeom prst="ellipse">
             <a:avLst/>
           </a:prstGeom>
           <a:solidFill>
-            <a:srgbClr val="06404F"/>
+            <a:srgbClr val="E4F0F2"/>
           </a:solidFill>
           <a:ln w="12700">
             <a:solidFill>
-              <a:srgbClr val="06404F"/>
+              <a:srgbClr val="E4F0F2"/>
             </a:solidFill>
             <a:prstDash val="solid"/>
           </a:ln>
@@ -7345,7 +6780,7 @@
       </p:sp>
       <p:pic>
         <p:nvPicPr>
-          <p:cNvPr id="16" name="Image 2" descr="preencoded.png">    </p:cNvPr>
+          <p:cNvPr id="13" name="Image 1" descr="preencoded.png">    </p:cNvPr>
           <p:cNvPicPr>
             <a:picLocks noChangeAspect="1"/>
           </p:cNvPicPr>
@@ -7359,8 +6794,8 @@
         </p:blipFill>
         <p:spPr>
           <a:xfrm>
-            <a:off x="3693490" y="2309774"/>
-            <a:ext cx="263347" cy="263347"/>
+            <a:off x="7863840" y="2286000"/>
+            <a:ext cx="219456" cy="219456"/>
           </a:xfrm>
           <a:prstGeom prst="rect">
             <a:avLst/>
@@ -7369,14 +6804,14 @@
       </p:pic>
       <p:sp>
         <p:nvSpPr>
-          <p:cNvPr id="17" name="Text 12"/>
+          <p:cNvPr id="14" name="Text 9"/>
           <p:cNvSpPr txBox="1"/>
           <p:nvPr/>
         </p:nvSpPr>
         <p:spPr>
           <a:xfrm>
-            <a:off x="3550844" y="2834640"/>
-            <a:ext cx="2243252" cy="640080"/>
+            <a:off x="8321040" y="2167128"/>
+            <a:ext cx="3184855" cy="457200"/>
           </a:xfrm>
           <a:prstGeom prst="rect">
             <a:avLst/>
@@ -7392,7 +6827,46 @@
               <a:buNone/>
             </a:pPr>
             <a:r>
-              <a:rPr lang="en-US" sz="1350" b="1" dirty="0">
+              <a:rPr lang="en-US" sz="1100" b="1" dirty="0">
+                <a:solidFill>
+                  <a:srgbClr val="6B7B83"/>
+                </a:solidFill>
+                <a:latin typeface="Calibri" pitchFamily="34" charset="0"/>
+                <a:ea typeface="Calibri" pitchFamily="34" charset="-122"/>
+                <a:cs typeface="Calibri" pitchFamily="34" charset="-120"/>
+              </a:rPr>
+              <a:t>Marge restante</a:t>
+            </a:r>
+            <a:endParaRPr lang="en-US" sz="1100" dirty="0"/>
+          </a:p>
+        </p:txBody>
+      </p:sp>
+      <p:sp>
+        <p:nvSpPr>
+          <p:cNvPr id="15" name="Text 10"/>
+          <p:cNvSpPr txBox="1"/>
+          <p:nvPr/>
+        </p:nvSpPr>
+        <p:spPr>
+          <a:xfrm>
+            <a:off x="7744968" y="2679192"/>
+            <a:ext cx="3742639" cy="502920"/>
+          </a:xfrm>
+          <a:prstGeom prst="rect">
+            <a:avLst/>
+          </a:prstGeom>
+          <a:noFill/>
+          <a:ln/>
+        </p:spPr>
+        <p:txBody>
+          <a:bodyPr wrap="square" lIns="0" tIns="0" rIns="0" bIns="0" rtlCol="0" anchor="ctr"/>
+          <a:lstStyle/>
+          <a:p>
+            <a:pPr indent="0" marL="0">
+              <a:buNone/>
+            </a:pPr>
+            <a:r>
+              <a:rPr lang="en-US" sz="2400" b="1" dirty="0">
                 <a:solidFill>
                   <a:srgbClr val="06404F"/>
                 </a:solidFill>
@@ -7400,30 +6874,73 @@
                 <a:ea typeface="Calibri" pitchFamily="34" charset="-122"/>
                 <a:cs typeface="Calibri" pitchFamily="34" charset="-120"/>
               </a:rPr>
-              <a:t>Aucune migration imposée</a:t>
-            </a:r>
-            <a:endParaRPr lang="en-US" sz="1350" dirty="0"/>
-          </a:p>
-        </p:txBody>
-      </p:sp>
-      <p:sp>
-        <p:nvSpPr>
-          <p:cNvPr id="18" name="Shape 13"/>
+              <a:t>3 GB (6 %)</a:t>
+            </a:r>
+            <a:endParaRPr lang="en-US" sz="2400" dirty="0"/>
+          </a:p>
+        </p:txBody>
+      </p:sp>
+      <p:sp>
+        <p:nvSpPr>
+          <p:cNvPr id="16" name="Text 11"/>
+          <p:cNvSpPr txBox="1"/>
+          <p:nvPr/>
+        </p:nvSpPr>
+        <p:spPr>
+          <a:xfrm>
+            <a:off x="7744968" y="3182112"/>
+            <a:ext cx="3742639" cy="64008"/>
+          </a:xfrm>
+          <a:prstGeom prst="rect">
+            <a:avLst/>
+          </a:prstGeom>
+          <a:noFill/>
+          <a:ln/>
+        </p:spPr>
+        <p:txBody>
+          <a:bodyPr wrap="square" lIns="0" tIns="0" rIns="0" bIns="0" rtlCol="0" anchor="t"/>
+          <a:lstStyle/>
+          <a:p>
+            <a:pPr indent="0" marL="0">
+              <a:buNone/>
+            </a:pPr>
+            <a:r>
+              <a:rPr lang="en-US" sz="1000" dirty="0">
+                <a:solidFill>
+                  <a:srgbClr val="1F2A30"/>
+                </a:solidFill>
+                <a:latin typeface="Calibri" pitchFamily="34" charset="0"/>
+                <a:ea typeface="Calibri" pitchFamily="34" charset="-122"/>
+                <a:cs typeface="Calibri" pitchFamily="34" charset="-120"/>
+              </a:rPr>
+              <a:t>sur un seuil de 50 GB</a:t>
+            </a:r>
+            <a:endParaRPr lang="en-US" sz="1000" dirty="0"/>
+          </a:p>
+        </p:txBody>
+      </p:sp>
+      <p:sp>
+        <p:nvSpPr>
+          <p:cNvPr id="17" name="Shape 12"/>
           <p:cNvSpPr/>
           <p:nvPr/>
         </p:nvSpPr>
         <p:spPr>
           <a:xfrm>
-            <a:off x="3550844" y="3566160"/>
-            <a:ext cx="2243252" cy="0"/>
-          </a:xfrm>
-          <a:prstGeom prst="line">
-            <a:avLst/>
-          </a:prstGeom>
-          <a:noFill/>
-          <a:ln w="9525">
+            <a:off x="7543800" y="3520440"/>
+            <a:ext cx="4144975" cy="2697480"/>
+          </a:xfrm>
+          <a:prstGeom prst="roundRect">
+            <a:avLst>
+              <a:gd name="adj" fmla="val 4068"/>
+            </a:avLst>
+          </a:prstGeom>
+          <a:solidFill>
+            <a:srgbClr val="FDEBD9"/>
+          </a:solidFill>
+          <a:ln w="12700">
             <a:solidFill>
-              <a:srgbClr val="D6E0E3"/>
+              <a:srgbClr val="FDEBD9"/>
             </a:solidFill>
             <a:prstDash val="solid"/>
           </a:ln>
@@ -7431,130 +6948,32 @@
       </p:sp>
       <p:sp>
         <p:nvSpPr>
-          <p:cNvPr id="19" name="Text 14"/>
-          <p:cNvSpPr txBox="1"/>
-          <p:nvPr/>
-        </p:nvSpPr>
-        <p:spPr>
-          <a:xfrm>
-            <a:off x="3550844" y="3703320"/>
-            <a:ext cx="2243252" cy="1965960"/>
-          </a:xfrm>
-          <a:prstGeom prst="rect">
-            <a:avLst/>
-          </a:prstGeom>
-          <a:noFill/>
-          <a:ln/>
-        </p:spPr>
-        <p:txBody>
-          <a:bodyPr wrap="square" lIns="0" tIns="0" rIns="0" bIns="0" rtlCol="0" anchor="t"/>
-          <a:lstStyle/>
-          <a:p>
-            <a:pPr marL="152400" indent="-152400">
-              <a:spcAft>
-                <a:spcPts val="600"/>
-              </a:spcAft>
-              <a:buSzPct val="100000"/>
-              <a:buChar char="•"/>
-            </a:pPr>
-            <a:r>
-              <a:rPr lang="en-US" sz="1100" dirty="0">
-                <a:solidFill>
-                  <a:srgbClr val="1F2A30"/>
-                </a:solidFill>
-                <a:latin typeface="Calibri" pitchFamily="34" charset="0"/>
-                <a:ea typeface="Calibri" pitchFamily="34" charset="-122"/>
-                <a:cs typeface="Calibri" pitchFamily="34" charset="-120"/>
-              </a:rPr>
-              <a:t>Priorité : tirer le meilleur de votre plateforme actuelle.</a:t>
-            </a:r>
-            <a:endParaRPr lang="en-US" sz="1100" dirty="0"/>
-          </a:p>
-          <a:p>
-            <a:pPr marL="152400" indent="-152400">
-              <a:spcAft>
-                <a:spcPts val="600"/>
-              </a:spcAft>
-              <a:buSzPct val="100000"/>
-              <a:buChar char="•"/>
-            </a:pPr>
-            <a:r>
-              <a:rPr lang="en-US" sz="1100" dirty="0">
-                <a:solidFill>
-                  <a:srgbClr val="1F2A30"/>
-                </a:solidFill>
-                <a:latin typeface="Calibri" pitchFamily="34" charset="0"/>
-                <a:ea typeface="Calibri" pitchFamily="34" charset="-122"/>
-                <a:cs typeface="Calibri" pitchFamily="34" charset="-120"/>
-              </a:rPr>
-              <a:t>Les capacités Zeta (IA, données) viennent en complément, uniquement si elles servent vos besoins.</a:t>
-            </a:r>
-            <a:endParaRPr lang="en-US" sz="1100" dirty="0"/>
-          </a:p>
-        </p:txBody>
-      </p:sp>
-      <p:sp>
-        <p:nvSpPr>
-          <p:cNvPr id="20" name="Shape 15"/>
+          <p:cNvPr id="18" name="Shape 13"/>
           <p:cNvSpPr/>
           <p:nvPr/>
         </p:nvSpPr>
         <p:spPr>
           <a:xfrm>
-            <a:off x="6196432" y="1965960"/>
-            <a:ext cx="2645588" cy="3840480"/>
-          </a:xfrm>
-          <a:prstGeom prst="roundRect">
-            <a:avLst>
-              <a:gd name="adj" fmla="val 4148"/>
-            </a:avLst>
+            <a:off x="7772400" y="3703320"/>
+            <a:ext cx="457200" cy="457200"/>
+          </a:xfrm>
+          <a:prstGeom prst="ellipse">
+            <a:avLst/>
           </a:prstGeom>
           <a:solidFill>
-            <a:srgbClr val="FFFFFF"/>
+            <a:srgbClr val="F28C28"/>
           </a:solidFill>
           <a:ln w="12700">
             <a:solidFill>
-              <a:srgbClr val="FFFFFF"/>
+              <a:srgbClr val="F28C28"/>
             </a:solidFill>
             <a:prstDash val="solid"/>
           </a:ln>
-          <a:effectLst>
-            <a:outerShdw sx="100000" sy="100000" kx="0" ky="0" algn="bl" rotWithShape="0" blurRad="76200" dist="25400" dir="5400000">
-              <a:srgbClr val="000000">
-                <a:alpha val="10000"/>
-              </a:srgbClr>
-            </a:outerShdw>
-          </a:effectLst>
-        </p:spPr>
-      </p:sp>
-      <p:sp>
-        <p:nvSpPr>
-          <p:cNvPr id="21" name="Shape 16"/>
-          <p:cNvSpPr/>
-          <p:nvPr/>
-        </p:nvSpPr>
-        <p:spPr>
-          <a:xfrm>
-            <a:off x="6397600" y="2167128"/>
-            <a:ext cx="548640" cy="548640"/>
-          </a:xfrm>
-          <a:prstGeom prst="ellipse">
-            <a:avLst/>
-          </a:prstGeom>
-          <a:solidFill>
-            <a:srgbClr val="06404F"/>
-          </a:solidFill>
-          <a:ln w="12700">
-            <a:solidFill>
-              <a:srgbClr val="06404F"/>
-            </a:solidFill>
-            <a:prstDash val="solid"/>
-          </a:ln>
         </p:spPr>
       </p:sp>
       <p:pic>
         <p:nvPicPr>
-          <p:cNvPr id="22" name="Image 3" descr="preencoded.png">    </p:cNvPr>
+          <p:cNvPr id="19" name="Image 2" descr="preencoded.png">    </p:cNvPr>
           <p:cNvPicPr>
             <a:picLocks noChangeAspect="1"/>
           </p:cNvPicPr>
@@ -7568,14 +6987,131 @@
         </p:blipFill>
         <p:spPr>
           <a:xfrm>
-            <a:off x="6540246" y="2309774"/>
-            <a:ext cx="263347" cy="263347"/>
+            <a:off x="7891272" y="3822192"/>
+            <a:ext cx="219456" cy="219456"/>
           </a:xfrm>
           <a:prstGeom prst="rect">
             <a:avLst/>
           </a:prstGeom>
         </p:spPr>
       </p:pic>
+      <p:sp>
+        <p:nvSpPr>
+          <p:cNvPr id="20" name="Text 14"/>
+          <p:cNvSpPr txBox="1"/>
+          <p:nvPr/>
+        </p:nvSpPr>
+        <p:spPr>
+          <a:xfrm>
+            <a:off x="8366760" y="3703320"/>
+            <a:ext cx="3093415" cy="457200"/>
+          </a:xfrm>
+          <a:prstGeom prst="rect">
+            <a:avLst/>
+          </a:prstGeom>
+          <a:noFill/>
+          <a:ln/>
+        </p:spPr>
+        <p:txBody>
+          <a:bodyPr wrap="square" lIns="0" tIns="0" rIns="0" bIns="0" rtlCol="0" anchor="ctr"/>
+          <a:lstStyle/>
+          <a:p>
+            <a:pPr indent="0" marL="0">
+              <a:buNone/>
+            </a:pPr>
+            <a:r>
+              <a:rPr lang="en-US" sz="1250" b="1" dirty="0">
+                <a:solidFill>
+                  <a:srgbClr val="F28C28"/>
+                </a:solidFill>
+                <a:latin typeface="Calibri" pitchFamily="34" charset="0"/>
+                <a:ea typeface="Calibri" pitchFamily="34" charset="-122"/>
+                <a:cs typeface="Calibri" pitchFamily="34" charset="-120"/>
+              </a:rPr>
+              <a:t>Extension de capacité</a:t>
+            </a:r>
+            <a:endParaRPr lang="en-US" sz="1250" dirty="0"/>
+          </a:p>
+        </p:txBody>
+      </p:sp>
+      <p:sp>
+        <p:nvSpPr>
+          <p:cNvPr id="21" name="Text 15"/>
+          <p:cNvSpPr txBox="1"/>
+          <p:nvPr/>
+        </p:nvSpPr>
+        <p:spPr>
+          <a:xfrm>
+            <a:off x="7772400" y="4297680"/>
+            <a:ext cx="3687775" cy="502920"/>
+          </a:xfrm>
+          <a:prstGeom prst="rect">
+            <a:avLst/>
+          </a:prstGeom>
+          <a:noFill/>
+          <a:ln/>
+        </p:spPr>
+        <p:txBody>
+          <a:bodyPr wrap="square" lIns="0" tIns="0" rIns="0" bIns="0" rtlCol="0" anchor="ctr"/>
+          <a:lstStyle/>
+          <a:p>
+            <a:pPr indent="0" marL="0">
+              <a:buNone/>
+            </a:pPr>
+            <a:r>
+              <a:rPr lang="en-US" sz="3000" b="1" dirty="0">
+                <a:solidFill>
+                  <a:srgbClr val="06404F"/>
+                </a:solidFill>
+                <a:latin typeface="Calibri" pitchFamily="34" charset="0"/>
+                <a:ea typeface="Calibri" pitchFamily="34" charset="-122"/>
+                <a:cs typeface="Calibri" pitchFamily="34" charset="-120"/>
+              </a:rPr>
+              <a:t>+100 GB</a:t>
+            </a:r>
+            <a:endParaRPr lang="en-US" sz="3000" dirty="0"/>
+          </a:p>
+        </p:txBody>
+      </p:sp>
+      <p:sp>
+        <p:nvSpPr>
+          <p:cNvPr id="22" name="Text 16"/>
+          <p:cNvSpPr txBox="1"/>
+          <p:nvPr/>
+        </p:nvSpPr>
+        <p:spPr>
+          <a:xfrm>
+            <a:off x="7772400" y="4846320"/>
+            <a:ext cx="3687775" cy="411480"/>
+          </a:xfrm>
+          <a:prstGeom prst="rect">
+            <a:avLst/>
+          </a:prstGeom>
+          <a:noFill/>
+          <a:ln/>
+        </p:spPr>
+        <p:txBody>
+          <a:bodyPr wrap="square" lIns="0" tIns="0" rIns="0" bIns="0" rtlCol="0" anchor="ctr"/>
+          <a:lstStyle/>
+          <a:p>
+            <a:pPr indent="0" marL="0">
+              <a:buNone/>
+            </a:pPr>
+            <a:r>
+              <a:rPr lang="en-US" sz="2000" b="1" dirty="0">
+                <a:solidFill>
+                  <a:srgbClr val="06404F"/>
+                </a:solidFill>
+                <a:latin typeface="Calibri" pitchFamily="34" charset="0"/>
+                <a:ea typeface="Calibri" pitchFamily="34" charset="-122"/>
+                <a:cs typeface="Calibri" pitchFamily="34" charset="-120"/>
+              </a:rPr>
+              <a:t>6 900 € / an</a:t>
+            </a:r>
+            <a:endParaRPr lang="en-US" sz="2000" dirty="0"/>
+          </a:p>
+        </p:txBody>
+      </p:sp>
       <p:sp>
         <p:nvSpPr>
           <p:cNvPr id="23" name="Text 17"/>
@@ -7584,8 +7120,8 @@
         </p:nvSpPr>
         <p:spPr>
           <a:xfrm>
-            <a:off x="6397600" y="2834640"/>
-            <a:ext cx="2243252" cy="640080"/>
+            <a:off x="7772400" y="5349240"/>
+            <a:ext cx="3687775" cy="731520"/>
           </a:xfrm>
           <a:prstGeom prst="rect">
             <a:avLst/>
@@ -7594,80 +7130,14 @@
           <a:ln/>
         </p:spPr>
         <p:txBody>
-          <a:bodyPr wrap="square" lIns="0" tIns="0" rIns="0" bIns="0" rtlCol="0" anchor="ctr"/>
+          <a:bodyPr wrap="square" lIns="0" tIns="0" rIns="0" bIns="0" rtlCol="0" anchor="t"/>
           <a:lstStyle/>
           <a:p>
             <a:pPr indent="0" marL="0">
               <a:buNone/>
             </a:pPr>
             <a:r>
-              <a:rPr lang="en-US" sz="1350" b="1" dirty="0">
-                <a:solidFill>
-                  <a:srgbClr val="06404F"/>
-                </a:solidFill>
-                <a:latin typeface="Calibri" pitchFamily="34" charset="0"/>
-                <a:ea typeface="Calibri" pitchFamily="34" charset="-122"/>
-                <a:cs typeface="Calibri" pitchFamily="34" charset="-120"/>
-              </a:rPr>
-              <a:t>Vos conditions préservées</a:t>
-            </a:r>
-            <a:endParaRPr lang="en-US" sz="1350" dirty="0"/>
-          </a:p>
-        </p:txBody>
-      </p:sp>
-      <p:sp>
-        <p:nvSpPr>
-          <p:cNvPr id="24" name="Shape 18"/>
-          <p:cNvSpPr/>
-          <p:nvPr/>
-        </p:nvSpPr>
-        <p:spPr>
-          <a:xfrm>
-            <a:off x="6397600" y="3566160"/>
-            <a:ext cx="2243252" cy="0"/>
-          </a:xfrm>
-          <a:prstGeom prst="line">
-            <a:avLst/>
-          </a:prstGeom>
-          <a:noFill/>
-          <a:ln w="9525">
-            <a:solidFill>
-              <a:srgbClr val="D6E0E3"/>
-            </a:solidFill>
-            <a:prstDash val="solid"/>
-          </a:ln>
-        </p:spPr>
-      </p:sp>
-      <p:sp>
-        <p:nvSpPr>
-          <p:cNvPr id="25" name="Text 19"/>
-          <p:cNvSpPr txBox="1"/>
-          <p:nvPr/>
-        </p:nvSpPr>
-        <p:spPr>
-          <a:xfrm>
-            <a:off x="6397600" y="3703320"/>
-            <a:ext cx="2243252" cy="1965960"/>
-          </a:xfrm>
-          <a:prstGeom prst="rect">
-            <a:avLst/>
-          </a:prstGeom>
-          <a:noFill/>
-          <a:ln/>
-        </p:spPr>
-        <p:txBody>
-          <a:bodyPr wrap="square" lIns="0" tIns="0" rIns="0" bIns="0" rtlCol="0" anchor="t"/>
-          <a:lstStyle/>
-          <a:p>
-            <a:pPr marL="152400" indent="-152400">
-              <a:spcAft>
-                <a:spcPts val="600"/>
-              </a:spcAft>
-              <a:buSzPct val="100000"/>
-              <a:buChar char="•"/>
-            </a:pPr>
-            <a:r>
-              <a:rPr lang="en-US" sz="1100" dirty="0">
+              <a:rPr lang="en-US" sz="1050" dirty="0">
                 <a:solidFill>
                   <a:srgbClr val="1F2A30"/>
                 </a:solidFill>
@@ -7675,239 +7145,9 @@
                 <a:ea typeface="Calibri" pitchFamily="34" charset="-122"/>
                 <a:cs typeface="Calibri" pitchFamily="34" charset="-120"/>
               </a:rPr>
-              <a:t>Aucun changement tarifaire imposé au renouvellement pour les clients Selligent.</a:t>
-            </a:r>
-            <a:endParaRPr lang="en-US" sz="1100" dirty="0"/>
-          </a:p>
-          <a:p>
-            <a:pPr marL="152400" indent="-152400">
-              <a:spcAft>
-                <a:spcPts val="600"/>
-              </a:spcAft>
-              <a:buSzPct val="100000"/>
-              <a:buChar char="•"/>
-            </a:pPr>
-            <a:r>
-              <a:rPr lang="en-US" sz="1100" dirty="0">
-                <a:solidFill>
-                  <a:srgbClr val="1F2A30"/>
-                </a:solidFill>
-                <a:latin typeface="Calibri" pitchFamily="34" charset="0"/>
-                <a:ea typeface="Calibri" pitchFamily="34" charset="-122"/>
-                <a:cs typeface="Calibri" pitchFamily="34" charset="-120"/>
-              </a:rPr>
-              <a:t>Vos modules et vos usages restent inchangés.</a:t>
-            </a:r>
-            <a:endParaRPr lang="en-US" sz="1100" dirty="0"/>
-          </a:p>
-        </p:txBody>
-      </p:sp>
-      <p:sp>
-        <p:nvSpPr>
-          <p:cNvPr id="26" name="Shape 20"/>
-          <p:cNvSpPr/>
-          <p:nvPr/>
-        </p:nvSpPr>
-        <p:spPr>
-          <a:xfrm>
-            <a:off x="9043187" y="1965960"/>
-            <a:ext cx="2645588" cy="3840480"/>
-          </a:xfrm>
-          <a:prstGeom prst="roundRect">
-            <a:avLst>
-              <a:gd name="adj" fmla="val 4148"/>
-            </a:avLst>
-          </a:prstGeom>
-          <a:solidFill>
-            <a:srgbClr val="FFFFFF"/>
-          </a:solidFill>
-          <a:ln w="12700">
-            <a:solidFill>
-              <a:srgbClr val="FFFFFF"/>
-            </a:solidFill>
-            <a:prstDash val="solid"/>
-          </a:ln>
-          <a:effectLst>
-            <a:outerShdw sx="100000" sy="100000" kx="0" ky="0" algn="bl" rotWithShape="0" blurRad="76200" dist="25400" dir="5400000">
-              <a:srgbClr val="000000">
-                <a:alpha val="10000"/>
-              </a:srgbClr>
-            </a:outerShdw>
-          </a:effectLst>
-        </p:spPr>
-      </p:sp>
-      <p:sp>
-        <p:nvSpPr>
-          <p:cNvPr id="27" name="Shape 21"/>
-          <p:cNvSpPr/>
-          <p:nvPr/>
-        </p:nvSpPr>
-        <p:spPr>
-          <a:xfrm>
-            <a:off x="9244355" y="2167128"/>
-            <a:ext cx="548640" cy="548640"/>
-          </a:xfrm>
-          <a:prstGeom prst="ellipse">
-            <a:avLst/>
-          </a:prstGeom>
-          <a:solidFill>
-            <a:srgbClr val="06404F"/>
-          </a:solidFill>
-          <a:ln w="12700">
-            <a:solidFill>
-              <a:srgbClr val="06404F"/>
-            </a:solidFill>
-            <a:prstDash val="solid"/>
-          </a:ln>
-        </p:spPr>
-      </p:sp>
-      <p:pic>
-        <p:nvPicPr>
-          <p:cNvPr id="28" name="Image 4" descr="preencoded.png">    </p:cNvPr>
-          <p:cNvPicPr>
-            <a:picLocks noChangeAspect="1"/>
-          </p:cNvPicPr>
-          <p:nvPr/>
-        </p:nvPicPr>
-        <p:blipFill>
-          <a:blip r:embed="rId5"/>
-          <a:stretch>
-            <a:fillRect/>
-          </a:stretch>
-        </p:blipFill>
-        <p:spPr>
-          <a:xfrm>
-            <a:off x="9387002" y="2309774"/>
-            <a:ext cx="263347" cy="263347"/>
-          </a:xfrm>
-          <a:prstGeom prst="rect">
-            <a:avLst/>
-          </a:prstGeom>
-        </p:spPr>
-      </p:pic>
-      <p:sp>
-        <p:nvSpPr>
-          <p:cNvPr id="29" name="Text 22"/>
-          <p:cNvSpPr txBox="1"/>
-          <p:nvPr/>
-        </p:nvSpPr>
-        <p:spPr>
-          <a:xfrm>
-            <a:off x="9244355" y="2834640"/>
-            <a:ext cx="2243252" cy="640080"/>
-          </a:xfrm>
-          <a:prstGeom prst="rect">
-            <a:avLst/>
-          </a:prstGeom>
-          <a:noFill/>
-          <a:ln/>
-        </p:spPr>
-        <p:txBody>
-          <a:bodyPr wrap="square" lIns="0" tIns="0" rIns="0" bIns="0" rtlCol="0" anchor="ctr"/>
-          <a:lstStyle/>
-          <a:p>
-            <a:pPr indent="0" marL="0">
-              <a:buNone/>
-            </a:pPr>
-            <a:r>
-              <a:rPr lang="en-US" sz="1350" b="1" dirty="0">
-                <a:solidFill>
-                  <a:srgbClr val="06404F"/>
-                </a:solidFill>
-                <a:latin typeface="Calibri" pitchFamily="34" charset="0"/>
-                <a:ea typeface="Calibri" pitchFamily="34" charset="-122"/>
-                <a:cs typeface="Calibri" pitchFamily="34" charset="-120"/>
-              </a:rPr>
-              <a:t>Europe, RGPD et proximité</a:t>
-            </a:r>
-            <a:endParaRPr lang="en-US" sz="1350" dirty="0"/>
-          </a:p>
-        </p:txBody>
-      </p:sp>
-      <p:sp>
-        <p:nvSpPr>
-          <p:cNvPr id="30" name="Shape 23"/>
-          <p:cNvSpPr/>
-          <p:nvPr/>
-        </p:nvSpPr>
-        <p:spPr>
-          <a:xfrm>
-            <a:off x="9244355" y="3566160"/>
-            <a:ext cx="2243252" cy="0"/>
-          </a:xfrm>
-          <a:prstGeom prst="line">
-            <a:avLst/>
-          </a:prstGeom>
-          <a:noFill/>
-          <a:ln w="9525">
-            <a:solidFill>
-              <a:srgbClr val="D6E0E3"/>
-            </a:solidFill>
-            <a:prstDash val="solid"/>
-          </a:ln>
-        </p:spPr>
-      </p:sp>
-      <p:sp>
-        <p:nvSpPr>
-          <p:cNvPr id="31" name="Text 24"/>
-          <p:cNvSpPr txBox="1"/>
-          <p:nvPr/>
-        </p:nvSpPr>
-        <p:spPr>
-          <a:xfrm>
-            <a:off x="9244355" y="3703320"/>
-            <a:ext cx="2243252" cy="1965960"/>
-          </a:xfrm>
-          <a:prstGeom prst="rect">
-            <a:avLst/>
-          </a:prstGeom>
-          <a:noFill/>
-          <a:ln/>
-        </p:spPr>
-        <p:txBody>
-          <a:bodyPr wrap="square" lIns="0" tIns="0" rIns="0" bIns="0" rtlCol="0" anchor="t"/>
-          <a:lstStyle/>
-          <a:p>
-            <a:pPr marL="152400" indent="-152400">
-              <a:spcAft>
-                <a:spcPts val="600"/>
-              </a:spcAft>
-              <a:buSzPct val="100000"/>
-              <a:buChar char="•"/>
-            </a:pPr>
-            <a:r>
-              <a:rPr lang="en-US" sz="1100" dirty="0">
-                <a:solidFill>
-                  <a:srgbClr val="1F2A30"/>
-                </a:solidFill>
-                <a:latin typeface="Calibri" pitchFamily="34" charset="0"/>
-                <a:ea typeface="Calibri" pitchFamily="34" charset="-122"/>
-                <a:cs typeface="Calibri" pitchFamily="34" charset="-120"/>
-              </a:rPr>
-              <a:t>Stratégie produit fondée sur le marché européen et sur les retours des clients.</a:t>
-            </a:r>
-            <a:endParaRPr lang="en-US" sz="1100" dirty="0"/>
-          </a:p>
-          <a:p>
-            <a:pPr marL="152400" indent="-152400">
-              <a:spcAft>
-                <a:spcPts val="600"/>
-              </a:spcAft>
-              <a:buSzPct val="100000"/>
-              <a:buChar char="•"/>
-            </a:pPr>
-            <a:r>
-              <a:rPr lang="en-US" sz="1100" dirty="0">
-                <a:solidFill>
-                  <a:srgbClr val="1F2A30"/>
-                </a:solidFill>
-                <a:latin typeface="Calibri" pitchFamily="34" charset="0"/>
-                <a:ea typeface="Calibri" pitchFamily="34" charset="-122"/>
-                <a:cs typeface="Calibri" pitchFamily="34" charset="-120"/>
-              </a:rPr>
-              <a:t>RGPD, confidentialité et réglementation européenne restent prioritaires ; vos interlocuteurs restent les mêmes.</a:t>
-            </a:r>
-            <a:endParaRPr lang="en-US" sz="1100" dirty="0"/>
+              <a:t>Passage de 50 à 150 GB. Alternative : purger et archiver les données obsolètes.</a:t>
+            </a:r>
+            <a:endParaRPr lang="en-US" sz="1050" dirty="0"/>
           </a:p>
         </p:txBody>
       </p:sp>
@@ -17948,27 +17188,6 @@
                 <a:ea typeface="Calibri" pitchFamily="34" charset="-122"/>
                 <a:cs typeface="Calibri" pitchFamily="34" charset="-120"/>
               </a:rPr>
-              <a:t>Capacité de la base de données</a:t>
-            </a:r>
-            <a:endParaRPr lang="en-US" sz="1250" dirty="0"/>
-          </a:p>
-          <a:p>
-            <a:pPr marL="152400" indent="-152400">
-              <a:spcAft>
-                <a:spcPts val="700"/>
-              </a:spcAft>
-              <a:buSzPct val="100000"/>
-              <a:buChar char="•"/>
-            </a:pPr>
-            <a:r>
-              <a:rPr lang="en-US" sz="1250" dirty="0">
-                <a:solidFill>
-                  <a:srgbClr val="1F2A30"/>
-                </a:solidFill>
-                <a:latin typeface="Calibri" pitchFamily="34" charset="0"/>
-                <a:ea typeface="Calibri" pitchFamily="34" charset="-122"/>
-                <a:cs typeface="Calibri" pitchFamily="34" charset="-120"/>
-              </a:rPr>
               <a:t>Audience unique et licence</a:t>
             </a:r>
             <a:endParaRPr lang="en-US" sz="1250" dirty="0"/>
@@ -18260,6 +17479,27 @@
                 <a:cs typeface="Calibri" pitchFamily="34" charset="-120"/>
               </a:rPr>
               <a:t>Selligent by Zeta : ce qui change pour vous</a:t>
+            </a:r>
+            <a:endParaRPr lang="en-US" sz="1250" dirty="0"/>
+          </a:p>
+          <a:p>
+            <a:pPr marL="152400" indent="-152400">
+              <a:spcAft>
+                <a:spcPts val="700"/>
+              </a:spcAft>
+              <a:buSzPct val="100000"/>
+              <a:buChar char="•"/>
+            </a:pPr>
+            <a:r>
+              <a:rPr lang="en-US" sz="1250" dirty="0">
+                <a:solidFill>
+                  <a:srgbClr val="1F2A30"/>
+                </a:solidFill>
+                <a:latin typeface="Calibri" pitchFamily="34" charset="0"/>
+                <a:ea typeface="Calibri" pitchFamily="34" charset="-122"/>
+                <a:cs typeface="Calibri" pitchFamily="34" charset="-120"/>
+              </a:rPr>
+              <a:t>Taille de la base de données Engage</a:t>
             </a:r>
             <a:endParaRPr lang="en-US" sz="1250" dirty="0"/>
           </a:p>
@@ -19111,7 +18351,7 @@
                 <a:ea typeface="Calibri" pitchFamily="34" charset="-122"/>
                 <a:cs typeface="Calibri" pitchFamily="34" charset="-120"/>
               </a:rPr>
-              <a:t>Nettoyage et archivage d’abord, ou extension de capacité avec la redevance associée ?</a:t>
+              <a:t>Nettoyage et archivage d’abord, ou extension de 100 GB à 6 900 € par an ?</a:t>
             </a:r>
             <a:endParaRPr lang="en-US" sz="1250" dirty="0"/>
           </a:p>
@@ -20822,7 +20062,7 @@
                           <a:ea typeface="Calibri" pitchFamily="34" charset="-122"/>
                           <a:cs typeface="Calibri" pitchFamily="34" charset="-120"/>
                         </a:rPr>
-                        <a:t>Base de données</a:t>
+                        <a:t>Base de données Engage</a:t>
                       </a:r>
                       <a:endParaRPr lang="en-US" sz="1000" dirty="0">
                         <a:latin typeface="Calibri" charset="0"/>
@@ -21096,7 +20336,7 @@
                           <a:ea typeface="Calibri" pitchFamily="34" charset="-122"/>
                           <a:cs typeface="Calibri" pitchFamily="34" charset="-120"/>
                         </a:rPr>
-                        <a:t>Redevance volume</a:t>
+                        <a:t>Extension 100 GB</a:t>
                       </a:r>
                       <a:endParaRPr lang="en-US" sz="1000" dirty="0">
                         <a:latin typeface="Calibri" charset="0"/>
@@ -21164,7 +20404,7 @@
                           <a:ea typeface="Calibri" pitchFamily="34" charset="-122"/>
                           <a:cs typeface="Calibri" pitchFamily="34" charset="-120"/>
                         </a:rPr>
-                        <a:t>Confirmation du montant de la redevance au-delà du seuil de 50 GB.</a:t>
+                        <a:t>Confirmation de la redevance de 6 900 € / an au-delà du seuil de 50 GB.</a:t>
                       </a:r>
                       <a:endParaRPr lang="en-US" sz="1000" dirty="0">
                         <a:latin typeface="Calibri" charset="0"/>
@@ -24468,7 +23708,7 @@
                 <a:ea typeface="Calibri" pitchFamily="34" charset="-122"/>
                 <a:cs typeface="Calibri" pitchFamily="34" charset="-120"/>
               </a:rPr>
-              <a:t>Base de données</a:t>
+              <a:t>Base de données Engage</a:t>
             </a:r>
             <a:endParaRPr lang="en-US" sz="1100" dirty="0"/>
           </a:p>
@@ -25744,7 +24984,7 @@
                 <a:ea typeface="Calibri" pitchFamily="34" charset="-122"/>
                 <a:cs typeface="Calibri" pitchFamily="34" charset="-120"/>
               </a:rPr>
-              <a:t>Exploitation, capacité, correctifs et trajectoire produit</a:t>
+              <a:t>Exploitation, correctifs et trajectoire produit</a:t>
             </a:r>
             <a:endParaRPr lang="en-US" sz="1800" dirty="0"/>
           </a:p>
@@ -25788,27 +25028,6 @@
                 <a:cs typeface="Calibri" pitchFamily="34" charset="-120"/>
               </a:rPr>
               <a:t>SLA Gold : consommation et règle de décompte</a:t>
-            </a:r>
-            <a:endParaRPr lang="en-US" sz="1300" dirty="0"/>
-          </a:p>
-          <a:p>
-            <a:pPr marL="152400" indent="-152400">
-              <a:spcAft>
-                <a:spcPts val="300"/>
-              </a:spcAft>
-              <a:buSzPct val="100000"/>
-              <a:buChar char="•"/>
-            </a:pPr>
-            <a:r>
-              <a:rPr lang="en-US" sz="1300" dirty="0">
-                <a:solidFill>
-                  <a:srgbClr val="E6F0F2"/>
-                </a:solidFill>
-                <a:latin typeface="Calibri" pitchFamily="34" charset="0"/>
-                <a:ea typeface="Calibri" pitchFamily="34" charset="-122"/>
-                <a:cs typeface="Calibri" pitchFamily="34" charset="-120"/>
-              </a:rPr>
-              <a:t>Capacité de la base de données</a:t>
             </a:r>
             <a:endParaRPr lang="en-US" sz="1300" dirty="0"/>
           </a:p>
@@ -27701,7 +26920,7 @@
               <a:buNone/>
             </a:pPr>
             <a:r>
-              <a:rPr lang="en-US" sz="2600" b="1" dirty="0">
+              <a:rPr lang="en-US" sz="2200" b="1" dirty="0">
                 <a:solidFill>
                   <a:srgbClr val="06404F"/>
                 </a:solidFill>
@@ -27709,9 +26928,9 @@
                 <a:ea typeface="Calibri" pitchFamily="34" charset="-122"/>
                 <a:cs typeface="Calibri" pitchFamily="34" charset="-120"/>
               </a:rPr>
-              <a:t>Base de données : 47 GB sur 50, anticipons ensemble</a:t>
-            </a:r>
-            <a:endParaRPr lang="en-US" sz="2600" dirty="0"/>
+              <a:t>Audience unique : 824 913 contacts, en croissance régulière</a:t>
+            </a:r>
+            <a:endParaRPr lang="en-US" sz="2200" dirty="0"/>
           </a:p>
         </p:txBody>
       </p:sp>
@@ -27748,7 +26967,7 @@
                 <a:ea typeface="Calibri" pitchFamily="34" charset="-122"/>
                 <a:cs typeface="Calibri" pitchFamily="34" charset="-120"/>
               </a:rPr>
-              <a:t>+3 GB en six mois, par paliers, et un plateau à 47 GB depuis juin : 3 GB de marge, soit environ six mois si le rythme du premier semestre reprend.</a:t>
+              <a:t>Indicateur Ucount (contacts uniques) de votre licence Gold — évolution de juin 2025 à août 2026.</a:t>
             </a:r>
             <a:endParaRPr lang="en-US" sz="1300" dirty="0"/>
           </a:p>
@@ -27802,7 +27021,7 @@
         <p:spPr>
           <a:xfrm>
             <a:off x="502920" y="1965960"/>
-            <a:ext cx="6766560" cy="4251960"/>
+            <a:ext cx="7223760" cy="4251960"/>
           </a:xfrm>
           <a:prstGeom prst="roundRect">
             <a:avLst>
@@ -27836,7 +27055,7 @@
         <p:spPr>
           <a:xfrm>
             <a:off x="731520" y="2103120"/>
-            <a:ext cx="6309360" cy="274320"/>
+            <a:ext cx="6766560" cy="274320"/>
           </a:xfrm>
           <a:prstGeom prst="rect">
             <a:avLst/>
@@ -27860,7 +27079,7 @@
                 <a:ea typeface="Calibri" pitchFamily="34" charset="-122"/>
                 <a:cs typeface="Calibri" pitchFamily="34" charset="-120"/>
               </a:rPr>
-              <a:t>Taille de la base de données (GB, moyenne mensuelle) — mars à août 2026</a:t>
+              <a:t>Contacts uniques (Ucount) par mois</a:t>
             </a:r>
             <a:endParaRPr lang="en-US" sz="1100" dirty="0"/>
           </a:p>
@@ -27874,7 +27093,7 @@
         </p:nvGraphicFramePr>
         <p:xfrm>
           <a:off x="685800" y="2423160"/>
-          <a:ext cx="6400800" cy="3383280"/>
+          <a:ext cx="6858000" cy="3383280"/>
         </p:xfrm>
         <a:graphic xmlns:a="http://schemas.openxmlformats.org/drawingml/2006/main">
           <a:graphicData uri="http://schemas.openxmlformats.org/drawingml/2006/chart">
@@ -27890,12 +27109,12 @@
         </p:nvSpPr>
         <p:spPr>
           <a:xfrm>
-            <a:off x="7543800" y="1965960"/>
-            <a:ext cx="4144975" cy="1508760"/>
+            <a:off x="8001000" y="1965960"/>
+            <a:ext cx="3687775" cy="1325880"/>
           </a:xfrm>
           <a:prstGeom prst="roundRect">
             <a:avLst>
-              <a:gd name="adj" fmla="val 7273"/>
+              <a:gd name="adj" fmla="val 8276"/>
             </a:avLst>
           </a:prstGeom>
           <a:solidFill>
@@ -27924,7 +27143,7 @@
         </p:nvSpPr>
         <p:spPr>
           <a:xfrm>
-            <a:off x="7744968" y="2167128"/>
+            <a:off x="8202168" y="2167128"/>
             <a:ext cx="457200" cy="457200"/>
           </a:xfrm>
           <a:prstGeom prst="ellipse">
@@ -27957,7 +27176,7 @@
         </p:blipFill>
         <p:spPr>
           <a:xfrm>
-            <a:off x="7863840" y="2286000"/>
+            <a:off x="8321040" y="2286000"/>
             <a:ext cx="219456" cy="219456"/>
           </a:xfrm>
           <a:prstGeom prst="rect">
@@ -27973,8 +27192,8 @@
         </p:nvSpPr>
         <p:spPr>
           <a:xfrm>
-            <a:off x="8321040" y="2167128"/>
-            <a:ext cx="3184855" cy="457200"/>
+            <a:off x="8778240" y="2167128"/>
+            <a:ext cx="2727655" cy="457200"/>
           </a:xfrm>
           <a:prstGeom prst="rect">
             <a:avLst/>
@@ -27998,7 +27217,7 @@
                 <a:ea typeface="Calibri" pitchFamily="34" charset="-122"/>
                 <a:cs typeface="Calibri" pitchFamily="34" charset="-120"/>
               </a:rPr>
-              <a:t>Marge restante</a:t>
+              <a:t>Août 2026</a:t>
             </a:r>
             <a:endParaRPr lang="en-US" sz="1100" dirty="0"/>
           </a:p>
@@ -28012,8 +27231,8 @@
         </p:nvSpPr>
         <p:spPr>
           <a:xfrm>
-            <a:off x="7744968" y="2679192"/>
-            <a:ext cx="3742639" cy="502920"/>
+            <a:off x="8202168" y="2679192"/>
+            <a:ext cx="3285439" cy="502920"/>
           </a:xfrm>
           <a:prstGeom prst="rect">
             <a:avLst/>
@@ -28037,7 +27256,7 @@
                 <a:ea typeface="Calibri" pitchFamily="34" charset="-122"/>
                 <a:cs typeface="Calibri" pitchFamily="34" charset="-120"/>
               </a:rPr>
-              <a:t>3 GB (6 %)</a:t>
+              <a:t>824 913</a:t>
             </a:r>
             <a:endParaRPr lang="en-US" sz="2400" dirty="0"/>
           </a:p>
@@ -28051,8 +27270,8 @@
         </p:nvSpPr>
         <p:spPr>
           <a:xfrm>
-            <a:off x="7744968" y="3182112"/>
-            <a:ext cx="3742639" cy="155448"/>
+            <a:off x="8202168" y="3182112"/>
+            <a:ext cx="3285439" cy="-27432"/>
           </a:xfrm>
           <a:prstGeom prst="rect">
             <a:avLst/>
@@ -28076,7 +27295,7 @@
                 <a:ea typeface="Calibri" pitchFamily="34" charset="-122"/>
                 <a:cs typeface="Calibri" pitchFamily="34" charset="-120"/>
               </a:rPr>
-              <a:t>sur un seuil de 50 GB</a:t>
+              <a:t>+0,6 % vs juillet (+4 874) · +20,2 % sur un an</a:t>
             </a:r>
             <a:endParaRPr lang="en-US" sz="1000" dirty="0"/>
           </a:p>
@@ -28090,12 +27309,12 @@
         </p:nvSpPr>
         <p:spPr>
           <a:xfrm>
-            <a:off x="7543800" y="3611880"/>
-            <a:ext cx="4144975" cy="1508760"/>
+            <a:off x="8001000" y="3429000"/>
+            <a:ext cx="3687775" cy="1325880"/>
           </a:xfrm>
           <a:prstGeom prst="roundRect">
             <a:avLst>
-              <a:gd name="adj" fmla="val 7273"/>
+              <a:gd name="adj" fmla="val 8276"/>
             </a:avLst>
           </a:prstGeom>
           <a:solidFill>
@@ -28124,7 +27343,7 @@
         </p:nvSpPr>
         <p:spPr>
           <a:xfrm>
-            <a:off x="7744968" y="3813048"/>
+            <a:off x="8202168" y="3630168"/>
             <a:ext cx="457200" cy="457200"/>
           </a:xfrm>
           <a:prstGeom prst="ellipse">
@@ -28157,7 +27376,7 @@
         </p:blipFill>
         <p:spPr>
           <a:xfrm>
-            <a:off x="7863840" y="3931920"/>
+            <a:off x="8321040" y="3749040"/>
             <a:ext cx="219456" cy="219456"/>
           </a:xfrm>
           <a:prstGeom prst="rect">
@@ -28173,8 +27392,8 @@
         </p:nvSpPr>
         <p:spPr>
           <a:xfrm>
-            <a:off x="8321040" y="3813048"/>
-            <a:ext cx="3184855" cy="457200"/>
+            <a:off x="8778240" y="3630168"/>
+            <a:ext cx="2727655" cy="457200"/>
           </a:xfrm>
           <a:prstGeom prst="rect">
             <a:avLst/>
@@ -28198,7 +27417,7 @@
                 <a:ea typeface="Calibri" pitchFamily="34" charset="-122"/>
                 <a:cs typeface="Calibri" pitchFamily="34" charset="-120"/>
               </a:rPr>
-              <a:t>Redevance au-delà du seuil</a:t>
+              <a:t>Depuis juin 2025</a:t>
             </a:r>
             <a:endParaRPr lang="en-US" sz="1100" dirty="0"/>
           </a:p>
@@ -28212,8 +27431,8 @@
         </p:nvSpPr>
         <p:spPr>
           <a:xfrm>
-            <a:off x="7744968" y="4325112"/>
-            <a:ext cx="3742639" cy="502920"/>
+            <a:off x="8202168" y="4142232"/>
+            <a:ext cx="3285439" cy="502920"/>
           </a:xfrm>
           <a:prstGeom prst="rect">
             <a:avLst/>
@@ -28229,7 +27448,7 @@
               <a:buNone/>
             </a:pPr>
             <a:r>
-              <a:rPr lang="en-US" sz="2200" b="1" dirty="0">
+              <a:rPr lang="en-US" sz="2400" b="1" dirty="0">
                 <a:solidFill>
                   <a:srgbClr val="06404F"/>
                 </a:solidFill>
@@ -28237,9 +27456,9 @@
                 <a:ea typeface="Calibri" pitchFamily="34" charset="-122"/>
                 <a:cs typeface="Calibri" pitchFamily="34" charset="-120"/>
               </a:rPr>
-              <a:t>6 900 € / an</a:t>
-            </a:r>
-            <a:endParaRPr lang="en-US" sz="2200" dirty="0"/>
+              <a:t>+17,5 %</a:t>
+            </a:r>
+            <a:endParaRPr lang="en-US" sz="2400" dirty="0"/>
           </a:p>
         </p:txBody>
       </p:sp>
@@ -28251,8 +27470,8 @@
         </p:nvSpPr>
         <p:spPr>
           <a:xfrm>
-            <a:off x="7744968" y="4828032"/>
-            <a:ext cx="3742639" cy="155448"/>
+            <a:off x="8202168" y="4645152"/>
+            <a:ext cx="3285439" cy="-27432"/>
           </a:xfrm>
           <a:prstGeom prst="rect">
             <a:avLst/>
@@ -28276,7 +27495,7 @@
                 <a:ea typeface="Calibri" pitchFamily="34" charset="-122"/>
                 <a:cs typeface="Calibri" pitchFamily="34" charset="-120"/>
               </a:rPr>
-              <a:t>par tranche de 100 GB, selon pricelist</a:t>
+              <a:t>≈ +8 800 contacts par mois · en ralentissement</a:t>
             </a:r>
             <a:endParaRPr lang="en-US" sz="1000" dirty="0"/>
           </a:p>
@@ -28290,20 +27509,20 @@
         </p:nvSpPr>
         <p:spPr>
           <a:xfrm>
-            <a:off x="7543800" y="5257800"/>
-            <a:ext cx="4144975" cy="960120"/>
+            <a:off x="8001000" y="4892040"/>
+            <a:ext cx="3687775" cy="1325880"/>
           </a:xfrm>
           <a:prstGeom prst="roundRect">
             <a:avLst>
-              <a:gd name="adj" fmla="val 11429"/>
+              <a:gd name="adj" fmla="val 8276"/>
             </a:avLst>
           </a:prstGeom>
           <a:solidFill>
-            <a:srgbClr val="F2F8F9"/>
+            <a:srgbClr val="FDEBD9"/>
           </a:solidFill>
           <a:ln w="12700">
             <a:solidFill>
-              <a:srgbClr val="F2F8F9"/>
+              <a:srgbClr val="FDEBD9"/>
             </a:solidFill>
             <a:prstDash val="solid"/>
           </a:ln>
@@ -28317,18 +27536,18 @@
         </p:nvSpPr>
         <p:spPr>
           <a:xfrm>
-            <a:off x="7726680" y="5440680"/>
+            <a:off x="8183880" y="5074920"/>
             <a:ext cx="384048" cy="384048"/>
           </a:xfrm>
           <a:prstGeom prst="ellipse">
             <a:avLst/>
           </a:prstGeom>
           <a:solidFill>
-            <a:srgbClr val="06404F"/>
+            <a:srgbClr val="F28C28"/>
           </a:solidFill>
           <a:ln w="12700">
             <a:solidFill>
-              <a:srgbClr val="06404F"/>
+              <a:srgbClr val="F28C28"/>
             </a:solidFill>
             <a:prstDash val="solid"/>
           </a:ln>
@@ -28350,7 +27569,7 @@
         </p:blipFill>
         <p:spPr>
           <a:xfrm>
-            <a:off x="7826532" y="5540532"/>
+            <a:off x="8283732" y="5174772"/>
             <a:ext cx="184343" cy="184343"/>
           </a:xfrm>
           <a:prstGeom prst="rect">
@@ -28366,8 +27585,8 @@
         </p:nvSpPr>
         <p:spPr>
           <a:xfrm>
-            <a:off x="8229600" y="5440680"/>
-            <a:ext cx="3276295" cy="384048"/>
+            <a:off x="8686800" y="5074920"/>
+            <a:ext cx="2819095" cy="384048"/>
           </a:xfrm>
           <a:prstGeom prst="rect">
             <a:avLst/>
@@ -28385,13 +27604,13 @@
             <a:r>
               <a:rPr lang="en-US" sz="1250" b="1" dirty="0">
                 <a:solidFill>
-                  <a:srgbClr val="06404F"/>
-                </a:solidFill>
-                <a:latin typeface="Calibri" pitchFamily="34" charset="0"/>
-                <a:ea typeface="Calibri" pitchFamily="34" charset="-122"/>
-                <a:cs typeface="Calibri" pitchFamily="34" charset="-120"/>
-              </a:rPr>
-              <a:t>Deux leviers</a:t>
+                  <a:srgbClr val="F28C28"/>
+                </a:solidFill>
+                <a:latin typeface="Calibri" pitchFamily="34" charset="0"/>
+                <a:ea typeface="Calibri" pitchFamily="34" charset="-122"/>
+                <a:cs typeface="Calibri" pitchFamily="34" charset="-120"/>
+              </a:rPr>
+              <a:t>Question</a:t>
             </a:r>
             <a:endParaRPr lang="en-US" sz="1250" dirty="0"/>
           </a:p>
@@ -28405,8 +27624,8 @@
         </p:nvSpPr>
         <p:spPr>
           <a:xfrm>
-            <a:off x="7772400" y="5897880"/>
-            <a:ext cx="3687775" cy="182880"/>
+            <a:off x="8229600" y="5532120"/>
+            <a:ext cx="3230575" cy="548640"/>
           </a:xfrm>
           <a:prstGeom prst="rect">
             <a:avLst/>
@@ -28422,7 +27641,7 @@
               <a:buNone/>
             </a:pPr>
             <a:r>
-              <a:rPr lang="en-US" sz="1050" dirty="0">
+              <a:rPr lang="en-US" sz="1100" dirty="0">
                 <a:solidFill>
                   <a:srgbClr val="1F2A30"/>
                 </a:solidFill>
@@ -28430,9 +27649,9 @@
                 <a:ea typeface="Calibri" pitchFamily="34" charset="-122"/>
                 <a:cs typeface="Calibri" pitchFamily="34" charset="-120"/>
               </a:rPr>
-              <a:t>Purger et archiver les données obsolètes, ou étendre la capacité par palier de 100 GB.</a:t>
-            </a:r>
-            <a:endParaRPr lang="en-US" sz="1050" dirty="0"/>
+              <a:t>Votre palier de licence est-il toujours adapté ? Quel volume de contacts prévoyez-vous en 2027 ?</a:t>
+            </a:r>
+            <a:endParaRPr lang="en-US" sz="1100" dirty="0"/>
           </a:p>
         </p:txBody>
       </p:sp>
@@ -28591,7 +27810,7 @@
                 <a:ea typeface="Calibri" pitchFamily="34" charset="-122"/>
                 <a:cs typeface="Calibri" pitchFamily="34" charset="-120"/>
               </a:rPr>
-              <a:t>Audience unique : 824 913 contacts, en croissance régulière</a:t>
+              <a:t>Rapidité de l’application : le patch de navigation asynchrone</a:t>
             </a:r>
             <a:endParaRPr lang="en-US" sz="2200" dirty="0"/>
           </a:p>
@@ -28630,7 +27849,7 @@
                 <a:ea typeface="Calibri" pitchFamily="34" charset="-122"/>
                 <a:cs typeface="Calibri" pitchFamily="34" charset="-120"/>
               </a:rPr>
-              <a:t>Indicateur Ucount (contacts uniques) de votre licence Gold — évolution de juin 2025 à août 2026.</a:t>
+              <a:t>Correctif en cours de résolution sur les temps de réponse et la fluidité de navigation dans CDM.</a:t>
             </a:r>
             <a:endParaRPr lang="en-US" sz="1300" dirty="0"/>
           </a:p>
@@ -28684,11 +27903,231 @@
         <p:spPr>
           <a:xfrm>
             <a:off x="502920" y="1965960"/>
-            <a:ext cx="7223760" cy="4251960"/>
+            <a:ext cx="3566160" cy="4251960"/>
           </a:xfrm>
           <a:prstGeom prst="roundRect">
             <a:avLst>
-              <a:gd name="adj" fmla="val 2581"/>
+              <a:gd name="adj" fmla="val 3077"/>
+            </a:avLst>
+          </a:prstGeom>
+          <a:solidFill>
+            <a:srgbClr val="F2F8F9"/>
+          </a:solidFill>
+          <a:ln w="12700">
+            <a:solidFill>
+              <a:srgbClr val="F2F8F9"/>
+            </a:solidFill>
+            <a:prstDash val="solid"/>
+          </a:ln>
+        </p:spPr>
+      </p:sp>
+      <p:sp>
+        <p:nvSpPr>
+          <p:cNvPr id="9" name="Shape 6"/>
+          <p:cNvSpPr/>
+          <p:nvPr/>
+        </p:nvSpPr>
+        <p:spPr>
+          <a:xfrm>
+            <a:off x="1828800" y="2331720"/>
+            <a:ext cx="914400" cy="914400"/>
+          </a:xfrm>
+          <a:prstGeom prst="ellipse">
+            <a:avLst/>
+          </a:prstGeom>
+          <a:solidFill>
+            <a:srgbClr val="06404F"/>
+          </a:solidFill>
+          <a:ln w="12700">
+            <a:solidFill>
+              <a:srgbClr val="06404F"/>
+            </a:solidFill>
+            <a:prstDash val="solid"/>
+          </a:ln>
+        </p:spPr>
+      </p:sp>
+      <p:pic>
+        <p:nvPicPr>
+          <p:cNvPr id="10" name="Image 1" descr="preencoded.png">    </p:cNvPr>
+          <p:cNvPicPr>
+            <a:picLocks noChangeAspect="1"/>
+          </p:cNvPicPr>
+          <p:nvPr/>
+        </p:nvPicPr>
+        <p:blipFill>
+          <a:blip r:embed="rId2"/>
+          <a:stretch>
+            <a:fillRect/>
+          </a:stretch>
+        </p:blipFill>
+        <p:spPr>
+          <a:xfrm>
+            <a:off x="2066544" y="2569464"/>
+            <a:ext cx="438912" cy="438912"/>
+          </a:xfrm>
+          <a:prstGeom prst="rect">
+            <a:avLst/>
+          </a:prstGeom>
+        </p:spPr>
+      </p:pic>
+      <p:sp>
+        <p:nvSpPr>
+          <p:cNvPr id="11" name="Text 7"/>
+          <p:cNvSpPr txBox="1"/>
+          <p:nvPr/>
+        </p:nvSpPr>
+        <p:spPr>
+          <a:xfrm>
+            <a:off x="777240" y="3429000"/>
+            <a:ext cx="3017520" cy="457200"/>
+          </a:xfrm>
+          <a:prstGeom prst="rect">
+            <a:avLst/>
+          </a:prstGeom>
+          <a:noFill/>
+          <a:ln/>
+        </p:spPr>
+        <p:txBody>
+          <a:bodyPr wrap="square" lIns="0" tIns="0" rIns="0" bIns="0" rtlCol="0" anchor="ctr"/>
+          <a:lstStyle/>
+          <a:p>
+            <a:pPr algn="ctr" indent="0" marL="0">
+              <a:buNone/>
+            </a:pPr>
+            <a:r>
+              <a:rPr lang="en-US" sz="1700" b="1" dirty="0">
+                <a:solidFill>
+                  <a:srgbClr val="06404F"/>
+                </a:solidFill>
+                <a:latin typeface="Calibri" pitchFamily="34" charset="0"/>
+                <a:ea typeface="Calibri" pitchFamily="34" charset="-122"/>
+                <a:cs typeface="Calibri" pitchFamily="34" charset="-120"/>
+              </a:rPr>
+              <a:t>Navigation asynchrone</a:t>
+            </a:r>
+            <a:endParaRPr lang="en-US" sz="1700" dirty="0"/>
+          </a:p>
+        </p:txBody>
+      </p:sp>
+      <p:sp>
+        <p:nvSpPr>
+          <p:cNvPr id="12" name="Shape 8"/>
+          <p:cNvSpPr/>
+          <p:nvPr/>
+        </p:nvSpPr>
+        <p:spPr>
+          <a:xfrm>
+            <a:off x="1234440" y="4023360"/>
+            <a:ext cx="2103120" cy="329184"/>
+          </a:xfrm>
+          <a:prstGeom prst="roundRect">
+            <a:avLst>
+              <a:gd name="adj" fmla="val 50000"/>
+            </a:avLst>
+          </a:prstGeom>
+          <a:solidFill>
+            <a:srgbClr val="FFF3D6"/>
+          </a:solidFill>
+          <a:ln w="12700">
+            <a:solidFill>
+              <a:srgbClr val="FFF3D6"/>
+            </a:solidFill>
+            <a:prstDash val="solid"/>
+          </a:ln>
+        </p:spPr>
+      </p:sp>
+      <p:sp>
+        <p:nvSpPr>
+          <p:cNvPr id="13" name="Text 9"/>
+          <p:cNvSpPr txBox="1"/>
+          <p:nvPr/>
+        </p:nvSpPr>
+        <p:spPr>
+          <a:xfrm>
+            <a:off x="1234440" y="4023360"/>
+            <a:ext cx="2103120" cy="329184"/>
+          </a:xfrm>
+          <a:prstGeom prst="rect">
+            <a:avLst/>
+          </a:prstGeom>
+          <a:noFill/>
+          <a:ln/>
+        </p:spPr>
+        <p:txBody>
+          <a:bodyPr wrap="square" lIns="0" tIns="0" rIns="0" bIns="0" rtlCol="0" anchor="ctr"/>
+          <a:lstStyle/>
+          <a:p>
+            <a:pPr algn="ctr" indent="0" marL="0">
+              <a:buNone/>
+            </a:pPr>
+            <a:r>
+              <a:rPr lang="en-US" sz="950" b="1" spc="100" kern="0" dirty="0">
+                <a:solidFill>
+                  <a:srgbClr val="D99A00"/>
+                </a:solidFill>
+                <a:latin typeface="Calibri" pitchFamily="34" charset="0"/>
+                <a:ea typeface="Calibri" pitchFamily="34" charset="-122"/>
+                <a:cs typeface="Calibri" pitchFamily="34" charset="-120"/>
+              </a:rPr>
+              <a:t>EN COURS DE RÉSOLUTION</a:t>
+            </a:r>
+            <a:endParaRPr lang="en-US" sz="950" dirty="0"/>
+          </a:p>
+        </p:txBody>
+      </p:sp>
+      <p:sp>
+        <p:nvSpPr>
+          <p:cNvPr id="14" name="Text 10"/>
+          <p:cNvSpPr txBox="1"/>
+          <p:nvPr/>
+        </p:nvSpPr>
+        <p:spPr>
+          <a:xfrm>
+            <a:off x="822960" y="4572000"/>
+            <a:ext cx="2926080" cy="914400"/>
+          </a:xfrm>
+          <a:prstGeom prst="rect">
+            <a:avLst/>
+          </a:prstGeom>
+          <a:noFill/>
+          <a:ln/>
+        </p:spPr>
+        <p:txBody>
+          <a:bodyPr wrap="square" lIns="0" tIns="0" rIns="0" bIns="0" rtlCol="0" anchor="t"/>
+          <a:lstStyle/>
+          <a:p>
+            <a:pPr algn="ctr" indent="0" marL="0">
+              <a:buNone/>
+            </a:pPr>
+            <a:r>
+              <a:rPr lang="en-US" sz="1150" dirty="0">
+                <a:solidFill>
+                  <a:srgbClr val="1F2A30"/>
+                </a:solidFill>
+                <a:latin typeface="Calibri" pitchFamily="34" charset="0"/>
+                <a:ea typeface="Calibri" pitchFamily="34" charset="-122"/>
+                <a:cs typeface="Calibri" pitchFamily="34" charset="-120"/>
+              </a:rPr>
+              <a:t>Correctif développé par nos équipes produit, redescente planifiée le 10 septembre 2026.</a:t>
+            </a:r>
+            <a:endParaRPr lang="en-US" sz="1150" dirty="0"/>
+          </a:p>
+        </p:txBody>
+      </p:sp>
+      <p:sp>
+        <p:nvSpPr>
+          <p:cNvPr id="15" name="Shape 11"/>
+          <p:cNvSpPr/>
+          <p:nvPr/>
+        </p:nvSpPr>
+        <p:spPr>
+          <a:xfrm>
+            <a:off x="4343400" y="1965960"/>
+            <a:ext cx="2296058" cy="4251960"/>
+          </a:xfrm>
+          <a:prstGeom prst="roundRect">
+            <a:avLst>
+              <a:gd name="adj" fmla="val 4779"/>
             </a:avLst>
           </a:prstGeom>
           <a:solidFill>
@@ -28711,14 +28150,63 @@
       </p:sp>
       <p:sp>
         <p:nvSpPr>
-          <p:cNvPr id="9" name="Text 6"/>
+          <p:cNvPr id="16" name="Shape 12"/>
+          <p:cNvSpPr/>
+          <p:nvPr/>
+        </p:nvSpPr>
+        <p:spPr>
+          <a:xfrm>
+            <a:off x="4572000" y="2194560"/>
+            <a:ext cx="548640" cy="548640"/>
+          </a:xfrm>
+          <a:prstGeom prst="ellipse">
+            <a:avLst/>
+          </a:prstGeom>
+          <a:solidFill>
+            <a:srgbClr val="E4F0F2"/>
+          </a:solidFill>
+          <a:ln w="12700">
+            <a:solidFill>
+              <a:srgbClr val="E4F0F2"/>
+            </a:solidFill>
+            <a:prstDash val="solid"/>
+          </a:ln>
+        </p:spPr>
+      </p:sp>
+      <p:pic>
+        <p:nvPicPr>
+          <p:cNvPr id="17" name="Image 2" descr="preencoded.png">    </p:cNvPr>
+          <p:cNvPicPr>
+            <a:picLocks noChangeAspect="1"/>
+          </p:cNvPicPr>
+          <p:nvPr/>
+        </p:nvPicPr>
+        <p:blipFill>
+          <a:blip r:embed="rId3"/>
+          <a:stretch>
+            <a:fillRect/>
+          </a:stretch>
+        </p:blipFill>
+        <p:spPr>
+          <a:xfrm>
+            <a:off x="4714646" y="2337206"/>
+            <a:ext cx="263347" cy="263347"/>
+          </a:xfrm>
+          <a:prstGeom prst="rect">
+            <a:avLst/>
+          </a:prstGeom>
+        </p:spPr>
+      </p:pic>
+      <p:sp>
+        <p:nvSpPr>
+          <p:cNvPr id="18" name="Text 13"/>
           <p:cNvSpPr txBox="1"/>
           <p:nvPr/>
         </p:nvSpPr>
         <p:spPr>
           <a:xfrm>
-            <a:off x="731520" y="2103120"/>
-            <a:ext cx="6766560" cy="274320"/>
+            <a:off x="4572000" y="2880360"/>
+            <a:ext cx="1838858" cy="411480"/>
           </a:xfrm>
           <a:prstGeom prst="rect">
             <a:avLst/>
@@ -28727,57 +28215,128 @@
           <a:ln/>
         </p:spPr>
         <p:txBody>
-          <a:bodyPr wrap="square" lIns="0" tIns="0" rIns="0" bIns="0" rtlCol="0" anchor="t"/>
+          <a:bodyPr wrap="square" lIns="0" tIns="0" rIns="0" bIns="0" rtlCol="0" anchor="ctr"/>
           <a:lstStyle/>
           <a:p>
             <a:pPr indent="0" marL="0">
               <a:buNone/>
             </a:pPr>
             <a:r>
-              <a:rPr lang="en-US" sz="1100" b="1" dirty="0">
-                <a:solidFill>
-                  <a:srgbClr val="6B7B83"/>
-                </a:solidFill>
-                <a:latin typeface="Calibri" pitchFamily="34" charset="0"/>
-                <a:ea typeface="Calibri" pitchFamily="34" charset="-122"/>
-                <a:cs typeface="Calibri" pitchFamily="34" charset="-120"/>
-              </a:rPr>
-              <a:t>Contacts uniques (Ucount) par mois</a:t>
+              <a:rPr lang="en-US" sz="1400" b="1" dirty="0">
+                <a:solidFill>
+                  <a:srgbClr val="06404F"/>
+                </a:solidFill>
+                <a:latin typeface="Calibri" pitchFamily="34" charset="0"/>
+                <a:ea typeface="Calibri" pitchFamily="34" charset="-122"/>
+                <a:cs typeface="Calibri" pitchFamily="34" charset="-120"/>
+              </a:rPr>
+              <a:t>Le constat</a:t>
+            </a:r>
+            <a:endParaRPr lang="en-US" sz="1400" dirty="0"/>
+          </a:p>
+        </p:txBody>
+      </p:sp>
+      <p:sp>
+        <p:nvSpPr>
+          <p:cNvPr id="19" name="Shape 14"/>
+          <p:cNvSpPr/>
+          <p:nvPr/>
+        </p:nvSpPr>
+        <p:spPr>
+          <a:xfrm>
+            <a:off x="4572000" y="3364992"/>
+            <a:ext cx="1838858" cy="0"/>
+          </a:xfrm>
+          <a:prstGeom prst="line">
+            <a:avLst/>
+          </a:prstGeom>
+          <a:noFill/>
+          <a:ln w="9525">
+            <a:solidFill>
+              <a:srgbClr val="D6E0E3"/>
+            </a:solidFill>
+            <a:prstDash val="solid"/>
+          </a:ln>
+        </p:spPr>
+      </p:sp>
+      <p:sp>
+        <p:nvSpPr>
+          <p:cNvPr id="20" name="Text 15"/>
+          <p:cNvSpPr txBox="1"/>
+          <p:nvPr/>
+        </p:nvSpPr>
+        <p:spPr>
+          <a:xfrm>
+            <a:off x="4572000" y="3474720"/>
+            <a:ext cx="1838858" cy="2560320"/>
+          </a:xfrm>
+          <a:prstGeom prst="rect">
+            <a:avLst/>
+          </a:prstGeom>
+          <a:noFill/>
+          <a:ln/>
+        </p:spPr>
+        <p:txBody>
+          <a:bodyPr wrap="square" lIns="0" tIns="0" rIns="0" bIns="0" rtlCol="0" anchor="t"/>
+          <a:lstStyle/>
+          <a:p>
+            <a:pPr marL="152400" indent="-152400">
+              <a:spcAft>
+                <a:spcPts val="800"/>
+              </a:spcAft>
+              <a:buSzPct val="100000"/>
+              <a:buChar char="•"/>
+            </a:pPr>
+            <a:r>
+              <a:rPr lang="en-US" sz="1100" dirty="0">
+                <a:solidFill>
+                  <a:srgbClr val="1F2A30"/>
+                </a:solidFill>
+                <a:latin typeface="Calibri" pitchFamily="34" charset="0"/>
+                <a:ea typeface="Calibri" pitchFamily="34" charset="-122"/>
+                <a:cs typeface="Calibri" pitchFamily="34" charset="-120"/>
+              </a:rPr>
+              <a:t>Temps de réponse dégradés sur certains écrans.</a:t>
             </a:r>
             <a:endParaRPr lang="en-US" sz="1100" dirty="0"/>
           </a:p>
-        </p:txBody>
-      </p:sp>
-      <p:graphicFrame>
-        <p:nvGraphicFramePr>
-          <p:cNvPr id="10" name="Chart 0" descr=""/>
-          <p:cNvGraphicFramePr/>
-          <p:nvPr/>
-        </p:nvGraphicFramePr>
-        <p:xfrm>
-          <a:off x="685800" y="2423160"/>
-          <a:ext cx="6858000" cy="3383280"/>
-        </p:xfrm>
-        <a:graphic xmlns:a="http://schemas.openxmlformats.org/drawingml/2006/main">
-          <a:graphicData uri="http://schemas.openxmlformats.org/drawingml/2006/chart">
-            <c:chart xmlns:c="http://schemas.openxmlformats.org/drawingml/2006/chart" r:id="rId2"/>
-          </a:graphicData>
-        </a:graphic>
-      </p:graphicFrame>
-      <p:sp>
-        <p:nvSpPr>
-          <p:cNvPr id="11" name="Shape 7"/>
+          <a:p>
+            <a:pPr marL="152400" indent="-152400">
+              <a:spcAft>
+                <a:spcPts val="800"/>
+              </a:spcAft>
+              <a:buSzPct val="100000"/>
+              <a:buChar char="•"/>
+            </a:pPr>
+            <a:r>
+              <a:rPr lang="en-US" sz="1100" dirty="0">
+                <a:solidFill>
+                  <a:srgbClr val="1F2A30"/>
+                </a:solidFill>
+                <a:latin typeface="Calibri" pitchFamily="34" charset="0"/>
+                <a:ea typeface="Calibri" pitchFamily="34" charset="-122"/>
+                <a:cs typeface="Calibri" pitchFamily="34" charset="-120"/>
+              </a:rPr>
+              <a:t>Enchaînement des actions ralenti pour vos utilisateurs.</a:t>
+            </a:r>
+            <a:endParaRPr lang="en-US" sz="1100" dirty="0"/>
+          </a:p>
+        </p:txBody>
+      </p:sp>
+      <p:sp>
+        <p:nvSpPr>
+          <p:cNvPr id="21" name="Shape 16"/>
           <p:cNvSpPr/>
           <p:nvPr/>
         </p:nvSpPr>
         <p:spPr>
           <a:xfrm>
-            <a:off x="8001000" y="1965960"/>
-            <a:ext cx="3687775" cy="1325880"/>
+            <a:off x="6868058" y="1965960"/>
+            <a:ext cx="2296058" cy="4251960"/>
           </a:xfrm>
           <a:prstGeom prst="roundRect">
             <a:avLst>
-              <a:gd name="adj" fmla="val 8276"/>
+              <a:gd name="adj" fmla="val 4779"/>
             </a:avLst>
           </a:prstGeom>
           <a:solidFill>
@@ -28800,14 +28359,14 @@
       </p:sp>
       <p:sp>
         <p:nvSpPr>
-          <p:cNvPr id="12" name="Shape 8"/>
+          <p:cNvPr id="22" name="Shape 17"/>
           <p:cNvSpPr/>
           <p:nvPr/>
         </p:nvSpPr>
         <p:spPr>
           <a:xfrm>
-            <a:off x="8202168" y="2167128"/>
-            <a:ext cx="457200" cy="457200"/>
+            <a:off x="7096658" y="2194560"/>
+            <a:ext cx="548640" cy="548640"/>
           </a:xfrm>
           <a:prstGeom prst="ellipse">
             <a:avLst/>
@@ -28825,22 +28384,22 @@
       </p:sp>
       <p:pic>
         <p:nvPicPr>
-          <p:cNvPr id="13" name="Image 1" descr="preencoded.png">    </p:cNvPr>
+          <p:cNvPr id="23" name="Image 3" descr="preencoded.png">    </p:cNvPr>
           <p:cNvPicPr>
             <a:picLocks noChangeAspect="1"/>
           </p:cNvPicPr>
           <p:nvPr/>
         </p:nvPicPr>
         <p:blipFill>
-          <a:blip r:embed="rId3"/>
+          <a:blip r:embed="rId4"/>
           <a:stretch>
             <a:fillRect/>
           </a:stretch>
         </p:blipFill>
         <p:spPr>
           <a:xfrm>
-            <a:off x="8321040" y="2286000"/>
-            <a:ext cx="219456" cy="219456"/>
+            <a:off x="7239305" y="2337206"/>
+            <a:ext cx="263347" cy="263347"/>
           </a:xfrm>
           <a:prstGeom prst="rect">
             <a:avLst/>
@@ -28849,14 +28408,14 @@
       </p:pic>
       <p:sp>
         <p:nvSpPr>
-          <p:cNvPr id="14" name="Text 9"/>
+          <p:cNvPr id="24" name="Text 18"/>
           <p:cNvSpPr txBox="1"/>
           <p:nvPr/>
         </p:nvSpPr>
         <p:spPr>
           <a:xfrm>
-            <a:off x="8778240" y="2167128"/>
-            <a:ext cx="2727655" cy="457200"/>
+            <a:off x="7096658" y="2880360"/>
+            <a:ext cx="1838858" cy="411480"/>
           </a:xfrm>
           <a:prstGeom prst="rect">
             <a:avLst/>
@@ -28872,85 +28431,94 @@
               <a:buNone/>
             </a:pPr>
             <a:r>
-              <a:rPr lang="en-US" sz="1100" b="1" dirty="0">
-                <a:solidFill>
-                  <a:srgbClr val="6B7B83"/>
-                </a:solidFill>
-                <a:latin typeface="Calibri" pitchFamily="34" charset="0"/>
-                <a:ea typeface="Calibri" pitchFamily="34" charset="-122"/>
-                <a:cs typeface="Calibri" pitchFamily="34" charset="-120"/>
-              </a:rPr>
-              <a:t>Août 2026</a:t>
+              <a:rPr lang="en-US" sz="1400" b="1" dirty="0">
+                <a:solidFill>
+                  <a:srgbClr val="06404F"/>
+                </a:solidFill>
+                <a:latin typeface="Calibri" pitchFamily="34" charset="0"/>
+                <a:ea typeface="Calibri" pitchFamily="34" charset="-122"/>
+                <a:cs typeface="Calibri" pitchFamily="34" charset="-120"/>
+              </a:rPr>
+              <a:t>Ce que nous faisons</a:t>
+            </a:r>
+            <a:endParaRPr lang="en-US" sz="1400" dirty="0"/>
+          </a:p>
+        </p:txBody>
+      </p:sp>
+      <p:sp>
+        <p:nvSpPr>
+          <p:cNvPr id="25" name="Shape 19"/>
+          <p:cNvSpPr/>
+          <p:nvPr/>
+        </p:nvSpPr>
+        <p:spPr>
+          <a:xfrm>
+            <a:off x="7096658" y="3364992"/>
+            <a:ext cx="1838858" cy="0"/>
+          </a:xfrm>
+          <a:prstGeom prst="line">
+            <a:avLst/>
+          </a:prstGeom>
+          <a:noFill/>
+          <a:ln w="9525">
+            <a:solidFill>
+              <a:srgbClr val="D6E0E3"/>
+            </a:solidFill>
+            <a:prstDash val="solid"/>
+          </a:ln>
+        </p:spPr>
+      </p:sp>
+      <p:sp>
+        <p:nvSpPr>
+          <p:cNvPr id="26" name="Text 20"/>
+          <p:cNvSpPr txBox="1"/>
+          <p:nvPr/>
+        </p:nvSpPr>
+        <p:spPr>
+          <a:xfrm>
+            <a:off x="7096658" y="3474720"/>
+            <a:ext cx="1838858" cy="2560320"/>
+          </a:xfrm>
+          <a:prstGeom prst="rect">
+            <a:avLst/>
+          </a:prstGeom>
+          <a:noFill/>
+          <a:ln/>
+        </p:spPr>
+        <p:txBody>
+          <a:bodyPr wrap="square" lIns="0" tIns="0" rIns="0" bIns="0" rtlCol="0" anchor="t"/>
+          <a:lstStyle/>
+          <a:p>
+            <a:pPr marL="152400" indent="-152400">
+              <a:spcAft>
+                <a:spcPts val="800"/>
+              </a:spcAft>
+              <a:buSzPct val="100000"/>
+              <a:buChar char="•"/>
+            </a:pPr>
+            <a:r>
+              <a:rPr lang="en-US" sz="1100" dirty="0">
+                <a:solidFill>
+                  <a:srgbClr val="1F2A30"/>
+                </a:solidFill>
+                <a:latin typeface="Calibri" pitchFamily="34" charset="0"/>
+                <a:ea typeface="Calibri" pitchFamily="34" charset="-122"/>
+                <a:cs typeface="Calibri" pitchFamily="34" charset="-120"/>
+              </a:rPr>
+              <a:t>Passage de la navigation en mode asynchrone.</a:t>
             </a:r>
             <a:endParaRPr lang="en-US" sz="1100" dirty="0"/>
           </a:p>
-        </p:txBody>
-      </p:sp>
-      <p:sp>
-        <p:nvSpPr>
-          <p:cNvPr id="15" name="Text 10"/>
-          <p:cNvSpPr txBox="1"/>
-          <p:nvPr/>
-        </p:nvSpPr>
-        <p:spPr>
-          <a:xfrm>
-            <a:off x="8202168" y="2679192"/>
-            <a:ext cx="3285439" cy="502920"/>
-          </a:xfrm>
-          <a:prstGeom prst="rect">
-            <a:avLst/>
-          </a:prstGeom>
-          <a:noFill/>
-          <a:ln/>
-        </p:spPr>
-        <p:txBody>
-          <a:bodyPr wrap="square" lIns="0" tIns="0" rIns="0" bIns="0" rtlCol="0" anchor="ctr"/>
-          <a:lstStyle/>
-          <a:p>
-            <a:pPr indent="0" marL="0">
-              <a:buNone/>
-            </a:pPr>
-            <a:r>
-              <a:rPr lang="en-US" sz="2400" b="1" dirty="0">
-                <a:solidFill>
-                  <a:srgbClr val="06404F"/>
-                </a:solidFill>
-                <a:latin typeface="Calibri" pitchFamily="34" charset="0"/>
-                <a:ea typeface="Calibri" pitchFamily="34" charset="-122"/>
-                <a:cs typeface="Calibri" pitchFamily="34" charset="-120"/>
-              </a:rPr>
-              <a:t>824 913</a:t>
-            </a:r>
-            <a:endParaRPr lang="en-US" sz="2400" dirty="0"/>
-          </a:p>
-        </p:txBody>
-      </p:sp>
-      <p:sp>
-        <p:nvSpPr>
-          <p:cNvPr id="16" name="Text 11"/>
-          <p:cNvSpPr txBox="1"/>
-          <p:nvPr/>
-        </p:nvSpPr>
-        <p:spPr>
-          <a:xfrm>
-            <a:off x="8202168" y="3182112"/>
-            <a:ext cx="3285439" cy="-27432"/>
-          </a:xfrm>
-          <a:prstGeom prst="rect">
-            <a:avLst/>
-          </a:prstGeom>
-          <a:noFill/>
-          <a:ln/>
-        </p:spPr>
-        <p:txBody>
-          <a:bodyPr wrap="square" lIns="0" tIns="0" rIns="0" bIns="0" rtlCol="0" anchor="t"/>
-          <a:lstStyle/>
-          <a:p>
-            <a:pPr indent="0" marL="0">
-              <a:buNone/>
-            </a:pPr>
-            <a:r>
-              <a:rPr lang="en-US" sz="1000" dirty="0">
+          <a:p>
+            <a:pPr marL="152400" indent="-152400">
+              <a:spcAft>
+                <a:spcPts val="800"/>
+              </a:spcAft>
+              <a:buSzPct val="100000"/>
+              <a:buChar char="•"/>
+            </a:pPr>
+            <a:r>
+              <a:rPr lang="en-US" sz="1100" dirty="0">
                 <a:solidFill>
                   <a:srgbClr val="1F2A30"/>
                 </a:solidFill>
@@ -28958,26 +28526,26 @@
                 <a:ea typeface="Calibri" pitchFamily="34" charset="-122"/>
                 <a:cs typeface="Calibri" pitchFamily="34" charset="-120"/>
               </a:rPr>
-              <a:t>+0,6 % vs juillet (+4 874) · +20,2 % sur un an</a:t>
-            </a:r>
-            <a:endParaRPr lang="en-US" sz="1000" dirty="0"/>
-          </a:p>
-        </p:txBody>
-      </p:sp>
-      <p:sp>
-        <p:nvSpPr>
-          <p:cNvPr id="17" name="Shape 12"/>
+              <a:t>Correctif validé en interne, redescente planifiée.</a:t>
+            </a:r>
+            <a:endParaRPr lang="en-US" sz="1100" dirty="0"/>
+          </a:p>
+        </p:txBody>
+      </p:sp>
+      <p:sp>
+        <p:nvSpPr>
+          <p:cNvPr id="27" name="Shape 21"/>
           <p:cNvSpPr/>
           <p:nvPr/>
         </p:nvSpPr>
         <p:spPr>
           <a:xfrm>
-            <a:off x="8001000" y="3429000"/>
-            <a:ext cx="3687775" cy="1325880"/>
+            <a:off x="9392717" y="1965960"/>
+            <a:ext cx="2296058" cy="4251960"/>
           </a:xfrm>
           <a:prstGeom prst="roundRect">
             <a:avLst>
-              <a:gd name="adj" fmla="val 8276"/>
+              <a:gd name="adj" fmla="val 4779"/>
             </a:avLst>
           </a:prstGeom>
           <a:solidFill>
@@ -29000,14 +28568,14 @@
       </p:sp>
       <p:sp>
         <p:nvSpPr>
-          <p:cNvPr id="18" name="Shape 13"/>
+          <p:cNvPr id="28" name="Shape 22"/>
           <p:cNvSpPr/>
           <p:nvPr/>
         </p:nvSpPr>
         <p:spPr>
           <a:xfrm>
-            <a:off x="8202168" y="3630168"/>
-            <a:ext cx="457200" cy="457200"/>
+            <a:off x="9621317" y="2194560"/>
+            <a:ext cx="548640" cy="548640"/>
           </a:xfrm>
           <a:prstGeom prst="ellipse">
             <a:avLst/>
@@ -29025,200 +28593,7 @@
       </p:sp>
       <p:pic>
         <p:nvPicPr>
-          <p:cNvPr id="19" name="Image 2" descr="preencoded.png">    </p:cNvPr>
-          <p:cNvPicPr>
-            <a:picLocks noChangeAspect="1"/>
-          </p:cNvPicPr>
-          <p:nvPr/>
-        </p:nvPicPr>
-        <p:blipFill>
-          <a:blip r:embed="rId4"/>
-          <a:stretch>
-            <a:fillRect/>
-          </a:stretch>
-        </p:blipFill>
-        <p:spPr>
-          <a:xfrm>
-            <a:off x="8321040" y="3749040"/>
-            <a:ext cx="219456" cy="219456"/>
-          </a:xfrm>
-          <a:prstGeom prst="rect">
-            <a:avLst/>
-          </a:prstGeom>
-        </p:spPr>
-      </p:pic>
-      <p:sp>
-        <p:nvSpPr>
-          <p:cNvPr id="20" name="Text 14"/>
-          <p:cNvSpPr txBox="1"/>
-          <p:nvPr/>
-        </p:nvSpPr>
-        <p:spPr>
-          <a:xfrm>
-            <a:off x="8778240" y="3630168"/>
-            <a:ext cx="2727655" cy="457200"/>
-          </a:xfrm>
-          <a:prstGeom prst="rect">
-            <a:avLst/>
-          </a:prstGeom>
-          <a:noFill/>
-          <a:ln/>
-        </p:spPr>
-        <p:txBody>
-          <a:bodyPr wrap="square" lIns="0" tIns="0" rIns="0" bIns="0" rtlCol="0" anchor="ctr"/>
-          <a:lstStyle/>
-          <a:p>
-            <a:pPr indent="0" marL="0">
-              <a:buNone/>
-            </a:pPr>
-            <a:r>
-              <a:rPr lang="en-US" sz="1100" b="1" dirty="0">
-                <a:solidFill>
-                  <a:srgbClr val="6B7B83"/>
-                </a:solidFill>
-                <a:latin typeface="Calibri" pitchFamily="34" charset="0"/>
-                <a:ea typeface="Calibri" pitchFamily="34" charset="-122"/>
-                <a:cs typeface="Calibri" pitchFamily="34" charset="-120"/>
-              </a:rPr>
-              <a:t>Depuis juin 2025</a:t>
-            </a:r>
-            <a:endParaRPr lang="en-US" sz="1100" dirty="0"/>
-          </a:p>
-        </p:txBody>
-      </p:sp>
-      <p:sp>
-        <p:nvSpPr>
-          <p:cNvPr id="21" name="Text 15"/>
-          <p:cNvSpPr txBox="1"/>
-          <p:nvPr/>
-        </p:nvSpPr>
-        <p:spPr>
-          <a:xfrm>
-            <a:off x="8202168" y="4142232"/>
-            <a:ext cx="3285439" cy="502920"/>
-          </a:xfrm>
-          <a:prstGeom prst="rect">
-            <a:avLst/>
-          </a:prstGeom>
-          <a:noFill/>
-          <a:ln/>
-        </p:spPr>
-        <p:txBody>
-          <a:bodyPr wrap="square" lIns="0" tIns="0" rIns="0" bIns="0" rtlCol="0" anchor="ctr"/>
-          <a:lstStyle/>
-          <a:p>
-            <a:pPr indent="0" marL="0">
-              <a:buNone/>
-            </a:pPr>
-            <a:r>
-              <a:rPr lang="en-US" sz="2400" b="1" dirty="0">
-                <a:solidFill>
-                  <a:srgbClr val="06404F"/>
-                </a:solidFill>
-                <a:latin typeface="Calibri" pitchFamily="34" charset="0"/>
-                <a:ea typeface="Calibri" pitchFamily="34" charset="-122"/>
-                <a:cs typeface="Calibri" pitchFamily="34" charset="-120"/>
-              </a:rPr>
-              <a:t>+17,5 %</a:t>
-            </a:r>
-            <a:endParaRPr lang="en-US" sz="2400" dirty="0"/>
-          </a:p>
-        </p:txBody>
-      </p:sp>
-      <p:sp>
-        <p:nvSpPr>
-          <p:cNvPr id="22" name="Text 16"/>
-          <p:cNvSpPr txBox="1"/>
-          <p:nvPr/>
-        </p:nvSpPr>
-        <p:spPr>
-          <a:xfrm>
-            <a:off x="8202168" y="4645152"/>
-            <a:ext cx="3285439" cy="-27432"/>
-          </a:xfrm>
-          <a:prstGeom prst="rect">
-            <a:avLst/>
-          </a:prstGeom>
-          <a:noFill/>
-          <a:ln/>
-        </p:spPr>
-        <p:txBody>
-          <a:bodyPr wrap="square" lIns="0" tIns="0" rIns="0" bIns="0" rtlCol="0" anchor="t"/>
-          <a:lstStyle/>
-          <a:p>
-            <a:pPr indent="0" marL="0">
-              <a:buNone/>
-            </a:pPr>
-            <a:r>
-              <a:rPr lang="en-US" sz="1000" dirty="0">
-                <a:solidFill>
-                  <a:srgbClr val="1F2A30"/>
-                </a:solidFill>
-                <a:latin typeface="Calibri" pitchFamily="34" charset="0"/>
-                <a:ea typeface="Calibri" pitchFamily="34" charset="-122"/>
-                <a:cs typeface="Calibri" pitchFamily="34" charset="-120"/>
-              </a:rPr>
-              <a:t>≈ +8 800 contacts par mois · en ralentissement</a:t>
-            </a:r>
-            <a:endParaRPr lang="en-US" sz="1000" dirty="0"/>
-          </a:p>
-        </p:txBody>
-      </p:sp>
-      <p:sp>
-        <p:nvSpPr>
-          <p:cNvPr id="23" name="Shape 17"/>
-          <p:cNvSpPr/>
-          <p:nvPr/>
-        </p:nvSpPr>
-        <p:spPr>
-          <a:xfrm>
-            <a:off x="8001000" y="4892040"/>
-            <a:ext cx="3687775" cy="1325880"/>
-          </a:xfrm>
-          <a:prstGeom prst="roundRect">
-            <a:avLst>
-              <a:gd name="adj" fmla="val 8276"/>
-            </a:avLst>
-          </a:prstGeom>
-          <a:solidFill>
-            <a:srgbClr val="FDEBD9"/>
-          </a:solidFill>
-          <a:ln w="12700">
-            <a:solidFill>
-              <a:srgbClr val="FDEBD9"/>
-            </a:solidFill>
-            <a:prstDash val="solid"/>
-          </a:ln>
-        </p:spPr>
-      </p:sp>
-      <p:sp>
-        <p:nvSpPr>
-          <p:cNvPr id="24" name="Shape 18"/>
-          <p:cNvSpPr/>
-          <p:nvPr/>
-        </p:nvSpPr>
-        <p:spPr>
-          <a:xfrm>
-            <a:off x="8183880" y="5074920"/>
-            <a:ext cx="384048" cy="384048"/>
-          </a:xfrm>
-          <a:prstGeom prst="ellipse">
-            <a:avLst/>
-          </a:prstGeom>
-          <a:solidFill>
-            <a:srgbClr val="F28C28"/>
-          </a:solidFill>
-          <a:ln w="12700">
-            <a:solidFill>
-              <a:srgbClr val="F28C28"/>
-            </a:solidFill>
-            <a:prstDash val="solid"/>
-          </a:ln>
-        </p:spPr>
-      </p:sp>
-      <p:pic>
-        <p:nvPicPr>
-          <p:cNvPr id="25" name="Image 3" descr="preencoded.png">    </p:cNvPr>
+          <p:cNvPr id="29" name="Image 4" descr="preencoded.png">    </p:cNvPr>
           <p:cNvPicPr>
             <a:picLocks noChangeAspect="1"/>
           </p:cNvPicPr>
@@ -29232,8 +28607,8 @@
         </p:blipFill>
         <p:spPr>
           <a:xfrm>
-            <a:off x="8283732" y="5174772"/>
-            <a:ext cx="184343" cy="184343"/>
+            <a:off x="9763963" y="2337206"/>
+            <a:ext cx="263347" cy="263347"/>
           </a:xfrm>
           <a:prstGeom prst="rect">
             <a:avLst/>
@@ -29242,14 +28617,14 @@
       </p:pic>
       <p:sp>
         <p:nvSpPr>
-          <p:cNvPr id="26" name="Text 19"/>
+          <p:cNvPr id="30" name="Text 23"/>
           <p:cNvSpPr txBox="1"/>
           <p:nvPr/>
         </p:nvSpPr>
         <p:spPr>
           <a:xfrm>
-            <a:off x="8686800" y="5074920"/>
-            <a:ext cx="2819095" cy="384048"/>
+            <a:off x="9621317" y="2880360"/>
+            <a:ext cx="1838858" cy="411480"/>
           </a:xfrm>
           <a:prstGeom prst="rect">
             <a:avLst/>
@@ -29265,30 +28640,53 @@
               <a:buNone/>
             </a:pPr>
             <a:r>
-              <a:rPr lang="en-US" sz="1250" b="1" dirty="0">
-                <a:solidFill>
-                  <a:srgbClr val="F28C28"/>
-                </a:solidFill>
-                <a:latin typeface="Calibri" pitchFamily="34" charset="0"/>
-                <a:ea typeface="Calibri" pitchFamily="34" charset="-122"/>
-                <a:cs typeface="Calibri" pitchFamily="34" charset="-120"/>
-              </a:rPr>
-              <a:t>Question</a:t>
-            </a:r>
-            <a:endParaRPr lang="en-US" sz="1250" dirty="0"/>
-          </a:p>
-        </p:txBody>
-      </p:sp>
-      <p:sp>
-        <p:nvSpPr>
-          <p:cNvPr id="27" name="Text 20"/>
+              <a:rPr lang="en-US" sz="1400" b="1" dirty="0">
+                <a:solidFill>
+                  <a:srgbClr val="06404F"/>
+                </a:solidFill>
+                <a:latin typeface="Calibri" pitchFamily="34" charset="0"/>
+                <a:ea typeface="Calibri" pitchFamily="34" charset="-122"/>
+                <a:cs typeface="Calibri" pitchFamily="34" charset="-120"/>
+              </a:rPr>
+              <a:t>Pour vos équipes</a:t>
+            </a:r>
+            <a:endParaRPr lang="en-US" sz="1400" dirty="0"/>
+          </a:p>
+        </p:txBody>
+      </p:sp>
+      <p:sp>
+        <p:nvSpPr>
+          <p:cNvPr id="31" name="Shape 24"/>
+          <p:cNvSpPr/>
+          <p:nvPr/>
+        </p:nvSpPr>
+        <p:spPr>
+          <a:xfrm>
+            <a:off x="9621317" y="3364992"/>
+            <a:ext cx="1838858" cy="0"/>
+          </a:xfrm>
+          <a:prstGeom prst="line">
+            <a:avLst/>
+          </a:prstGeom>
+          <a:noFill/>
+          <a:ln w="9525">
+            <a:solidFill>
+              <a:srgbClr val="D6E0E3"/>
+            </a:solidFill>
+            <a:prstDash val="solid"/>
+          </a:ln>
+        </p:spPr>
+      </p:sp>
+      <p:sp>
+        <p:nvSpPr>
+          <p:cNvPr id="32" name="Text 25"/>
           <p:cNvSpPr txBox="1"/>
           <p:nvPr/>
         </p:nvSpPr>
         <p:spPr>
           <a:xfrm>
-            <a:off x="8229600" y="5532120"/>
-            <a:ext cx="3230575" cy="548640"/>
+            <a:off x="9621317" y="3474720"/>
+            <a:ext cx="1838858" cy="2560320"/>
           </a:xfrm>
           <a:prstGeom prst="rect">
             <a:avLst/>
@@ -29300,8 +28698,12 @@
           <a:bodyPr wrap="square" lIns="0" tIns="0" rIns="0" bIns="0" rtlCol="0" anchor="t"/>
           <a:lstStyle/>
           <a:p>
-            <a:pPr indent="0" marL="0">
-              <a:buNone/>
+            <a:pPr marL="152400" indent="-152400">
+              <a:spcAft>
+                <a:spcPts val="800"/>
+              </a:spcAft>
+              <a:buSzPct val="100000"/>
+              <a:buChar char="•"/>
             </a:pPr>
             <a:r>
               <a:rPr lang="en-US" sz="1100" dirty="0">
@@ -29312,7 +28714,28 @@
                 <a:ea typeface="Calibri" pitchFamily="34" charset="-122"/>
                 <a:cs typeface="Calibri" pitchFamily="34" charset="-120"/>
               </a:rPr>
-              <a:t>Votre palier de licence est-il toujours adapté ? Quel volume de contacts prévoyez-vous en 2027 ?</a:t>
+              <a:t>Navigation plus fluide, sans changement d’usage.</a:t>
+            </a:r>
+            <a:endParaRPr lang="en-US" sz="1100" dirty="0"/>
+          </a:p>
+          <a:p>
+            <a:pPr marL="152400" indent="-152400">
+              <a:spcAft>
+                <a:spcPts val="800"/>
+              </a:spcAft>
+              <a:buSzPct val="100000"/>
+              <a:buChar char="•"/>
+            </a:pPr>
+            <a:r>
+              <a:rPr lang="en-US" sz="1100" dirty="0">
+                <a:solidFill>
+                  <a:srgbClr val="1F2A30"/>
+                </a:solidFill>
+                <a:latin typeface="Calibri" pitchFamily="34" charset="0"/>
+                <a:ea typeface="Calibri" pitchFamily="34" charset="-122"/>
+                <a:cs typeface="Calibri" pitchFamily="34" charset="-120"/>
+              </a:rPr>
+              <a:t>Aucune action ni paramétrage de votre côté.</a:t>
             </a:r>
             <a:endParaRPr lang="en-US" sz="1100" dirty="0"/>
           </a:p>
@@ -29465,7 +28888,7 @@
               <a:buNone/>
             </a:pPr>
             <a:r>
-              <a:rPr lang="en-US" sz="2200" b="1" dirty="0">
+              <a:rPr lang="en-US" sz="2600" b="1" dirty="0">
                 <a:solidFill>
                   <a:srgbClr val="06404F"/>
                 </a:solidFill>
@@ -29473,9 +28896,9 @@
                 <a:ea typeface="Calibri" pitchFamily="34" charset="-122"/>
                 <a:cs typeface="Calibri" pitchFamily="34" charset="-120"/>
               </a:rPr>
-              <a:t>Rapidité de l’application : le patch de navigation asynchrone</a:t>
-            </a:r>
-            <a:endParaRPr lang="en-US" sz="2200" dirty="0"/>
+              <a:t>Correctif SSO sur les pages AdminTool et ConfigTool</a:t>
+            </a:r>
+            <a:endParaRPr lang="en-US" sz="2600" dirty="0"/>
           </a:p>
         </p:txBody>
       </p:sp>
@@ -29512,7 +28935,7 @@
                 <a:ea typeface="Calibri" pitchFamily="34" charset="-122"/>
                 <a:cs typeface="Calibri" pitchFamily="34" charset="-120"/>
               </a:rPr>
-              <a:t>Correctif en cours de résolution sur les temps de réponse et la fluidité de navigation dans CDM.</a:t>
+              <a:t>Solution communiquée le 31 août 2026, correctif en cours de résolution sur l’authentification des pages d’administration.</a:t>
             </a:r>
             <a:endParaRPr lang="en-US" sz="1300" dirty="0"/>
           </a:p>
@@ -29566,231 +28989,11 @@
         <p:spPr>
           <a:xfrm>
             <a:off x="502920" y="1965960"/>
-            <a:ext cx="3566160" cy="4251960"/>
+            <a:ext cx="2645588" cy="3017520"/>
           </a:xfrm>
           <a:prstGeom prst="roundRect">
             <a:avLst>
-              <a:gd name="adj" fmla="val 3077"/>
-            </a:avLst>
-          </a:prstGeom>
-          <a:solidFill>
-            <a:srgbClr val="F2F8F9"/>
-          </a:solidFill>
-          <a:ln w="12700">
-            <a:solidFill>
-              <a:srgbClr val="F2F8F9"/>
-            </a:solidFill>
-            <a:prstDash val="solid"/>
-          </a:ln>
-        </p:spPr>
-      </p:sp>
-      <p:sp>
-        <p:nvSpPr>
-          <p:cNvPr id="9" name="Shape 6"/>
-          <p:cNvSpPr/>
-          <p:nvPr/>
-        </p:nvSpPr>
-        <p:spPr>
-          <a:xfrm>
-            <a:off x="1828800" y="2331720"/>
-            <a:ext cx="914400" cy="914400"/>
-          </a:xfrm>
-          <a:prstGeom prst="ellipse">
-            <a:avLst/>
-          </a:prstGeom>
-          <a:solidFill>
-            <a:srgbClr val="06404F"/>
-          </a:solidFill>
-          <a:ln w="12700">
-            <a:solidFill>
-              <a:srgbClr val="06404F"/>
-            </a:solidFill>
-            <a:prstDash val="solid"/>
-          </a:ln>
-        </p:spPr>
-      </p:sp>
-      <p:pic>
-        <p:nvPicPr>
-          <p:cNvPr id="10" name="Image 1" descr="preencoded.png">    </p:cNvPr>
-          <p:cNvPicPr>
-            <a:picLocks noChangeAspect="1"/>
-          </p:cNvPicPr>
-          <p:nvPr/>
-        </p:nvPicPr>
-        <p:blipFill>
-          <a:blip r:embed="rId2"/>
-          <a:stretch>
-            <a:fillRect/>
-          </a:stretch>
-        </p:blipFill>
-        <p:spPr>
-          <a:xfrm>
-            <a:off x="2066544" y="2569464"/>
-            <a:ext cx="438912" cy="438912"/>
-          </a:xfrm>
-          <a:prstGeom prst="rect">
-            <a:avLst/>
-          </a:prstGeom>
-        </p:spPr>
-      </p:pic>
-      <p:sp>
-        <p:nvSpPr>
-          <p:cNvPr id="11" name="Text 7"/>
-          <p:cNvSpPr txBox="1"/>
-          <p:nvPr/>
-        </p:nvSpPr>
-        <p:spPr>
-          <a:xfrm>
-            <a:off x="777240" y="3429000"/>
-            <a:ext cx="3017520" cy="457200"/>
-          </a:xfrm>
-          <a:prstGeom prst="rect">
-            <a:avLst/>
-          </a:prstGeom>
-          <a:noFill/>
-          <a:ln/>
-        </p:spPr>
-        <p:txBody>
-          <a:bodyPr wrap="square" lIns="0" tIns="0" rIns="0" bIns="0" rtlCol="0" anchor="ctr"/>
-          <a:lstStyle/>
-          <a:p>
-            <a:pPr algn="ctr" indent="0" marL="0">
-              <a:buNone/>
-            </a:pPr>
-            <a:r>
-              <a:rPr lang="en-US" sz="1700" b="1" dirty="0">
-                <a:solidFill>
-                  <a:srgbClr val="06404F"/>
-                </a:solidFill>
-                <a:latin typeface="Calibri" pitchFamily="34" charset="0"/>
-                <a:ea typeface="Calibri" pitchFamily="34" charset="-122"/>
-                <a:cs typeface="Calibri" pitchFamily="34" charset="-120"/>
-              </a:rPr>
-              <a:t>Navigation asynchrone</a:t>
-            </a:r>
-            <a:endParaRPr lang="en-US" sz="1700" dirty="0"/>
-          </a:p>
-        </p:txBody>
-      </p:sp>
-      <p:sp>
-        <p:nvSpPr>
-          <p:cNvPr id="12" name="Shape 8"/>
-          <p:cNvSpPr/>
-          <p:nvPr/>
-        </p:nvSpPr>
-        <p:spPr>
-          <a:xfrm>
-            <a:off x="1234440" y="4023360"/>
-            <a:ext cx="2103120" cy="329184"/>
-          </a:xfrm>
-          <a:prstGeom prst="roundRect">
-            <a:avLst>
-              <a:gd name="adj" fmla="val 50000"/>
-            </a:avLst>
-          </a:prstGeom>
-          <a:solidFill>
-            <a:srgbClr val="FFF3D6"/>
-          </a:solidFill>
-          <a:ln w="12700">
-            <a:solidFill>
-              <a:srgbClr val="FFF3D6"/>
-            </a:solidFill>
-            <a:prstDash val="solid"/>
-          </a:ln>
-        </p:spPr>
-      </p:sp>
-      <p:sp>
-        <p:nvSpPr>
-          <p:cNvPr id="13" name="Text 9"/>
-          <p:cNvSpPr txBox="1"/>
-          <p:nvPr/>
-        </p:nvSpPr>
-        <p:spPr>
-          <a:xfrm>
-            <a:off x="1234440" y="4023360"/>
-            <a:ext cx="2103120" cy="329184"/>
-          </a:xfrm>
-          <a:prstGeom prst="rect">
-            <a:avLst/>
-          </a:prstGeom>
-          <a:noFill/>
-          <a:ln/>
-        </p:spPr>
-        <p:txBody>
-          <a:bodyPr wrap="square" lIns="0" tIns="0" rIns="0" bIns="0" rtlCol="0" anchor="ctr"/>
-          <a:lstStyle/>
-          <a:p>
-            <a:pPr algn="ctr" indent="0" marL="0">
-              <a:buNone/>
-            </a:pPr>
-            <a:r>
-              <a:rPr lang="en-US" sz="950" b="1" spc="100" kern="0" dirty="0">
-                <a:solidFill>
-                  <a:srgbClr val="D99A00"/>
-                </a:solidFill>
-                <a:latin typeface="Calibri" pitchFamily="34" charset="0"/>
-                <a:ea typeface="Calibri" pitchFamily="34" charset="-122"/>
-                <a:cs typeface="Calibri" pitchFamily="34" charset="-120"/>
-              </a:rPr>
-              <a:t>EN COURS DE RÉSOLUTION</a:t>
-            </a:r>
-            <a:endParaRPr lang="en-US" sz="950" dirty="0"/>
-          </a:p>
-        </p:txBody>
-      </p:sp>
-      <p:sp>
-        <p:nvSpPr>
-          <p:cNvPr id="14" name="Text 10"/>
-          <p:cNvSpPr txBox="1"/>
-          <p:nvPr/>
-        </p:nvSpPr>
-        <p:spPr>
-          <a:xfrm>
-            <a:off x="822960" y="4572000"/>
-            <a:ext cx="2926080" cy="914400"/>
-          </a:xfrm>
-          <a:prstGeom prst="rect">
-            <a:avLst/>
-          </a:prstGeom>
-          <a:noFill/>
-          <a:ln/>
-        </p:spPr>
-        <p:txBody>
-          <a:bodyPr wrap="square" lIns="0" tIns="0" rIns="0" bIns="0" rtlCol="0" anchor="t"/>
-          <a:lstStyle/>
-          <a:p>
-            <a:pPr algn="ctr" indent="0" marL="0">
-              <a:buNone/>
-            </a:pPr>
-            <a:r>
-              <a:rPr lang="en-US" sz="1150" dirty="0">
-                <a:solidFill>
-                  <a:srgbClr val="1F2A30"/>
-                </a:solidFill>
-                <a:latin typeface="Calibri" pitchFamily="34" charset="0"/>
-                <a:ea typeface="Calibri" pitchFamily="34" charset="-122"/>
-                <a:cs typeface="Calibri" pitchFamily="34" charset="-120"/>
-              </a:rPr>
-              <a:t>Correctif développé par nos équipes produit, redescente planifiée le 10 septembre 2026.</a:t>
-            </a:r>
-            <a:endParaRPr lang="en-US" sz="1150" dirty="0"/>
-          </a:p>
-        </p:txBody>
-      </p:sp>
-      <p:sp>
-        <p:nvSpPr>
-          <p:cNvPr id="15" name="Shape 11"/>
-          <p:cNvSpPr/>
-          <p:nvPr/>
-        </p:nvSpPr>
-        <p:spPr>
-          <a:xfrm>
-            <a:off x="4343400" y="1965960"/>
-            <a:ext cx="2296058" cy="4251960"/>
-          </a:xfrm>
-          <a:prstGeom prst="roundRect">
-            <a:avLst>
-              <a:gd name="adj" fmla="val 4779"/>
+              <a:gd name="adj" fmla="val 4148"/>
             </a:avLst>
           </a:prstGeom>
           <a:solidFill>
@@ -29813,24 +29016,24 @@
       </p:sp>
       <p:sp>
         <p:nvSpPr>
-          <p:cNvPr id="16" name="Shape 12"/>
+          <p:cNvPr id="9" name="Shape 6"/>
           <p:cNvSpPr/>
           <p:nvPr/>
         </p:nvSpPr>
         <p:spPr>
           <a:xfrm>
-            <a:off x="4572000" y="2194560"/>
+            <a:off x="731520" y="2194560"/>
             <a:ext cx="548640" cy="548640"/>
           </a:xfrm>
           <a:prstGeom prst="ellipse">
             <a:avLst/>
           </a:prstGeom>
           <a:solidFill>
-            <a:srgbClr val="E4F0F2"/>
+            <a:srgbClr val="06404F"/>
           </a:solidFill>
           <a:ln w="12700">
             <a:solidFill>
-              <a:srgbClr val="E4F0F2"/>
+              <a:srgbClr val="06404F"/>
             </a:solidFill>
             <a:prstDash val="solid"/>
           </a:ln>
@@ -29838,21 +29041,21 @@
       </p:sp>
       <p:pic>
         <p:nvPicPr>
-          <p:cNvPr id="17" name="Image 2" descr="preencoded.png">    </p:cNvPr>
+          <p:cNvPr id="10" name="Image 1" descr="preencoded.png">    </p:cNvPr>
           <p:cNvPicPr>
             <a:picLocks noChangeAspect="1"/>
           </p:cNvPicPr>
           <p:nvPr/>
         </p:nvPicPr>
         <p:blipFill>
-          <a:blip r:embed="rId3"/>
+          <a:blip r:embed="rId2"/>
           <a:stretch>
             <a:fillRect/>
           </a:stretch>
         </p:blipFill>
         <p:spPr>
           <a:xfrm>
-            <a:off x="4714646" y="2337206"/>
+            <a:off x="874166" y="2337206"/>
             <a:ext cx="263347" cy="263347"/>
           </a:xfrm>
           <a:prstGeom prst="rect">
@@ -29862,14 +29065,14 @@
       </p:pic>
       <p:sp>
         <p:nvSpPr>
-          <p:cNvPr id="18" name="Text 13"/>
+          <p:cNvPr id="11" name="Text 7"/>
           <p:cNvSpPr txBox="1"/>
           <p:nvPr/>
         </p:nvSpPr>
         <p:spPr>
           <a:xfrm>
-            <a:off x="4572000" y="2880360"/>
-            <a:ext cx="1838858" cy="411480"/>
+            <a:off x="731520" y="2880360"/>
+            <a:ext cx="2188388" cy="411480"/>
           </a:xfrm>
           <a:prstGeom prst="rect">
             <a:avLst/>
@@ -29893,7 +29096,7 @@
                 <a:ea typeface="Calibri" pitchFamily="34" charset="-122"/>
                 <a:cs typeface="Calibri" pitchFamily="34" charset="-120"/>
               </a:rPr>
-              <a:t>Le constat</a:t>
+              <a:t>Le périmètre</a:t>
             </a:r>
             <a:endParaRPr lang="en-US" sz="1400" dirty="0"/>
           </a:p>
@@ -29901,14 +29104,14 @@
       </p:sp>
       <p:sp>
         <p:nvSpPr>
-          <p:cNvPr id="19" name="Shape 14"/>
+          <p:cNvPr id="12" name="Shape 8"/>
           <p:cNvSpPr/>
           <p:nvPr/>
         </p:nvSpPr>
         <p:spPr>
           <a:xfrm>
-            <a:off x="4572000" y="3364992"/>
-            <a:ext cx="1838858" cy="0"/>
+            <a:off x="731520" y="3364992"/>
+            <a:ext cx="2188388" cy="0"/>
           </a:xfrm>
           <a:prstGeom prst="line">
             <a:avLst/>
@@ -29924,14 +29127,14 @@
       </p:sp>
       <p:sp>
         <p:nvSpPr>
-          <p:cNvPr id="20" name="Text 15"/>
+          <p:cNvPr id="13" name="Text 9"/>
           <p:cNvSpPr txBox="1"/>
           <p:nvPr/>
         </p:nvSpPr>
         <p:spPr>
           <a:xfrm>
-            <a:off x="4572000" y="3474720"/>
-            <a:ext cx="1838858" cy="2560320"/>
+            <a:off x="731520" y="3474720"/>
+            <a:ext cx="2188388" cy="1371600"/>
           </a:xfrm>
           <a:prstGeom prst="rect">
             <a:avLst/>
@@ -29945,7 +29148,7 @@
           <a:p>
             <a:pPr marL="152400" indent="-152400">
               <a:spcAft>
-                <a:spcPts val="800"/>
+                <a:spcPts val="700"/>
               </a:spcAft>
               <a:buSzPct val="100000"/>
               <a:buChar char="•"/>
@@ -29959,14 +29162,14 @@
                 <a:ea typeface="Calibri" pitchFamily="34" charset="-122"/>
                 <a:cs typeface="Calibri" pitchFamily="34" charset="-120"/>
               </a:rPr>
-              <a:t>Temps de réponse dégradés sur certains écrans.</a:t>
+              <a:t>Authentification SSO des pages d’administration.</a:t>
             </a:r>
             <a:endParaRPr lang="en-US" sz="1100" dirty="0"/>
           </a:p>
           <a:p>
             <a:pPr marL="152400" indent="-152400">
               <a:spcAft>
-                <a:spcPts val="800"/>
+                <a:spcPts val="700"/>
               </a:spcAft>
               <a:buSzPct val="100000"/>
               <a:buChar char="•"/>
@@ -29980,7 +29183,7 @@
                 <a:ea typeface="Calibri" pitchFamily="34" charset="-122"/>
                 <a:cs typeface="Calibri" pitchFamily="34" charset="-120"/>
               </a:rPr>
-              <a:t>Enchaînement des actions ralenti pour vos utilisateurs.</a:t>
+              <a:t>AdminTool et ConfigTool uniquement.</a:t>
             </a:r>
             <a:endParaRPr lang="en-US" sz="1100" dirty="0"/>
           </a:p>
@@ -29988,18 +29191,18 @@
       </p:sp>
       <p:sp>
         <p:nvSpPr>
-          <p:cNvPr id="21" name="Shape 16"/>
+          <p:cNvPr id="14" name="Shape 10"/>
           <p:cNvSpPr/>
           <p:nvPr/>
         </p:nvSpPr>
         <p:spPr>
           <a:xfrm>
-            <a:off x="6868058" y="1965960"/>
-            <a:ext cx="2296058" cy="4251960"/>
+            <a:off x="3349676" y="1965960"/>
+            <a:ext cx="2645588" cy="3017520"/>
           </a:xfrm>
           <a:prstGeom prst="roundRect">
             <a:avLst>
-              <a:gd name="adj" fmla="val 4779"/>
+              <a:gd name="adj" fmla="val 4148"/>
             </a:avLst>
           </a:prstGeom>
           <a:solidFill>
@@ -30022,24 +29225,24 @@
       </p:sp>
       <p:sp>
         <p:nvSpPr>
-          <p:cNvPr id="22" name="Shape 17"/>
+          <p:cNvPr id="15" name="Shape 11"/>
           <p:cNvSpPr/>
           <p:nvPr/>
         </p:nvSpPr>
         <p:spPr>
           <a:xfrm>
-            <a:off x="7096658" y="2194560"/>
+            <a:off x="3578276" y="2194560"/>
             <a:ext cx="548640" cy="548640"/>
           </a:xfrm>
           <a:prstGeom prst="ellipse">
             <a:avLst/>
           </a:prstGeom>
           <a:solidFill>
-            <a:srgbClr val="E4F0F2"/>
+            <a:srgbClr val="06404F"/>
           </a:solidFill>
           <a:ln w="12700">
             <a:solidFill>
-              <a:srgbClr val="E4F0F2"/>
+              <a:srgbClr val="06404F"/>
             </a:solidFill>
             <a:prstDash val="solid"/>
           </a:ln>
@@ -30047,21 +29250,21 @@
       </p:sp>
       <p:pic>
         <p:nvPicPr>
-          <p:cNvPr id="23" name="Image 3" descr="preencoded.png">    </p:cNvPr>
+          <p:cNvPr id="16" name="Image 2" descr="preencoded.png">    </p:cNvPr>
           <p:cNvPicPr>
             <a:picLocks noChangeAspect="1"/>
           </p:cNvPicPr>
           <p:nvPr/>
         </p:nvPicPr>
         <p:blipFill>
-          <a:blip r:embed="rId4"/>
+          <a:blip r:embed="rId3"/>
           <a:stretch>
             <a:fillRect/>
           </a:stretch>
         </p:blipFill>
         <p:spPr>
           <a:xfrm>
-            <a:off x="7239305" y="2337206"/>
+            <a:off x="3720922" y="2337206"/>
             <a:ext cx="263347" cy="263347"/>
           </a:xfrm>
           <a:prstGeom prst="rect">
@@ -30071,14 +29274,14 @@
       </p:pic>
       <p:sp>
         <p:nvSpPr>
-          <p:cNvPr id="24" name="Text 18"/>
+          <p:cNvPr id="17" name="Text 12"/>
           <p:cNvSpPr txBox="1"/>
           <p:nvPr/>
         </p:nvSpPr>
         <p:spPr>
           <a:xfrm>
-            <a:off x="7096658" y="2880360"/>
-            <a:ext cx="1838858" cy="411480"/>
+            <a:off x="3578276" y="2880360"/>
+            <a:ext cx="2188388" cy="411480"/>
           </a:xfrm>
           <a:prstGeom prst="rect">
             <a:avLst/>
@@ -30102,7 +29305,7 @@
                 <a:ea typeface="Calibri" pitchFamily="34" charset="-122"/>
                 <a:cs typeface="Calibri" pitchFamily="34" charset="-120"/>
               </a:rPr>
-              <a:t>Ce que nous faisons</a:t>
+              <a:t>Où nous en sommes</a:t>
             </a:r>
             <a:endParaRPr lang="en-US" sz="1400" dirty="0"/>
           </a:p>
@@ -30110,14 +29313,14 @@
       </p:sp>
       <p:sp>
         <p:nvSpPr>
-          <p:cNvPr id="25" name="Shape 19"/>
+          <p:cNvPr id="18" name="Shape 13"/>
           <p:cNvSpPr/>
           <p:nvPr/>
         </p:nvSpPr>
         <p:spPr>
           <a:xfrm>
-            <a:off x="7096658" y="3364992"/>
-            <a:ext cx="1838858" cy="0"/>
+            <a:off x="3578276" y="3364992"/>
+            <a:ext cx="2188388" cy="0"/>
           </a:xfrm>
           <a:prstGeom prst="line">
             <a:avLst/>
@@ -30133,14 +29336,14 @@
       </p:sp>
       <p:sp>
         <p:nvSpPr>
-          <p:cNvPr id="26" name="Text 20"/>
+          <p:cNvPr id="19" name="Text 14"/>
           <p:cNvSpPr txBox="1"/>
           <p:nvPr/>
         </p:nvSpPr>
         <p:spPr>
           <a:xfrm>
-            <a:off x="7096658" y="3474720"/>
-            <a:ext cx="1838858" cy="2560320"/>
+            <a:off x="3578276" y="3474720"/>
+            <a:ext cx="2188388" cy="1371600"/>
           </a:xfrm>
           <a:prstGeom prst="rect">
             <a:avLst/>
@@ -30154,7 +29357,7 @@
           <a:p>
             <a:pPr marL="152400" indent="-152400">
               <a:spcAft>
-                <a:spcPts val="800"/>
+                <a:spcPts val="700"/>
               </a:spcAft>
               <a:buSzPct val="100000"/>
               <a:buChar char="•"/>
@@ -30168,14 +29371,14 @@
                 <a:ea typeface="Calibri" pitchFamily="34" charset="-122"/>
                 <a:cs typeface="Calibri" pitchFamily="34" charset="-120"/>
               </a:rPr>
-              <a:t>Passage de la navigation en mode asynchrone.</a:t>
+              <a:t>Solution communiquée le 31 août 2026.</a:t>
             </a:r>
             <a:endParaRPr lang="en-US" sz="1100" dirty="0"/>
           </a:p>
           <a:p>
             <a:pPr marL="152400" indent="-152400">
               <a:spcAft>
-                <a:spcPts val="800"/>
+                <a:spcPts val="700"/>
               </a:spcAft>
               <a:buSzPct val="100000"/>
               <a:buChar char="•"/>
@@ -30189,7 +29392,7 @@
                 <a:ea typeface="Calibri" pitchFamily="34" charset="-122"/>
                 <a:cs typeface="Calibri" pitchFamily="34" charset="-120"/>
               </a:rPr>
-              <a:t>Correctif validé en interne, redescente planifiée.</a:t>
+              <a:t>Correctif en cours de résolution côté produit.</a:t>
             </a:r>
             <a:endParaRPr lang="en-US" sz="1100" dirty="0"/>
           </a:p>
@@ -30197,18 +29400,18 @@
       </p:sp>
       <p:sp>
         <p:nvSpPr>
-          <p:cNvPr id="27" name="Shape 21"/>
+          <p:cNvPr id="20" name="Shape 15"/>
           <p:cNvSpPr/>
           <p:nvPr/>
         </p:nvSpPr>
         <p:spPr>
           <a:xfrm>
-            <a:off x="9392717" y="1965960"/>
-            <a:ext cx="2296058" cy="4251960"/>
+            <a:off x="6196432" y="1965960"/>
+            <a:ext cx="2645588" cy="3017520"/>
           </a:xfrm>
           <a:prstGeom prst="roundRect">
             <a:avLst>
-              <a:gd name="adj" fmla="val 4779"/>
+              <a:gd name="adj" fmla="val 4148"/>
             </a:avLst>
           </a:prstGeom>
           <a:solidFill>
@@ -30231,24 +29434,24 @@
       </p:sp>
       <p:sp>
         <p:nvSpPr>
-          <p:cNvPr id="28" name="Shape 22"/>
+          <p:cNvPr id="21" name="Shape 16"/>
           <p:cNvSpPr/>
           <p:nvPr/>
         </p:nvSpPr>
         <p:spPr>
           <a:xfrm>
-            <a:off x="9621317" y="2194560"/>
+            <a:off x="6425032" y="2194560"/>
             <a:ext cx="548640" cy="548640"/>
           </a:xfrm>
           <a:prstGeom prst="ellipse">
             <a:avLst/>
           </a:prstGeom>
           <a:solidFill>
-            <a:srgbClr val="E4F0F2"/>
+            <a:srgbClr val="06404F"/>
           </a:solidFill>
           <a:ln w="12700">
             <a:solidFill>
-              <a:srgbClr val="E4F0F2"/>
+              <a:srgbClr val="06404F"/>
             </a:solidFill>
             <a:prstDash val="solid"/>
           </a:ln>
@@ -30256,7 +29459,216 @@
       </p:sp>
       <p:pic>
         <p:nvPicPr>
-          <p:cNvPr id="29" name="Image 4" descr="preencoded.png">    </p:cNvPr>
+          <p:cNvPr id="22" name="Image 3" descr="preencoded.png">    </p:cNvPr>
+          <p:cNvPicPr>
+            <a:picLocks noChangeAspect="1"/>
+          </p:cNvPicPr>
+          <p:nvPr/>
+        </p:nvPicPr>
+        <p:blipFill>
+          <a:blip r:embed="rId4"/>
+          <a:stretch>
+            <a:fillRect/>
+          </a:stretch>
+        </p:blipFill>
+        <p:spPr>
+          <a:xfrm>
+            <a:off x="6567678" y="2337206"/>
+            <a:ext cx="263347" cy="263347"/>
+          </a:xfrm>
+          <a:prstGeom prst="rect">
+            <a:avLst/>
+          </a:prstGeom>
+        </p:spPr>
+      </p:pic>
+      <p:sp>
+        <p:nvSpPr>
+          <p:cNvPr id="23" name="Text 17"/>
+          <p:cNvSpPr txBox="1"/>
+          <p:nvPr/>
+        </p:nvSpPr>
+        <p:spPr>
+          <a:xfrm>
+            <a:off x="6425032" y="2880360"/>
+            <a:ext cx="2188388" cy="411480"/>
+          </a:xfrm>
+          <a:prstGeom prst="rect">
+            <a:avLst/>
+          </a:prstGeom>
+          <a:noFill/>
+          <a:ln/>
+        </p:spPr>
+        <p:txBody>
+          <a:bodyPr wrap="square" lIns="0" tIns="0" rIns="0" bIns="0" rtlCol="0" anchor="ctr"/>
+          <a:lstStyle/>
+          <a:p>
+            <a:pPr indent="0" marL="0">
+              <a:buNone/>
+            </a:pPr>
+            <a:r>
+              <a:rPr lang="en-US" sz="1400" b="1" dirty="0">
+                <a:solidFill>
+                  <a:srgbClr val="06404F"/>
+                </a:solidFill>
+                <a:latin typeface="Calibri" pitchFamily="34" charset="0"/>
+                <a:ea typeface="Calibri" pitchFamily="34" charset="-122"/>
+                <a:cs typeface="Calibri" pitchFamily="34" charset="-120"/>
+              </a:rPr>
+              <a:t>Pour vos équipes</a:t>
+            </a:r>
+            <a:endParaRPr lang="en-US" sz="1400" dirty="0"/>
+          </a:p>
+        </p:txBody>
+      </p:sp>
+      <p:sp>
+        <p:nvSpPr>
+          <p:cNvPr id="24" name="Shape 18"/>
+          <p:cNvSpPr/>
+          <p:nvPr/>
+        </p:nvSpPr>
+        <p:spPr>
+          <a:xfrm>
+            <a:off x="6425032" y="3364992"/>
+            <a:ext cx="2188388" cy="0"/>
+          </a:xfrm>
+          <a:prstGeom prst="line">
+            <a:avLst/>
+          </a:prstGeom>
+          <a:noFill/>
+          <a:ln w="9525">
+            <a:solidFill>
+              <a:srgbClr val="D6E0E3"/>
+            </a:solidFill>
+            <a:prstDash val="solid"/>
+          </a:ln>
+        </p:spPr>
+      </p:sp>
+      <p:sp>
+        <p:nvSpPr>
+          <p:cNvPr id="25" name="Text 19"/>
+          <p:cNvSpPr txBox="1"/>
+          <p:nvPr/>
+        </p:nvSpPr>
+        <p:spPr>
+          <a:xfrm>
+            <a:off x="6425032" y="3474720"/>
+            <a:ext cx="2188388" cy="1371600"/>
+          </a:xfrm>
+          <a:prstGeom prst="rect">
+            <a:avLst/>
+          </a:prstGeom>
+          <a:noFill/>
+          <a:ln/>
+        </p:spPr>
+        <p:txBody>
+          <a:bodyPr wrap="square" lIns="0" tIns="0" rIns="0" bIns="0" rtlCol="0" anchor="t"/>
+          <a:lstStyle/>
+          <a:p>
+            <a:pPr marL="152400" indent="-152400">
+              <a:spcAft>
+                <a:spcPts val="700"/>
+              </a:spcAft>
+              <a:buSzPct val="100000"/>
+              <a:buChar char="•"/>
+            </a:pPr>
+            <a:r>
+              <a:rPr lang="en-US" sz="1100" dirty="0">
+                <a:solidFill>
+                  <a:srgbClr val="1F2A30"/>
+                </a:solidFill>
+                <a:latin typeface="Calibri" pitchFamily="34" charset="0"/>
+                <a:ea typeface="Calibri" pitchFamily="34" charset="-122"/>
+                <a:cs typeface="Calibri" pitchFamily="34" charset="-120"/>
+              </a:rPr>
+              <a:t>Aucun impact sur les utilisateurs finaux du CRM.</a:t>
+            </a:r>
+            <a:endParaRPr lang="en-US" sz="1100" dirty="0"/>
+          </a:p>
+          <a:p>
+            <a:pPr marL="152400" indent="-152400">
+              <a:spcAft>
+                <a:spcPts val="700"/>
+              </a:spcAft>
+              <a:buSzPct val="100000"/>
+              <a:buChar char="•"/>
+            </a:pPr>
+            <a:r>
+              <a:rPr lang="en-US" sz="1100" dirty="0">
+                <a:solidFill>
+                  <a:srgbClr val="1F2A30"/>
+                </a:solidFill>
+                <a:latin typeface="Calibri" pitchFamily="34" charset="0"/>
+                <a:ea typeface="Calibri" pitchFamily="34" charset="-122"/>
+                <a:cs typeface="Calibri" pitchFamily="34" charset="-120"/>
+              </a:rPr>
+              <a:t>Accès d’administration mieux sécurisés à l’issue du correctif.</a:t>
+            </a:r>
+            <a:endParaRPr lang="en-US" sz="1100" dirty="0"/>
+          </a:p>
+        </p:txBody>
+      </p:sp>
+      <p:sp>
+        <p:nvSpPr>
+          <p:cNvPr id="26" name="Shape 20"/>
+          <p:cNvSpPr/>
+          <p:nvPr/>
+        </p:nvSpPr>
+        <p:spPr>
+          <a:xfrm>
+            <a:off x="9043187" y="1965960"/>
+            <a:ext cx="2645588" cy="3017520"/>
+          </a:xfrm>
+          <a:prstGeom prst="roundRect">
+            <a:avLst>
+              <a:gd name="adj" fmla="val 4148"/>
+            </a:avLst>
+          </a:prstGeom>
+          <a:solidFill>
+            <a:srgbClr val="FFFFFF"/>
+          </a:solidFill>
+          <a:ln w="12700">
+            <a:solidFill>
+              <a:srgbClr val="FFFFFF"/>
+            </a:solidFill>
+            <a:prstDash val="solid"/>
+          </a:ln>
+          <a:effectLst>
+            <a:outerShdw sx="100000" sy="100000" kx="0" ky="0" algn="bl" rotWithShape="0" blurRad="76200" dist="25400" dir="5400000">
+              <a:srgbClr val="000000">
+                <a:alpha val="10000"/>
+              </a:srgbClr>
+            </a:outerShdw>
+          </a:effectLst>
+        </p:spPr>
+      </p:sp>
+      <p:sp>
+        <p:nvSpPr>
+          <p:cNvPr id="27" name="Shape 21"/>
+          <p:cNvSpPr/>
+          <p:nvPr/>
+        </p:nvSpPr>
+        <p:spPr>
+          <a:xfrm>
+            <a:off x="9271787" y="2194560"/>
+            <a:ext cx="548640" cy="548640"/>
+          </a:xfrm>
+          <a:prstGeom prst="ellipse">
+            <a:avLst/>
+          </a:prstGeom>
+          <a:solidFill>
+            <a:srgbClr val="F28C28"/>
+          </a:solidFill>
+          <a:ln w="12700">
+            <a:solidFill>
+              <a:srgbClr val="F28C28"/>
+            </a:solidFill>
+            <a:prstDash val="solid"/>
+          </a:ln>
+        </p:spPr>
+      </p:sp>
+      <p:pic>
+        <p:nvPicPr>
+          <p:cNvPr id="28" name="Image 4" descr="preencoded.png">    </p:cNvPr>
           <p:cNvPicPr>
             <a:picLocks noChangeAspect="1"/>
           </p:cNvPicPr>
@@ -30270,7 +29682,7 @@
         </p:blipFill>
         <p:spPr>
           <a:xfrm>
-            <a:off x="9763963" y="2337206"/>
+            <a:off x="9414434" y="2337206"/>
             <a:ext cx="263347" cy="263347"/>
           </a:xfrm>
           <a:prstGeom prst="rect">
@@ -30280,14 +29692,14 @@
       </p:pic>
       <p:sp>
         <p:nvSpPr>
-          <p:cNvPr id="30" name="Text 23"/>
+          <p:cNvPr id="29" name="Text 22"/>
           <p:cNvSpPr txBox="1"/>
           <p:nvPr/>
         </p:nvSpPr>
         <p:spPr>
           <a:xfrm>
-            <a:off x="9621317" y="2880360"/>
-            <a:ext cx="1838858" cy="411480"/>
+            <a:off x="9271787" y="2880360"/>
+            <a:ext cx="2188388" cy="411480"/>
           </a:xfrm>
           <a:prstGeom prst="rect">
             <a:avLst/>
@@ -30305,13 +29717,13 @@
             <a:r>
               <a:rPr lang="en-US" sz="1400" b="1" dirty="0">
                 <a:solidFill>
-                  <a:srgbClr val="06404F"/>
-                </a:solidFill>
-                <a:latin typeface="Calibri" pitchFamily="34" charset="0"/>
-                <a:ea typeface="Calibri" pitchFamily="34" charset="-122"/>
-                <a:cs typeface="Calibri" pitchFamily="34" charset="-120"/>
-              </a:rPr>
-              <a:t>Pour vos équipes</a:t>
+                  <a:srgbClr val="F28C28"/>
+                </a:solidFill>
+                <a:latin typeface="Calibri" pitchFamily="34" charset="0"/>
+                <a:ea typeface="Calibri" pitchFamily="34" charset="-122"/>
+                <a:cs typeface="Calibri" pitchFamily="34" charset="-120"/>
+              </a:rPr>
+              <a:t>À ne pas confondre</a:t>
             </a:r>
             <a:endParaRPr lang="en-US" sz="1400" dirty="0"/>
           </a:p>
@@ -30319,14 +29731,14 @@
       </p:sp>
       <p:sp>
         <p:nvSpPr>
-          <p:cNvPr id="31" name="Shape 24"/>
+          <p:cNvPr id="30" name="Shape 23"/>
           <p:cNvSpPr/>
           <p:nvPr/>
         </p:nvSpPr>
         <p:spPr>
           <a:xfrm>
-            <a:off x="9621317" y="3364992"/>
-            <a:ext cx="1838858" cy="0"/>
+            <a:off x="9271787" y="3364992"/>
+            <a:ext cx="2188388" cy="0"/>
           </a:xfrm>
           <a:prstGeom prst="line">
             <a:avLst/>
@@ -30342,14 +29754,14 @@
       </p:sp>
       <p:sp>
         <p:nvSpPr>
-          <p:cNvPr id="32" name="Text 25"/>
+          <p:cNvPr id="31" name="Text 24"/>
           <p:cNvSpPr txBox="1"/>
           <p:nvPr/>
         </p:nvSpPr>
         <p:spPr>
           <a:xfrm>
-            <a:off x="9621317" y="3474720"/>
-            <a:ext cx="1838858" cy="2560320"/>
+            <a:off x="9271787" y="3474720"/>
+            <a:ext cx="2188388" cy="1371600"/>
           </a:xfrm>
           <a:prstGeom prst="rect">
             <a:avLst/>
@@ -30363,7 +29775,7 @@
           <a:p>
             <a:pPr marL="152400" indent="-152400">
               <a:spcAft>
-                <a:spcPts val="800"/>
+                <a:spcPts val="700"/>
               </a:spcAft>
               <a:buSzPct val="100000"/>
               <a:buChar char="•"/>
@@ -30377,14 +29789,14 @@
                 <a:ea typeface="Calibri" pitchFamily="34" charset="-122"/>
                 <a:cs typeface="Calibri" pitchFamily="34" charset="-120"/>
               </a:rPr>
-              <a:t>Navigation plus fluide, sans changement d’usage.</a:t>
+              <a:t>Sujet technique CDM, sans lien avec le nouveau SSO Engage.</a:t>
             </a:r>
             <a:endParaRPr lang="en-US" sz="1100" dirty="0"/>
           </a:p>
           <a:p>
             <a:pPr marL="152400" indent="-152400">
               <a:spcAft>
-                <a:spcPts val="800"/>
+                <a:spcPts val="700"/>
               </a:spcAft>
               <a:buSzPct val="100000"/>
               <a:buChar char="•"/>
@@ -30398,9 +29810,229 @@
                 <a:ea typeface="Calibri" pitchFamily="34" charset="-122"/>
                 <a:cs typeface="Calibri" pitchFamily="34" charset="-120"/>
               </a:rPr>
-              <a:t>Aucune action ni paramétrage de votre côté.</a:t>
+              <a:t>Le SSO Engage suit sa propre trajectoire, fenêtre cible T1 2027.</a:t>
             </a:r>
             <a:endParaRPr lang="en-US" sz="1100" dirty="0"/>
+          </a:p>
+        </p:txBody>
+      </p:sp>
+      <p:sp>
+        <p:nvSpPr>
+          <p:cNvPr id="32" name="Shape 25"/>
+          <p:cNvSpPr/>
+          <p:nvPr/>
+        </p:nvSpPr>
+        <p:spPr>
+          <a:xfrm>
+            <a:off x="502920" y="5303520"/>
+            <a:ext cx="11185855" cy="1051560"/>
+          </a:xfrm>
+          <a:prstGeom prst="roundRect">
+            <a:avLst>
+              <a:gd name="adj" fmla="val 10435"/>
+            </a:avLst>
+          </a:prstGeom>
+          <a:solidFill>
+            <a:srgbClr val="F2F8F9"/>
+          </a:solidFill>
+          <a:ln w="12700">
+            <a:solidFill>
+              <a:srgbClr val="F2F8F9"/>
+            </a:solidFill>
+            <a:prstDash val="solid"/>
+          </a:ln>
+        </p:spPr>
+      </p:sp>
+      <p:sp>
+        <p:nvSpPr>
+          <p:cNvPr id="33" name="Shape 26"/>
+          <p:cNvSpPr/>
+          <p:nvPr/>
+        </p:nvSpPr>
+        <p:spPr>
+          <a:xfrm>
+            <a:off x="777240" y="5577840"/>
+            <a:ext cx="502920" cy="502920"/>
+          </a:xfrm>
+          <a:prstGeom prst="ellipse">
+            <a:avLst/>
+          </a:prstGeom>
+          <a:solidFill>
+            <a:srgbClr val="06404F"/>
+          </a:solidFill>
+          <a:ln w="12700">
+            <a:solidFill>
+              <a:srgbClr val="06404F"/>
+            </a:solidFill>
+            <a:prstDash val="solid"/>
+          </a:ln>
+        </p:spPr>
+      </p:sp>
+      <p:pic>
+        <p:nvPicPr>
+          <p:cNvPr id="34" name="Image 5" descr="preencoded.png">    </p:cNvPr>
+          <p:cNvPicPr>
+            <a:picLocks noChangeAspect="1"/>
+          </p:cNvPicPr>
+          <p:nvPr/>
+        </p:nvPicPr>
+        <p:blipFill>
+          <a:blip r:embed="rId6"/>
+          <a:stretch>
+            <a:fillRect/>
+          </a:stretch>
+        </p:blipFill>
+        <p:spPr>
+          <a:xfrm>
+            <a:off x="907999" y="5708599"/>
+            <a:ext cx="241402" cy="241402"/>
+          </a:xfrm>
+          <a:prstGeom prst="rect">
+            <a:avLst/>
+          </a:prstGeom>
+        </p:spPr>
+      </p:pic>
+      <p:sp>
+        <p:nvSpPr>
+          <p:cNvPr id="35" name="Text 27"/>
+          <p:cNvSpPr txBox="1"/>
+          <p:nvPr/>
+        </p:nvSpPr>
+        <p:spPr>
+          <a:xfrm>
+            <a:off x="1463040" y="5303520"/>
+            <a:ext cx="1097280" cy="1051560"/>
+          </a:xfrm>
+          <a:prstGeom prst="rect">
+            <a:avLst/>
+          </a:prstGeom>
+          <a:noFill/>
+          <a:ln/>
+        </p:spPr>
+        <p:txBody>
+          <a:bodyPr wrap="square" lIns="0" tIns="0" rIns="0" bIns="0" rtlCol="0" anchor="ctr"/>
+          <a:lstStyle/>
+          <a:p>
+            <a:pPr indent="0" marL="0">
+              <a:buNone/>
+            </a:pPr>
+            <a:r>
+              <a:rPr lang="en-US" sz="1300" b="1" dirty="0">
+                <a:solidFill>
+                  <a:srgbClr val="06404F"/>
+                </a:solidFill>
+                <a:latin typeface="Calibri" pitchFamily="34" charset="0"/>
+                <a:ea typeface="Calibri" pitchFamily="34" charset="-122"/>
+                <a:cs typeface="Calibri" pitchFamily="34" charset="-120"/>
+              </a:rPr>
+              <a:t>Statut</a:t>
+            </a:r>
+            <a:endParaRPr lang="en-US" sz="1300" dirty="0"/>
+          </a:p>
+        </p:txBody>
+      </p:sp>
+      <p:sp>
+        <p:nvSpPr>
+          <p:cNvPr id="36" name="Text 28"/>
+          <p:cNvSpPr txBox="1"/>
+          <p:nvPr/>
+        </p:nvSpPr>
+        <p:spPr>
+          <a:xfrm>
+            <a:off x="2606040" y="5303520"/>
+            <a:ext cx="6613855" cy="1051560"/>
+          </a:xfrm>
+          <a:prstGeom prst="rect">
+            <a:avLst/>
+          </a:prstGeom>
+          <a:noFill/>
+          <a:ln/>
+        </p:spPr>
+        <p:txBody>
+          <a:bodyPr wrap="square" lIns="0" tIns="0" rIns="0" bIns="0" rtlCol="0" anchor="ctr"/>
+          <a:lstStyle/>
+          <a:p>
+            <a:pPr indent="0" marL="0">
+              <a:buNone/>
+            </a:pPr>
+            <a:r>
+              <a:rPr lang="en-US" sz="1200" dirty="0">
+                <a:solidFill>
+                  <a:srgbClr val="1F2A30"/>
+                </a:solidFill>
+                <a:latin typeface="Calibri" pitchFamily="34" charset="0"/>
+                <a:ea typeface="Calibri" pitchFamily="34" charset="-122"/>
+                <a:cs typeface="Calibri" pitchFamily="34" charset="-120"/>
+              </a:rPr>
+              <a:t>Correctif en cours de résolution. Nous vous confirmons la mise en production et son résultat dès la clôture du sujet.</a:t>
+            </a:r>
+            <a:endParaRPr lang="en-US" sz="1200" dirty="0"/>
+          </a:p>
+        </p:txBody>
+      </p:sp>
+      <p:sp>
+        <p:nvSpPr>
+          <p:cNvPr id="37" name="Shape 29"/>
+          <p:cNvSpPr/>
+          <p:nvPr/>
+        </p:nvSpPr>
+        <p:spPr>
+          <a:xfrm>
+            <a:off x="9311335" y="5669280"/>
+            <a:ext cx="2103120" cy="329184"/>
+          </a:xfrm>
+          <a:prstGeom prst="roundRect">
+            <a:avLst>
+              <a:gd name="adj" fmla="val 50000"/>
+            </a:avLst>
+          </a:prstGeom>
+          <a:solidFill>
+            <a:srgbClr val="FFF3D6"/>
+          </a:solidFill>
+          <a:ln w="12700">
+            <a:solidFill>
+              <a:srgbClr val="FFF3D6"/>
+            </a:solidFill>
+            <a:prstDash val="solid"/>
+          </a:ln>
+        </p:spPr>
+      </p:sp>
+      <p:sp>
+        <p:nvSpPr>
+          <p:cNvPr id="38" name="Text 30"/>
+          <p:cNvSpPr txBox="1"/>
+          <p:nvPr/>
+        </p:nvSpPr>
+        <p:spPr>
+          <a:xfrm>
+            <a:off x="9311335" y="5669280"/>
+            <a:ext cx="2103120" cy="329184"/>
+          </a:xfrm>
+          <a:prstGeom prst="rect">
+            <a:avLst/>
+          </a:prstGeom>
+          <a:noFill/>
+          <a:ln/>
+        </p:spPr>
+        <p:txBody>
+          <a:bodyPr wrap="square" lIns="0" tIns="0" rIns="0" bIns="0" rtlCol="0" anchor="ctr"/>
+          <a:lstStyle/>
+          <a:p>
+            <a:pPr algn="ctr" indent="0" marL="0">
+              <a:buNone/>
+            </a:pPr>
+            <a:r>
+              <a:rPr lang="en-US" sz="950" b="1" spc="100" kern="0" dirty="0">
+                <a:solidFill>
+                  <a:srgbClr val="D99A00"/>
+                </a:solidFill>
+                <a:latin typeface="Calibri" pitchFamily="34" charset="0"/>
+                <a:ea typeface="Calibri" pitchFamily="34" charset="-122"/>
+                <a:cs typeface="Calibri" pitchFamily="34" charset="-120"/>
+              </a:rPr>
+              <a:t>EN COURS DE RÉSOLUTION</a:t>
+            </a:r>
+            <a:endParaRPr lang="en-US" sz="950" dirty="0"/>
           </a:p>
         </p:txBody>
       </p:sp>
@@ -30559,7 +30191,7 @@
                 <a:ea typeface="Calibri" pitchFamily="34" charset="-122"/>
                 <a:cs typeface="Calibri" pitchFamily="34" charset="-120"/>
               </a:rPr>
-              <a:t>Correctif SSO sur les pages AdminTool et ConfigTool</a:t>
+              <a:t>Roadmap CDM : cinq étapes de fin 2026 à fin 2027</a:t>
             </a:r>
             <a:endParaRPr lang="en-US" sz="2600" dirty="0"/>
           </a:p>
@@ -30598,7 +30230,7 @@
                 <a:ea typeface="Calibri" pitchFamily="34" charset="-122"/>
                 <a:cs typeface="Calibri" pitchFamily="34" charset="-120"/>
               </a:rPr>
-              <a:t>Solution communiquée le 31 août 2026, correctif en cours de résolution sur l’authentification des pages d’administration.</a:t>
+              <a:t>Votre CRM évolue de l’ergonomie et de la qualité de donnée vers l’automatisation, puis l’intelligence artificielle en fin de parcours.</a:t>
             </a:r>
             <a:endParaRPr lang="en-US" sz="1300" dirty="0"/>
           </a:p>
@@ -30651,12 +30283,123 @@
         </p:nvSpPr>
         <p:spPr>
           <a:xfrm>
-            <a:off x="502920" y="1965960"/>
-            <a:ext cx="2645588" cy="3017520"/>
+            <a:off x="1541038" y="2697480"/>
+            <a:ext cx="9109619" cy="0"/>
+          </a:xfrm>
+          <a:prstGeom prst="line">
+            <a:avLst/>
+          </a:prstGeom>
+          <a:noFill/>
+          <a:ln w="31750">
+            <a:solidFill>
+              <a:srgbClr val="D6E0E3"/>
+            </a:solidFill>
+            <a:prstDash val="solid"/>
+          </a:ln>
+        </p:spPr>
+      </p:sp>
+      <p:sp>
+        <p:nvSpPr>
+          <p:cNvPr id="9" name="Text 6"/>
+          <p:cNvSpPr txBox="1"/>
+          <p:nvPr/>
+        </p:nvSpPr>
+        <p:spPr>
+          <a:xfrm>
+            <a:off x="502920" y="2011680"/>
+            <a:ext cx="2076237" cy="320040"/>
+          </a:xfrm>
+          <a:prstGeom prst="rect">
+            <a:avLst/>
+          </a:prstGeom>
+          <a:noFill/>
+          <a:ln/>
+        </p:spPr>
+        <p:txBody>
+          <a:bodyPr wrap="square" lIns="0" tIns="0" rIns="0" bIns="0" rtlCol="0" anchor="ctr"/>
+          <a:lstStyle/>
+          <a:p>
+            <a:pPr algn="ctr" indent="0" marL="0">
+              <a:buNone/>
+            </a:pPr>
+            <a:r>
+              <a:rPr lang="en-US" sz="1300" b="1" dirty="0">
+                <a:solidFill>
+                  <a:srgbClr val="F28C28"/>
+                </a:solidFill>
+                <a:latin typeface="Calibri" pitchFamily="34" charset="0"/>
+                <a:ea typeface="Calibri" pitchFamily="34" charset="-122"/>
+                <a:cs typeface="Calibri" pitchFamily="34" charset="-120"/>
+              </a:rPr>
+              <a:t>Fin 2026</a:t>
+            </a:r>
+            <a:endParaRPr lang="en-US" sz="1300" dirty="0"/>
+          </a:p>
+        </p:txBody>
+      </p:sp>
+      <p:sp>
+        <p:nvSpPr>
+          <p:cNvPr id="10" name="Shape 7"/>
+          <p:cNvSpPr/>
+          <p:nvPr/>
+        </p:nvSpPr>
+        <p:spPr>
+          <a:xfrm>
+            <a:off x="1266718" y="2423160"/>
+            <a:ext cx="548640" cy="548640"/>
+          </a:xfrm>
+          <a:prstGeom prst="ellipse">
+            <a:avLst/>
+          </a:prstGeom>
+          <a:solidFill>
+            <a:srgbClr val="06404F"/>
+          </a:solidFill>
+          <a:ln w="12700">
+            <a:solidFill>
+              <a:srgbClr val="06404F"/>
+            </a:solidFill>
+            <a:prstDash val="solid"/>
+          </a:ln>
+        </p:spPr>
+      </p:sp>
+      <p:pic>
+        <p:nvPicPr>
+          <p:cNvPr id="11" name="Image 1" descr="preencoded.png">    </p:cNvPr>
+          <p:cNvPicPr>
+            <a:picLocks noChangeAspect="1"/>
+          </p:cNvPicPr>
+          <p:nvPr/>
+        </p:nvPicPr>
+        <p:blipFill>
+          <a:blip r:embed="rId2"/>
+          <a:stretch>
+            <a:fillRect/>
+          </a:stretch>
+        </p:blipFill>
+        <p:spPr>
+          <a:xfrm>
+            <a:off x="1409365" y="2565806"/>
+            <a:ext cx="263347" cy="263347"/>
+          </a:xfrm>
+          <a:prstGeom prst="rect">
+            <a:avLst/>
+          </a:prstGeom>
+        </p:spPr>
+      </p:pic>
+      <p:sp>
+        <p:nvSpPr>
+          <p:cNvPr id="12" name="Shape 8"/>
+          <p:cNvSpPr/>
+          <p:nvPr/>
+        </p:nvSpPr>
+        <p:spPr>
+          <a:xfrm>
+            <a:off x="502920" y="3383280"/>
+            <a:ext cx="2076237" cy="2286000"/>
           </a:xfrm>
           <a:prstGeom prst="roundRect">
             <a:avLst>
-              <a:gd name="adj" fmla="val 4148"/>
+              <a:gd name="adj" fmla="val 5285"/>
             </a:avLst>
           </a:prstGeom>
           <a:solidFill>
@@ -30679,13 +30422,178 @@
       </p:sp>
       <p:sp>
         <p:nvSpPr>
-          <p:cNvPr id="9" name="Shape 6"/>
+          <p:cNvPr id="13" name="Text 9"/>
+          <p:cNvSpPr txBox="1"/>
+          <p:nvPr/>
+        </p:nvSpPr>
+        <p:spPr>
+          <a:xfrm>
+            <a:off x="704088" y="3566160"/>
+            <a:ext cx="1673901" cy="566928"/>
+          </a:xfrm>
+          <a:prstGeom prst="rect">
+            <a:avLst/>
+          </a:prstGeom>
+          <a:noFill/>
+          <a:ln/>
+        </p:spPr>
+        <p:txBody>
+          <a:bodyPr wrap="square" lIns="0" tIns="0" rIns="0" bIns="0" rtlCol="0" anchor="ctr"/>
+          <a:lstStyle/>
+          <a:p>
+            <a:pPr indent="0" marL="0">
+              <a:buNone/>
+            </a:pPr>
+            <a:r>
+              <a:rPr lang="en-US" sz="1400" b="1" dirty="0">
+                <a:solidFill>
+                  <a:srgbClr val="06404F"/>
+                </a:solidFill>
+                <a:latin typeface="Calibri" pitchFamily="34" charset="0"/>
+                <a:ea typeface="Calibri" pitchFamily="34" charset="-122"/>
+                <a:cs typeface="Calibri" pitchFamily="34" charset="-120"/>
+              </a:rPr>
+              <a:t>Expérience utilisateur</a:t>
+            </a:r>
+            <a:endParaRPr lang="en-US" sz="1400" dirty="0"/>
+          </a:p>
+        </p:txBody>
+      </p:sp>
+      <p:sp>
+        <p:nvSpPr>
+          <p:cNvPr id="14" name="Shape 10"/>
           <p:cNvSpPr/>
           <p:nvPr/>
         </p:nvSpPr>
         <p:spPr>
           <a:xfrm>
-            <a:off x="731520" y="2194560"/>
+            <a:off x="704088" y="4187952"/>
+            <a:ext cx="1673901" cy="0"/>
+          </a:xfrm>
+          <a:prstGeom prst="line">
+            <a:avLst/>
+          </a:prstGeom>
+          <a:noFill/>
+          <a:ln w="9525">
+            <a:solidFill>
+              <a:srgbClr val="D6E0E3"/>
+            </a:solidFill>
+            <a:prstDash val="solid"/>
+          </a:ln>
+        </p:spPr>
+      </p:sp>
+      <p:sp>
+        <p:nvSpPr>
+          <p:cNvPr id="15" name="Text 11"/>
+          <p:cNvSpPr txBox="1"/>
+          <p:nvPr/>
+        </p:nvSpPr>
+        <p:spPr>
+          <a:xfrm>
+            <a:off x="704088" y="4297680"/>
+            <a:ext cx="1673901" cy="1234440"/>
+          </a:xfrm>
+          <a:prstGeom prst="rect">
+            <a:avLst/>
+          </a:prstGeom>
+          <a:noFill/>
+          <a:ln/>
+        </p:spPr>
+        <p:txBody>
+          <a:bodyPr wrap="square" lIns="0" tIns="0" rIns="0" bIns="0" rtlCol="0" anchor="t"/>
+          <a:lstStyle/>
+          <a:p>
+            <a:pPr marL="152400" indent="-152400">
+              <a:spcAft>
+                <a:spcPts val="500"/>
+              </a:spcAft>
+              <a:buSzPct val="100000"/>
+              <a:buChar char="•"/>
+            </a:pPr>
+            <a:r>
+              <a:rPr lang="en-US" sz="1050" dirty="0">
+                <a:solidFill>
+                  <a:srgbClr val="1F2A30"/>
+                </a:solidFill>
+                <a:latin typeface="Calibri" pitchFamily="34" charset="0"/>
+                <a:ea typeface="Calibri" pitchFamily="34" charset="-122"/>
+                <a:cs typeface="Calibri" pitchFamily="34" charset="-120"/>
+              </a:rPr>
+              <a:t>Interface modernisée, vues personnalisables</a:t>
+            </a:r>
+            <a:endParaRPr lang="en-US" sz="1050" dirty="0"/>
+          </a:p>
+          <a:p>
+            <a:pPr marL="152400" indent="-152400">
+              <a:spcAft>
+                <a:spcPts val="500"/>
+              </a:spcAft>
+              <a:buSzPct val="100000"/>
+              <a:buChar char="•"/>
+            </a:pPr>
+            <a:r>
+              <a:rPr lang="en-US" sz="1050" dirty="0">
+                <a:solidFill>
+                  <a:srgbClr val="1F2A30"/>
+                </a:solidFill>
+                <a:latin typeface="Calibri" pitchFamily="34" charset="0"/>
+                <a:ea typeface="Calibri" pitchFamily="34" charset="-122"/>
+                <a:cs typeface="Calibri" pitchFamily="34" charset="-120"/>
+              </a:rPr>
+              <a:t>Navigation simplifiée vers les fonctions clés</a:t>
+            </a:r>
+            <a:endParaRPr lang="en-US" sz="1050" dirty="0"/>
+          </a:p>
+        </p:txBody>
+      </p:sp>
+      <p:sp>
+        <p:nvSpPr>
+          <p:cNvPr id="16" name="Text 12"/>
+          <p:cNvSpPr txBox="1"/>
+          <p:nvPr/>
+        </p:nvSpPr>
+        <p:spPr>
+          <a:xfrm>
+            <a:off x="2780325" y="2011680"/>
+            <a:ext cx="2076237" cy="320040"/>
+          </a:xfrm>
+          <a:prstGeom prst="rect">
+            <a:avLst/>
+          </a:prstGeom>
+          <a:noFill/>
+          <a:ln/>
+        </p:spPr>
+        <p:txBody>
+          <a:bodyPr wrap="square" lIns="0" tIns="0" rIns="0" bIns="0" rtlCol="0" anchor="ctr"/>
+          <a:lstStyle/>
+          <a:p>
+            <a:pPr algn="ctr" indent="0" marL="0">
+              <a:buNone/>
+            </a:pPr>
+            <a:r>
+              <a:rPr lang="en-US" sz="1300" b="1" dirty="0">
+                <a:solidFill>
+                  <a:srgbClr val="F28C28"/>
+                </a:solidFill>
+                <a:latin typeface="Calibri" pitchFamily="34" charset="0"/>
+                <a:ea typeface="Calibri" pitchFamily="34" charset="-122"/>
+                <a:cs typeface="Calibri" pitchFamily="34" charset="-120"/>
+              </a:rPr>
+              <a:t>Q1 2027</a:t>
+            </a:r>
+            <a:endParaRPr lang="en-US" sz="1300" dirty="0"/>
+          </a:p>
+        </p:txBody>
+      </p:sp>
+      <p:sp>
+        <p:nvSpPr>
+          <p:cNvPr id="17" name="Shape 13"/>
+          <p:cNvSpPr/>
+          <p:nvPr/>
+        </p:nvSpPr>
+        <p:spPr>
+          <a:xfrm>
+            <a:off x="3544123" y="2423160"/>
             <a:ext cx="548640" cy="548640"/>
           </a:xfrm>
           <a:prstGeom prst="ellipse">
@@ -30704,21 +30612,21 @@
       </p:sp>
       <p:pic>
         <p:nvPicPr>
-          <p:cNvPr id="10" name="Image 1" descr="preencoded.png">    </p:cNvPr>
+          <p:cNvPr id="18" name="Image 2" descr="preencoded.png">    </p:cNvPr>
           <p:cNvPicPr>
             <a:picLocks noChangeAspect="1"/>
           </p:cNvPicPr>
           <p:nvPr/>
         </p:nvPicPr>
         <p:blipFill>
-          <a:blip r:embed="rId2"/>
+          <a:blip r:embed="rId3"/>
           <a:stretch>
             <a:fillRect/>
           </a:stretch>
         </p:blipFill>
         <p:spPr>
           <a:xfrm>
-            <a:off x="874166" y="2337206"/>
+            <a:off x="3686769" y="2565806"/>
             <a:ext cx="263347" cy="263347"/>
           </a:xfrm>
           <a:prstGeom prst="rect">
@@ -30728,144 +30636,18 @@
       </p:pic>
       <p:sp>
         <p:nvSpPr>
-          <p:cNvPr id="11" name="Text 7"/>
-          <p:cNvSpPr txBox="1"/>
-          <p:nvPr/>
-        </p:nvSpPr>
-        <p:spPr>
-          <a:xfrm>
-            <a:off x="731520" y="2880360"/>
-            <a:ext cx="2188388" cy="411480"/>
-          </a:xfrm>
-          <a:prstGeom prst="rect">
-            <a:avLst/>
-          </a:prstGeom>
-          <a:noFill/>
-          <a:ln/>
-        </p:spPr>
-        <p:txBody>
-          <a:bodyPr wrap="square" lIns="0" tIns="0" rIns="0" bIns="0" rtlCol="0" anchor="ctr"/>
-          <a:lstStyle/>
-          <a:p>
-            <a:pPr indent="0" marL="0">
-              <a:buNone/>
-            </a:pPr>
-            <a:r>
-              <a:rPr lang="en-US" sz="1400" b="1" dirty="0">
-                <a:solidFill>
-                  <a:srgbClr val="06404F"/>
-                </a:solidFill>
-                <a:latin typeface="Calibri" pitchFamily="34" charset="0"/>
-                <a:ea typeface="Calibri" pitchFamily="34" charset="-122"/>
-                <a:cs typeface="Calibri" pitchFamily="34" charset="-120"/>
-              </a:rPr>
-              <a:t>Le périmètre</a:t>
-            </a:r>
-            <a:endParaRPr lang="en-US" sz="1400" dirty="0"/>
-          </a:p>
-        </p:txBody>
-      </p:sp>
-      <p:sp>
-        <p:nvSpPr>
-          <p:cNvPr id="12" name="Shape 8"/>
+          <p:cNvPr id="19" name="Shape 14"/>
           <p:cNvSpPr/>
           <p:nvPr/>
         </p:nvSpPr>
         <p:spPr>
           <a:xfrm>
-            <a:off x="731520" y="3364992"/>
-            <a:ext cx="2188388" cy="0"/>
-          </a:xfrm>
-          <a:prstGeom prst="line">
-            <a:avLst/>
-          </a:prstGeom>
-          <a:noFill/>
-          <a:ln w="9525">
-            <a:solidFill>
-              <a:srgbClr val="D6E0E3"/>
-            </a:solidFill>
-            <a:prstDash val="solid"/>
-          </a:ln>
-        </p:spPr>
-      </p:sp>
-      <p:sp>
-        <p:nvSpPr>
-          <p:cNvPr id="13" name="Text 9"/>
-          <p:cNvSpPr txBox="1"/>
-          <p:nvPr/>
-        </p:nvSpPr>
-        <p:spPr>
-          <a:xfrm>
-            <a:off x="731520" y="3474720"/>
-            <a:ext cx="2188388" cy="1371600"/>
-          </a:xfrm>
-          <a:prstGeom prst="rect">
-            <a:avLst/>
-          </a:prstGeom>
-          <a:noFill/>
-          <a:ln/>
-        </p:spPr>
-        <p:txBody>
-          <a:bodyPr wrap="square" lIns="0" tIns="0" rIns="0" bIns="0" rtlCol="0" anchor="t"/>
-          <a:lstStyle/>
-          <a:p>
-            <a:pPr marL="152400" indent="-152400">
-              <a:spcAft>
-                <a:spcPts val="700"/>
-              </a:spcAft>
-              <a:buSzPct val="100000"/>
-              <a:buChar char="•"/>
-            </a:pPr>
-            <a:r>
-              <a:rPr lang="en-US" sz="1100" dirty="0">
-                <a:solidFill>
-                  <a:srgbClr val="1F2A30"/>
-                </a:solidFill>
-                <a:latin typeface="Calibri" pitchFamily="34" charset="0"/>
-                <a:ea typeface="Calibri" pitchFamily="34" charset="-122"/>
-                <a:cs typeface="Calibri" pitchFamily="34" charset="-120"/>
-              </a:rPr>
-              <a:t>Authentification SSO des pages d’administration.</a:t>
-            </a:r>
-            <a:endParaRPr lang="en-US" sz="1100" dirty="0"/>
-          </a:p>
-          <a:p>
-            <a:pPr marL="152400" indent="-152400">
-              <a:spcAft>
-                <a:spcPts val="700"/>
-              </a:spcAft>
-              <a:buSzPct val="100000"/>
-              <a:buChar char="•"/>
-            </a:pPr>
-            <a:r>
-              <a:rPr lang="en-US" sz="1100" dirty="0">
-                <a:solidFill>
-                  <a:srgbClr val="1F2A30"/>
-                </a:solidFill>
-                <a:latin typeface="Calibri" pitchFamily="34" charset="0"/>
-                <a:ea typeface="Calibri" pitchFamily="34" charset="-122"/>
-                <a:cs typeface="Calibri" pitchFamily="34" charset="-120"/>
-              </a:rPr>
-              <a:t>AdminTool et ConfigTool uniquement.</a:t>
-            </a:r>
-            <a:endParaRPr lang="en-US" sz="1100" dirty="0"/>
-          </a:p>
-        </p:txBody>
-      </p:sp>
-      <p:sp>
-        <p:nvSpPr>
-          <p:cNvPr id="14" name="Shape 10"/>
-          <p:cNvSpPr/>
-          <p:nvPr/>
-        </p:nvSpPr>
-        <p:spPr>
-          <a:xfrm>
-            <a:off x="3349676" y="1965960"/>
-            <a:ext cx="2645588" cy="3017520"/>
+            <a:off x="2780325" y="3383280"/>
+            <a:ext cx="2076237" cy="2286000"/>
           </a:xfrm>
           <a:prstGeom prst="roundRect">
             <a:avLst>
-              <a:gd name="adj" fmla="val 4148"/>
+              <a:gd name="adj" fmla="val 5285"/>
             </a:avLst>
           </a:prstGeom>
           <a:solidFill>
@@ -30888,13 +30670,178 @@
       </p:sp>
       <p:sp>
         <p:nvSpPr>
-          <p:cNvPr id="15" name="Shape 11"/>
+          <p:cNvPr id="20" name="Text 15"/>
+          <p:cNvSpPr txBox="1"/>
+          <p:nvPr/>
+        </p:nvSpPr>
+        <p:spPr>
+          <a:xfrm>
+            <a:off x="2981493" y="3566160"/>
+            <a:ext cx="1673901" cy="566928"/>
+          </a:xfrm>
+          <a:prstGeom prst="rect">
+            <a:avLst/>
+          </a:prstGeom>
+          <a:noFill/>
+          <a:ln/>
+        </p:spPr>
+        <p:txBody>
+          <a:bodyPr wrap="square" lIns="0" tIns="0" rIns="0" bIns="0" rtlCol="0" anchor="ctr"/>
+          <a:lstStyle/>
+          <a:p>
+            <a:pPr indent="0" marL="0">
+              <a:buNone/>
+            </a:pPr>
+            <a:r>
+              <a:rPr lang="en-US" sz="1400" b="1" dirty="0">
+                <a:solidFill>
+                  <a:srgbClr val="06404F"/>
+                </a:solidFill>
+                <a:latin typeface="Calibri" pitchFamily="34" charset="0"/>
+                <a:ea typeface="Calibri" pitchFamily="34" charset="-122"/>
+                <a:cs typeface="Calibri" pitchFamily="34" charset="-120"/>
+              </a:rPr>
+              <a:t>Vue client 360°</a:t>
+            </a:r>
+            <a:endParaRPr lang="en-US" sz="1400" dirty="0"/>
+          </a:p>
+        </p:txBody>
+      </p:sp>
+      <p:sp>
+        <p:nvSpPr>
+          <p:cNvPr id="21" name="Shape 16"/>
           <p:cNvSpPr/>
           <p:nvPr/>
         </p:nvSpPr>
         <p:spPr>
           <a:xfrm>
-            <a:off x="3578276" y="2194560"/>
+            <a:off x="2981493" y="4187952"/>
+            <a:ext cx="1673901" cy="0"/>
+          </a:xfrm>
+          <a:prstGeom prst="line">
+            <a:avLst/>
+          </a:prstGeom>
+          <a:noFill/>
+          <a:ln w="9525">
+            <a:solidFill>
+              <a:srgbClr val="D6E0E3"/>
+            </a:solidFill>
+            <a:prstDash val="solid"/>
+          </a:ln>
+        </p:spPr>
+      </p:sp>
+      <p:sp>
+        <p:nvSpPr>
+          <p:cNvPr id="22" name="Text 17"/>
+          <p:cNvSpPr txBox="1"/>
+          <p:nvPr/>
+        </p:nvSpPr>
+        <p:spPr>
+          <a:xfrm>
+            <a:off x="2981493" y="4297680"/>
+            <a:ext cx="1673901" cy="1234440"/>
+          </a:xfrm>
+          <a:prstGeom prst="rect">
+            <a:avLst/>
+          </a:prstGeom>
+          <a:noFill/>
+          <a:ln/>
+        </p:spPr>
+        <p:txBody>
+          <a:bodyPr wrap="square" lIns="0" tIns="0" rIns="0" bIns="0" rtlCol="0" anchor="t"/>
+          <a:lstStyle/>
+          <a:p>
+            <a:pPr marL="152400" indent="-152400">
+              <a:spcAft>
+                <a:spcPts val="500"/>
+              </a:spcAft>
+              <a:buSzPct val="100000"/>
+              <a:buChar char="•"/>
+            </a:pPr>
+            <a:r>
+              <a:rPr lang="en-US" sz="1050" dirty="0">
+                <a:solidFill>
+                  <a:srgbClr val="1F2A30"/>
+                </a:solidFill>
+                <a:latin typeface="Calibri" pitchFamily="34" charset="0"/>
+                <a:ea typeface="Calibri" pitchFamily="34" charset="-122"/>
+                <a:cs typeface="Calibri" pitchFamily="34" charset="-120"/>
+              </a:rPr>
+              <a:t>Historique, interactions, incidents et opportunités réunis</a:t>
+            </a:r>
+            <a:endParaRPr lang="en-US" sz="1050" dirty="0"/>
+          </a:p>
+          <a:p>
+            <a:pPr marL="152400" indent="-152400">
+              <a:spcAft>
+                <a:spcPts val="500"/>
+              </a:spcAft>
+              <a:buSzPct val="100000"/>
+              <a:buChar char="•"/>
+            </a:pPr>
+            <a:r>
+              <a:rPr lang="en-US" sz="1050" dirty="0">
+                <a:solidFill>
+                  <a:srgbClr val="1F2A30"/>
+                </a:solidFill>
+                <a:latin typeface="Calibri" pitchFamily="34" charset="0"/>
+                <a:ea typeface="Calibri" pitchFamily="34" charset="-122"/>
+                <a:cs typeface="Calibri" pitchFamily="34" charset="-120"/>
+              </a:rPr>
+              <a:t>Dédoublonnage centralisé et validation automatique</a:t>
+            </a:r>
+            <a:endParaRPr lang="en-US" sz="1050" dirty="0"/>
+          </a:p>
+        </p:txBody>
+      </p:sp>
+      <p:sp>
+        <p:nvSpPr>
+          <p:cNvPr id="23" name="Text 18"/>
+          <p:cNvSpPr txBox="1"/>
+          <p:nvPr/>
+        </p:nvSpPr>
+        <p:spPr>
+          <a:xfrm>
+            <a:off x="5057729" y="2011680"/>
+            <a:ext cx="2076237" cy="320040"/>
+          </a:xfrm>
+          <a:prstGeom prst="rect">
+            <a:avLst/>
+          </a:prstGeom>
+          <a:noFill/>
+          <a:ln/>
+        </p:spPr>
+        <p:txBody>
+          <a:bodyPr wrap="square" lIns="0" tIns="0" rIns="0" bIns="0" rtlCol="0" anchor="ctr"/>
+          <a:lstStyle/>
+          <a:p>
+            <a:pPr algn="ctr" indent="0" marL="0">
+              <a:buNone/>
+            </a:pPr>
+            <a:r>
+              <a:rPr lang="en-US" sz="1300" b="1" dirty="0">
+                <a:solidFill>
+                  <a:srgbClr val="F28C28"/>
+                </a:solidFill>
+                <a:latin typeface="Calibri" pitchFamily="34" charset="0"/>
+                <a:ea typeface="Calibri" pitchFamily="34" charset="-122"/>
+                <a:cs typeface="Calibri" pitchFamily="34" charset="-120"/>
+              </a:rPr>
+              <a:t>Q2 2027</a:t>
+            </a:r>
+            <a:endParaRPr lang="en-US" sz="1300" dirty="0"/>
+          </a:p>
+        </p:txBody>
+      </p:sp>
+      <p:sp>
+        <p:nvSpPr>
+          <p:cNvPr id="24" name="Shape 19"/>
+          <p:cNvSpPr/>
+          <p:nvPr/>
+        </p:nvSpPr>
+        <p:spPr>
+          <a:xfrm>
+            <a:off x="5821528" y="2423160"/>
             <a:ext cx="548640" cy="548640"/>
           </a:xfrm>
           <a:prstGeom prst="ellipse">
@@ -30913,21 +30860,21 @@
       </p:sp>
       <p:pic>
         <p:nvPicPr>
-          <p:cNvPr id="16" name="Image 2" descr="preencoded.png">    </p:cNvPr>
+          <p:cNvPr id="25" name="Image 3" descr="preencoded.png">    </p:cNvPr>
           <p:cNvPicPr>
             <a:picLocks noChangeAspect="1"/>
           </p:cNvPicPr>
           <p:nvPr/>
         </p:nvPicPr>
         <p:blipFill>
-          <a:blip r:embed="rId3"/>
+          <a:blip r:embed="rId4"/>
           <a:stretch>
             <a:fillRect/>
           </a:stretch>
         </p:blipFill>
         <p:spPr>
           <a:xfrm>
-            <a:off x="3720922" y="2337206"/>
+            <a:off x="5964174" y="2565806"/>
             <a:ext cx="263347" cy="263347"/>
           </a:xfrm>
           <a:prstGeom prst="rect">
@@ -30937,144 +30884,18 @@
       </p:pic>
       <p:sp>
         <p:nvSpPr>
-          <p:cNvPr id="17" name="Text 12"/>
-          <p:cNvSpPr txBox="1"/>
-          <p:nvPr/>
-        </p:nvSpPr>
-        <p:spPr>
-          <a:xfrm>
-            <a:off x="3578276" y="2880360"/>
-            <a:ext cx="2188388" cy="411480"/>
-          </a:xfrm>
-          <a:prstGeom prst="rect">
-            <a:avLst/>
-          </a:prstGeom>
-          <a:noFill/>
-          <a:ln/>
-        </p:spPr>
-        <p:txBody>
-          <a:bodyPr wrap="square" lIns="0" tIns="0" rIns="0" bIns="0" rtlCol="0" anchor="ctr"/>
-          <a:lstStyle/>
-          <a:p>
-            <a:pPr indent="0" marL="0">
-              <a:buNone/>
-            </a:pPr>
-            <a:r>
-              <a:rPr lang="en-US" sz="1400" b="1" dirty="0">
-                <a:solidFill>
-                  <a:srgbClr val="06404F"/>
-                </a:solidFill>
-                <a:latin typeface="Calibri" pitchFamily="34" charset="0"/>
-                <a:ea typeface="Calibri" pitchFamily="34" charset="-122"/>
-                <a:cs typeface="Calibri" pitchFamily="34" charset="-120"/>
-              </a:rPr>
-              <a:t>Où nous en sommes</a:t>
-            </a:r>
-            <a:endParaRPr lang="en-US" sz="1400" dirty="0"/>
-          </a:p>
-        </p:txBody>
-      </p:sp>
-      <p:sp>
-        <p:nvSpPr>
-          <p:cNvPr id="18" name="Shape 13"/>
+          <p:cNvPr id="26" name="Shape 20"/>
           <p:cNvSpPr/>
           <p:nvPr/>
         </p:nvSpPr>
         <p:spPr>
           <a:xfrm>
-            <a:off x="3578276" y="3364992"/>
-            <a:ext cx="2188388" cy="0"/>
-          </a:xfrm>
-          <a:prstGeom prst="line">
-            <a:avLst/>
-          </a:prstGeom>
-          <a:noFill/>
-          <a:ln w="9525">
-            <a:solidFill>
-              <a:srgbClr val="D6E0E3"/>
-            </a:solidFill>
-            <a:prstDash val="solid"/>
-          </a:ln>
-        </p:spPr>
-      </p:sp>
-      <p:sp>
-        <p:nvSpPr>
-          <p:cNvPr id="19" name="Text 14"/>
-          <p:cNvSpPr txBox="1"/>
-          <p:nvPr/>
-        </p:nvSpPr>
-        <p:spPr>
-          <a:xfrm>
-            <a:off x="3578276" y="3474720"/>
-            <a:ext cx="2188388" cy="1371600"/>
-          </a:xfrm>
-          <a:prstGeom prst="rect">
-            <a:avLst/>
-          </a:prstGeom>
-          <a:noFill/>
-          <a:ln/>
-        </p:spPr>
-        <p:txBody>
-          <a:bodyPr wrap="square" lIns="0" tIns="0" rIns="0" bIns="0" rtlCol="0" anchor="t"/>
-          <a:lstStyle/>
-          <a:p>
-            <a:pPr marL="152400" indent="-152400">
-              <a:spcAft>
-                <a:spcPts val="700"/>
-              </a:spcAft>
-              <a:buSzPct val="100000"/>
-              <a:buChar char="•"/>
-            </a:pPr>
-            <a:r>
-              <a:rPr lang="en-US" sz="1100" dirty="0">
-                <a:solidFill>
-                  <a:srgbClr val="1F2A30"/>
-                </a:solidFill>
-                <a:latin typeface="Calibri" pitchFamily="34" charset="0"/>
-                <a:ea typeface="Calibri" pitchFamily="34" charset="-122"/>
-                <a:cs typeface="Calibri" pitchFamily="34" charset="-120"/>
-              </a:rPr>
-              <a:t>Solution communiquée le 31 août 2026.</a:t>
-            </a:r>
-            <a:endParaRPr lang="en-US" sz="1100" dirty="0"/>
-          </a:p>
-          <a:p>
-            <a:pPr marL="152400" indent="-152400">
-              <a:spcAft>
-                <a:spcPts val="700"/>
-              </a:spcAft>
-              <a:buSzPct val="100000"/>
-              <a:buChar char="•"/>
-            </a:pPr>
-            <a:r>
-              <a:rPr lang="en-US" sz="1100" dirty="0">
-                <a:solidFill>
-                  <a:srgbClr val="1F2A30"/>
-                </a:solidFill>
-                <a:latin typeface="Calibri" pitchFamily="34" charset="0"/>
-                <a:ea typeface="Calibri" pitchFamily="34" charset="-122"/>
-                <a:cs typeface="Calibri" pitchFamily="34" charset="-120"/>
-              </a:rPr>
-              <a:t>Correctif en cours de résolution côté produit.</a:t>
-            </a:r>
-            <a:endParaRPr lang="en-US" sz="1100" dirty="0"/>
-          </a:p>
-        </p:txBody>
-      </p:sp>
-      <p:sp>
-        <p:nvSpPr>
-          <p:cNvPr id="20" name="Shape 15"/>
-          <p:cNvSpPr/>
-          <p:nvPr/>
-        </p:nvSpPr>
-        <p:spPr>
-          <a:xfrm>
-            <a:off x="6196432" y="1965960"/>
-            <a:ext cx="2645588" cy="3017520"/>
+            <a:off x="5057729" y="3383280"/>
+            <a:ext cx="2076237" cy="2286000"/>
           </a:xfrm>
           <a:prstGeom prst="roundRect">
             <a:avLst>
-              <a:gd name="adj" fmla="val 4148"/>
+              <a:gd name="adj" fmla="val 5285"/>
             </a:avLst>
           </a:prstGeom>
           <a:solidFill>
@@ -31097,13 +30918,178 @@
       </p:sp>
       <p:sp>
         <p:nvSpPr>
-          <p:cNvPr id="21" name="Shape 16"/>
+          <p:cNvPr id="27" name="Text 21"/>
+          <p:cNvSpPr txBox="1"/>
+          <p:nvPr/>
+        </p:nvSpPr>
+        <p:spPr>
+          <a:xfrm>
+            <a:off x="5258897" y="3566160"/>
+            <a:ext cx="1673901" cy="566928"/>
+          </a:xfrm>
+          <a:prstGeom prst="rect">
+            <a:avLst/>
+          </a:prstGeom>
+          <a:noFill/>
+          <a:ln/>
+        </p:spPr>
+        <p:txBody>
+          <a:bodyPr wrap="square" lIns="0" tIns="0" rIns="0" bIns="0" rtlCol="0" anchor="ctr"/>
+          <a:lstStyle/>
+          <a:p>
+            <a:pPr indent="0" marL="0">
+              <a:buNone/>
+            </a:pPr>
+            <a:r>
+              <a:rPr lang="en-US" sz="1400" b="1" dirty="0">
+                <a:solidFill>
+                  <a:srgbClr val="06404F"/>
+                </a:solidFill>
+                <a:latin typeface="Calibri" pitchFamily="34" charset="0"/>
+                <a:ea typeface="Calibri" pitchFamily="34" charset="-122"/>
+                <a:cs typeface="Calibri" pitchFamily="34" charset="-120"/>
+              </a:rPr>
+              <a:t>Automatisation</a:t>
+            </a:r>
+            <a:endParaRPr lang="en-US" sz="1400" dirty="0"/>
+          </a:p>
+        </p:txBody>
+      </p:sp>
+      <p:sp>
+        <p:nvSpPr>
+          <p:cNvPr id="28" name="Shape 22"/>
           <p:cNvSpPr/>
           <p:nvPr/>
         </p:nvSpPr>
         <p:spPr>
           <a:xfrm>
-            <a:off x="6425032" y="2194560"/>
+            <a:off x="5258897" y="4187952"/>
+            <a:ext cx="1673901" cy="0"/>
+          </a:xfrm>
+          <a:prstGeom prst="line">
+            <a:avLst/>
+          </a:prstGeom>
+          <a:noFill/>
+          <a:ln w="9525">
+            <a:solidFill>
+              <a:srgbClr val="D6E0E3"/>
+            </a:solidFill>
+            <a:prstDash val="solid"/>
+          </a:ln>
+        </p:spPr>
+      </p:sp>
+      <p:sp>
+        <p:nvSpPr>
+          <p:cNvPr id="29" name="Text 23"/>
+          <p:cNvSpPr txBox="1"/>
+          <p:nvPr/>
+        </p:nvSpPr>
+        <p:spPr>
+          <a:xfrm>
+            <a:off x="5258897" y="4297680"/>
+            <a:ext cx="1673901" cy="1234440"/>
+          </a:xfrm>
+          <a:prstGeom prst="rect">
+            <a:avLst/>
+          </a:prstGeom>
+          <a:noFill/>
+          <a:ln/>
+        </p:spPr>
+        <p:txBody>
+          <a:bodyPr wrap="square" lIns="0" tIns="0" rIns="0" bIns="0" rtlCol="0" anchor="t"/>
+          <a:lstStyle/>
+          <a:p>
+            <a:pPr marL="152400" indent="-152400">
+              <a:spcAft>
+                <a:spcPts val="500"/>
+              </a:spcAft>
+              <a:buSzPct val="100000"/>
+              <a:buChar char="•"/>
+            </a:pPr>
+            <a:r>
+              <a:rPr lang="en-US" sz="1050" dirty="0">
+                <a:solidFill>
+                  <a:srgbClr val="1F2A30"/>
+                </a:solidFill>
+                <a:latin typeface="Calibri" pitchFamily="34" charset="0"/>
+                <a:ea typeface="Calibri" pitchFamily="34" charset="-122"/>
+                <a:cs typeface="Calibri" pitchFamily="34" charset="-120"/>
+              </a:rPr>
+              <a:t>Workflows de relance et gestion d’incidents</a:t>
+            </a:r>
+            <a:endParaRPr lang="en-US" sz="1050" dirty="0"/>
+          </a:p>
+          <a:p>
+            <a:pPr marL="152400" indent="-152400">
+              <a:spcAft>
+                <a:spcPts val="500"/>
+              </a:spcAft>
+              <a:buSzPct val="100000"/>
+              <a:buChar char="•"/>
+            </a:pPr>
+            <a:r>
+              <a:rPr lang="en-US" sz="1050" dirty="0">
+                <a:solidFill>
+                  <a:srgbClr val="1F2A30"/>
+                </a:solidFill>
+                <a:latin typeface="Calibri" pitchFamily="34" charset="0"/>
+                <a:ea typeface="Calibri" pitchFamily="34" charset="-122"/>
+                <a:cs typeface="Calibri" pitchFamily="34" charset="-120"/>
+              </a:rPr>
+              <a:t>Rappels intelligents sur les échéances clés</a:t>
+            </a:r>
+            <a:endParaRPr lang="en-US" sz="1050" dirty="0"/>
+          </a:p>
+        </p:txBody>
+      </p:sp>
+      <p:sp>
+        <p:nvSpPr>
+          <p:cNvPr id="30" name="Text 24"/>
+          <p:cNvSpPr txBox="1"/>
+          <p:nvPr/>
+        </p:nvSpPr>
+        <p:spPr>
+          <a:xfrm>
+            <a:off x="7335134" y="2011680"/>
+            <a:ext cx="2076237" cy="320040"/>
+          </a:xfrm>
+          <a:prstGeom prst="rect">
+            <a:avLst/>
+          </a:prstGeom>
+          <a:noFill/>
+          <a:ln/>
+        </p:spPr>
+        <p:txBody>
+          <a:bodyPr wrap="square" lIns="0" tIns="0" rIns="0" bIns="0" rtlCol="0" anchor="ctr"/>
+          <a:lstStyle/>
+          <a:p>
+            <a:pPr algn="ctr" indent="0" marL="0">
+              <a:buNone/>
+            </a:pPr>
+            <a:r>
+              <a:rPr lang="en-US" sz="1300" b="1" dirty="0">
+                <a:solidFill>
+                  <a:srgbClr val="F28C28"/>
+                </a:solidFill>
+                <a:latin typeface="Calibri" pitchFamily="34" charset="0"/>
+                <a:ea typeface="Calibri" pitchFamily="34" charset="-122"/>
+                <a:cs typeface="Calibri" pitchFamily="34" charset="-120"/>
+              </a:rPr>
+              <a:t>Q3 2027</a:t>
+            </a:r>
+            <a:endParaRPr lang="en-US" sz="1300" dirty="0"/>
+          </a:p>
+        </p:txBody>
+      </p:sp>
+      <p:sp>
+        <p:nvSpPr>
+          <p:cNvPr id="31" name="Shape 25"/>
+          <p:cNvSpPr/>
+          <p:nvPr/>
+        </p:nvSpPr>
+        <p:spPr>
+          <a:xfrm>
+            <a:off x="8098932" y="2423160"/>
             <a:ext cx="548640" cy="548640"/>
           </a:xfrm>
           <a:prstGeom prst="ellipse">
@@ -31122,21 +31108,21 @@
       </p:sp>
       <p:pic>
         <p:nvPicPr>
-          <p:cNvPr id="22" name="Image 3" descr="preencoded.png">    </p:cNvPr>
+          <p:cNvPr id="32" name="Image 4" descr="preencoded.png">    </p:cNvPr>
           <p:cNvPicPr>
             <a:picLocks noChangeAspect="1"/>
           </p:cNvPicPr>
           <p:nvPr/>
         </p:nvPicPr>
         <p:blipFill>
-          <a:blip r:embed="rId4"/>
+          <a:blip r:embed="rId5"/>
           <a:stretch>
             <a:fillRect/>
           </a:stretch>
         </p:blipFill>
         <p:spPr>
           <a:xfrm>
-            <a:off x="6567678" y="2337206"/>
+            <a:off x="8241579" y="2565806"/>
             <a:ext cx="263347" cy="263347"/>
           </a:xfrm>
           <a:prstGeom prst="rect">
@@ -31146,144 +31132,18 @@
       </p:pic>
       <p:sp>
         <p:nvSpPr>
-          <p:cNvPr id="23" name="Text 17"/>
-          <p:cNvSpPr txBox="1"/>
-          <p:nvPr/>
-        </p:nvSpPr>
-        <p:spPr>
-          <a:xfrm>
-            <a:off x="6425032" y="2880360"/>
-            <a:ext cx="2188388" cy="411480"/>
-          </a:xfrm>
-          <a:prstGeom prst="rect">
-            <a:avLst/>
-          </a:prstGeom>
-          <a:noFill/>
-          <a:ln/>
-        </p:spPr>
-        <p:txBody>
-          <a:bodyPr wrap="square" lIns="0" tIns="0" rIns="0" bIns="0" rtlCol="0" anchor="ctr"/>
-          <a:lstStyle/>
-          <a:p>
-            <a:pPr indent="0" marL="0">
-              <a:buNone/>
-            </a:pPr>
-            <a:r>
-              <a:rPr lang="en-US" sz="1400" b="1" dirty="0">
-                <a:solidFill>
-                  <a:srgbClr val="06404F"/>
-                </a:solidFill>
-                <a:latin typeface="Calibri" pitchFamily="34" charset="0"/>
-                <a:ea typeface="Calibri" pitchFamily="34" charset="-122"/>
-                <a:cs typeface="Calibri" pitchFamily="34" charset="-120"/>
-              </a:rPr>
-              <a:t>Pour vos équipes</a:t>
-            </a:r>
-            <a:endParaRPr lang="en-US" sz="1400" dirty="0"/>
-          </a:p>
-        </p:txBody>
-      </p:sp>
-      <p:sp>
-        <p:nvSpPr>
-          <p:cNvPr id="24" name="Shape 18"/>
+          <p:cNvPr id="33" name="Shape 26"/>
           <p:cNvSpPr/>
           <p:nvPr/>
         </p:nvSpPr>
         <p:spPr>
           <a:xfrm>
-            <a:off x="6425032" y="3364992"/>
-            <a:ext cx="2188388" cy="0"/>
-          </a:xfrm>
-          <a:prstGeom prst="line">
-            <a:avLst/>
-          </a:prstGeom>
-          <a:noFill/>
-          <a:ln w="9525">
-            <a:solidFill>
-              <a:srgbClr val="D6E0E3"/>
-            </a:solidFill>
-            <a:prstDash val="solid"/>
-          </a:ln>
-        </p:spPr>
-      </p:sp>
-      <p:sp>
-        <p:nvSpPr>
-          <p:cNvPr id="25" name="Text 19"/>
-          <p:cNvSpPr txBox="1"/>
-          <p:nvPr/>
-        </p:nvSpPr>
-        <p:spPr>
-          <a:xfrm>
-            <a:off x="6425032" y="3474720"/>
-            <a:ext cx="2188388" cy="1371600"/>
-          </a:xfrm>
-          <a:prstGeom prst="rect">
-            <a:avLst/>
-          </a:prstGeom>
-          <a:noFill/>
-          <a:ln/>
-        </p:spPr>
-        <p:txBody>
-          <a:bodyPr wrap="square" lIns="0" tIns="0" rIns="0" bIns="0" rtlCol="0" anchor="t"/>
-          <a:lstStyle/>
-          <a:p>
-            <a:pPr marL="152400" indent="-152400">
-              <a:spcAft>
-                <a:spcPts val="700"/>
-              </a:spcAft>
-              <a:buSzPct val="100000"/>
-              <a:buChar char="•"/>
-            </a:pPr>
-            <a:r>
-              <a:rPr lang="en-US" sz="1100" dirty="0">
-                <a:solidFill>
-                  <a:srgbClr val="1F2A30"/>
-                </a:solidFill>
-                <a:latin typeface="Calibri" pitchFamily="34" charset="0"/>
-                <a:ea typeface="Calibri" pitchFamily="34" charset="-122"/>
-                <a:cs typeface="Calibri" pitchFamily="34" charset="-120"/>
-              </a:rPr>
-              <a:t>Aucun impact sur les utilisateurs finaux du CRM.</a:t>
-            </a:r>
-            <a:endParaRPr lang="en-US" sz="1100" dirty="0"/>
-          </a:p>
-          <a:p>
-            <a:pPr marL="152400" indent="-152400">
-              <a:spcAft>
-                <a:spcPts val="700"/>
-              </a:spcAft>
-              <a:buSzPct val="100000"/>
-              <a:buChar char="•"/>
-            </a:pPr>
-            <a:r>
-              <a:rPr lang="en-US" sz="1100" dirty="0">
-                <a:solidFill>
-                  <a:srgbClr val="1F2A30"/>
-                </a:solidFill>
-                <a:latin typeface="Calibri" pitchFamily="34" charset="0"/>
-                <a:ea typeface="Calibri" pitchFamily="34" charset="-122"/>
-                <a:cs typeface="Calibri" pitchFamily="34" charset="-120"/>
-              </a:rPr>
-              <a:t>Accès d’administration mieux sécurisés à l’issue du correctif.</a:t>
-            </a:r>
-            <a:endParaRPr lang="en-US" sz="1100" dirty="0"/>
-          </a:p>
-        </p:txBody>
-      </p:sp>
-      <p:sp>
-        <p:nvSpPr>
-          <p:cNvPr id="26" name="Shape 20"/>
-          <p:cNvSpPr/>
-          <p:nvPr/>
-        </p:nvSpPr>
-        <p:spPr>
-          <a:xfrm>
-            <a:off x="9043187" y="1965960"/>
-            <a:ext cx="2645588" cy="3017520"/>
+            <a:off x="7335134" y="3383280"/>
+            <a:ext cx="2076237" cy="2286000"/>
           </a:xfrm>
           <a:prstGeom prst="roundRect">
             <a:avLst>
-              <a:gd name="adj" fmla="val 4148"/>
+              <a:gd name="adj" fmla="val 5285"/>
             </a:avLst>
           </a:prstGeom>
           <a:solidFill>
@@ -31306,13 +31166,178 @@
       </p:sp>
       <p:sp>
         <p:nvSpPr>
-          <p:cNvPr id="27" name="Shape 21"/>
+          <p:cNvPr id="34" name="Text 27"/>
+          <p:cNvSpPr txBox="1"/>
+          <p:nvPr/>
+        </p:nvSpPr>
+        <p:spPr>
+          <a:xfrm>
+            <a:off x="7536302" y="3566160"/>
+            <a:ext cx="1673901" cy="566928"/>
+          </a:xfrm>
+          <a:prstGeom prst="rect">
+            <a:avLst/>
+          </a:prstGeom>
+          <a:noFill/>
+          <a:ln/>
+        </p:spPr>
+        <p:txBody>
+          <a:bodyPr wrap="square" lIns="0" tIns="0" rIns="0" bIns="0" rtlCol="0" anchor="ctr"/>
+          <a:lstStyle/>
+          <a:p>
+            <a:pPr indent="0" marL="0">
+              <a:buNone/>
+            </a:pPr>
+            <a:r>
+              <a:rPr lang="en-US" sz="1400" b="1" dirty="0">
+                <a:solidFill>
+                  <a:srgbClr val="06404F"/>
+                </a:solidFill>
+                <a:latin typeface="Calibri" pitchFamily="34" charset="0"/>
+                <a:ea typeface="Calibri" pitchFamily="34" charset="-122"/>
+                <a:cs typeface="Calibri" pitchFamily="34" charset="-120"/>
+              </a:rPr>
+              <a:t>Analytique avancée</a:t>
+            </a:r>
+            <a:endParaRPr lang="en-US" sz="1400" dirty="0"/>
+          </a:p>
+        </p:txBody>
+      </p:sp>
+      <p:sp>
+        <p:nvSpPr>
+          <p:cNvPr id="35" name="Shape 28"/>
           <p:cNvSpPr/>
           <p:nvPr/>
         </p:nvSpPr>
         <p:spPr>
           <a:xfrm>
-            <a:off x="9271787" y="2194560"/>
+            <a:off x="7536302" y="4187952"/>
+            <a:ext cx="1673901" cy="0"/>
+          </a:xfrm>
+          <a:prstGeom prst="line">
+            <a:avLst/>
+          </a:prstGeom>
+          <a:noFill/>
+          <a:ln w="9525">
+            <a:solidFill>
+              <a:srgbClr val="D6E0E3"/>
+            </a:solidFill>
+            <a:prstDash val="solid"/>
+          </a:ln>
+        </p:spPr>
+      </p:sp>
+      <p:sp>
+        <p:nvSpPr>
+          <p:cNvPr id="36" name="Text 29"/>
+          <p:cNvSpPr txBox="1"/>
+          <p:nvPr/>
+        </p:nvSpPr>
+        <p:spPr>
+          <a:xfrm>
+            <a:off x="7536302" y="4297680"/>
+            <a:ext cx="1673901" cy="1234440"/>
+          </a:xfrm>
+          <a:prstGeom prst="rect">
+            <a:avLst/>
+          </a:prstGeom>
+          <a:noFill/>
+          <a:ln/>
+        </p:spPr>
+        <p:txBody>
+          <a:bodyPr wrap="square" lIns="0" tIns="0" rIns="0" bIns="0" rtlCol="0" anchor="t"/>
+          <a:lstStyle/>
+          <a:p>
+            <a:pPr marL="152400" indent="-152400">
+              <a:spcAft>
+                <a:spcPts val="500"/>
+              </a:spcAft>
+              <a:buSzPct val="100000"/>
+              <a:buChar char="•"/>
+            </a:pPr>
+            <a:r>
+              <a:rPr lang="en-US" sz="1050" dirty="0">
+                <a:solidFill>
+                  <a:srgbClr val="1F2A30"/>
+                </a:solidFill>
+                <a:latin typeface="Calibri" pitchFamily="34" charset="0"/>
+                <a:ea typeface="Calibri" pitchFamily="34" charset="-122"/>
+                <a:cs typeface="Calibri" pitchFamily="34" charset="-120"/>
+              </a:rPr>
+              <a:t>Tableaux de bord ventes et service client</a:t>
+            </a:r>
+            <a:endParaRPr lang="en-US" sz="1050" dirty="0"/>
+          </a:p>
+          <a:p>
+            <a:pPr marL="152400" indent="-152400">
+              <a:spcAft>
+                <a:spcPts val="500"/>
+              </a:spcAft>
+              <a:buSzPct val="100000"/>
+              <a:buChar char="•"/>
+            </a:pPr>
+            <a:r>
+              <a:rPr lang="en-US" sz="1050" dirty="0">
+                <a:solidFill>
+                  <a:srgbClr val="1F2A30"/>
+                </a:solidFill>
+                <a:latin typeface="Calibri" pitchFamily="34" charset="0"/>
+                <a:ea typeface="Calibri" pitchFamily="34" charset="-122"/>
+                <a:cs typeface="Calibri" pitchFamily="34" charset="-120"/>
+              </a:rPr>
+              <a:t>Segmentation dynamique et rapports prédictifs</a:t>
+            </a:r>
+            <a:endParaRPr lang="en-US" sz="1050" dirty="0"/>
+          </a:p>
+        </p:txBody>
+      </p:sp>
+      <p:sp>
+        <p:nvSpPr>
+          <p:cNvPr id="37" name="Text 30"/>
+          <p:cNvSpPr txBox="1"/>
+          <p:nvPr/>
+        </p:nvSpPr>
+        <p:spPr>
+          <a:xfrm>
+            <a:off x="9612539" y="2011680"/>
+            <a:ext cx="2076237" cy="320040"/>
+          </a:xfrm>
+          <a:prstGeom prst="rect">
+            <a:avLst/>
+          </a:prstGeom>
+          <a:noFill/>
+          <a:ln/>
+        </p:spPr>
+        <p:txBody>
+          <a:bodyPr wrap="square" lIns="0" tIns="0" rIns="0" bIns="0" rtlCol="0" anchor="ctr"/>
+          <a:lstStyle/>
+          <a:p>
+            <a:pPr algn="ctr" indent="0" marL="0">
+              <a:buNone/>
+            </a:pPr>
+            <a:r>
+              <a:rPr lang="en-US" sz="1300" b="1" dirty="0">
+                <a:solidFill>
+                  <a:srgbClr val="F28C28"/>
+                </a:solidFill>
+                <a:latin typeface="Calibri" pitchFamily="34" charset="0"/>
+                <a:ea typeface="Calibri" pitchFamily="34" charset="-122"/>
+                <a:cs typeface="Calibri" pitchFamily="34" charset="-120"/>
+              </a:rPr>
+              <a:t>Q4 2027</a:t>
+            </a:r>
+            <a:endParaRPr lang="en-US" sz="1300" dirty="0"/>
+          </a:p>
+        </p:txBody>
+      </p:sp>
+      <p:sp>
+        <p:nvSpPr>
+          <p:cNvPr id="38" name="Shape 31"/>
+          <p:cNvSpPr/>
+          <p:nvPr/>
+        </p:nvSpPr>
+        <p:spPr>
+          <a:xfrm>
+            <a:off x="10376337" y="2423160"/>
             <a:ext cx="548640" cy="548640"/>
           </a:xfrm>
           <a:prstGeom prst="ellipse">
@@ -31331,209 +31356,7 @@
       </p:sp>
       <p:pic>
         <p:nvPicPr>
-          <p:cNvPr id="28" name="Image 4" descr="preencoded.png">    </p:cNvPr>
-          <p:cNvPicPr>
-            <a:picLocks noChangeAspect="1"/>
-          </p:cNvPicPr>
-          <p:nvPr/>
-        </p:nvPicPr>
-        <p:blipFill>
-          <a:blip r:embed="rId5"/>
-          <a:stretch>
-            <a:fillRect/>
-          </a:stretch>
-        </p:blipFill>
-        <p:spPr>
-          <a:xfrm>
-            <a:off x="9414434" y="2337206"/>
-            <a:ext cx="263347" cy="263347"/>
-          </a:xfrm>
-          <a:prstGeom prst="rect">
-            <a:avLst/>
-          </a:prstGeom>
-        </p:spPr>
-      </p:pic>
-      <p:sp>
-        <p:nvSpPr>
-          <p:cNvPr id="29" name="Text 22"/>
-          <p:cNvSpPr txBox="1"/>
-          <p:nvPr/>
-        </p:nvSpPr>
-        <p:spPr>
-          <a:xfrm>
-            <a:off x="9271787" y="2880360"/>
-            <a:ext cx="2188388" cy="411480"/>
-          </a:xfrm>
-          <a:prstGeom prst="rect">
-            <a:avLst/>
-          </a:prstGeom>
-          <a:noFill/>
-          <a:ln/>
-        </p:spPr>
-        <p:txBody>
-          <a:bodyPr wrap="square" lIns="0" tIns="0" rIns="0" bIns="0" rtlCol="0" anchor="ctr"/>
-          <a:lstStyle/>
-          <a:p>
-            <a:pPr indent="0" marL="0">
-              <a:buNone/>
-            </a:pPr>
-            <a:r>
-              <a:rPr lang="en-US" sz="1400" b="1" dirty="0">
-                <a:solidFill>
-                  <a:srgbClr val="F28C28"/>
-                </a:solidFill>
-                <a:latin typeface="Calibri" pitchFamily="34" charset="0"/>
-                <a:ea typeface="Calibri" pitchFamily="34" charset="-122"/>
-                <a:cs typeface="Calibri" pitchFamily="34" charset="-120"/>
-              </a:rPr>
-              <a:t>À ne pas confondre</a:t>
-            </a:r>
-            <a:endParaRPr lang="en-US" sz="1400" dirty="0"/>
-          </a:p>
-        </p:txBody>
-      </p:sp>
-      <p:sp>
-        <p:nvSpPr>
-          <p:cNvPr id="30" name="Shape 23"/>
-          <p:cNvSpPr/>
-          <p:nvPr/>
-        </p:nvSpPr>
-        <p:spPr>
-          <a:xfrm>
-            <a:off x="9271787" y="3364992"/>
-            <a:ext cx="2188388" cy="0"/>
-          </a:xfrm>
-          <a:prstGeom prst="line">
-            <a:avLst/>
-          </a:prstGeom>
-          <a:noFill/>
-          <a:ln w="9525">
-            <a:solidFill>
-              <a:srgbClr val="D6E0E3"/>
-            </a:solidFill>
-            <a:prstDash val="solid"/>
-          </a:ln>
-        </p:spPr>
-      </p:sp>
-      <p:sp>
-        <p:nvSpPr>
-          <p:cNvPr id="31" name="Text 24"/>
-          <p:cNvSpPr txBox="1"/>
-          <p:nvPr/>
-        </p:nvSpPr>
-        <p:spPr>
-          <a:xfrm>
-            <a:off x="9271787" y="3474720"/>
-            <a:ext cx="2188388" cy="1371600"/>
-          </a:xfrm>
-          <a:prstGeom prst="rect">
-            <a:avLst/>
-          </a:prstGeom>
-          <a:noFill/>
-          <a:ln/>
-        </p:spPr>
-        <p:txBody>
-          <a:bodyPr wrap="square" lIns="0" tIns="0" rIns="0" bIns="0" rtlCol="0" anchor="t"/>
-          <a:lstStyle/>
-          <a:p>
-            <a:pPr marL="152400" indent="-152400">
-              <a:spcAft>
-                <a:spcPts val="700"/>
-              </a:spcAft>
-              <a:buSzPct val="100000"/>
-              <a:buChar char="•"/>
-            </a:pPr>
-            <a:r>
-              <a:rPr lang="en-US" sz="1100" dirty="0">
-                <a:solidFill>
-                  <a:srgbClr val="1F2A30"/>
-                </a:solidFill>
-                <a:latin typeface="Calibri" pitchFamily="34" charset="0"/>
-                <a:ea typeface="Calibri" pitchFamily="34" charset="-122"/>
-                <a:cs typeface="Calibri" pitchFamily="34" charset="-120"/>
-              </a:rPr>
-              <a:t>Sujet technique CDM, sans lien avec le nouveau SSO Engage.</a:t>
-            </a:r>
-            <a:endParaRPr lang="en-US" sz="1100" dirty="0"/>
-          </a:p>
-          <a:p>
-            <a:pPr marL="152400" indent="-152400">
-              <a:spcAft>
-                <a:spcPts val="700"/>
-              </a:spcAft>
-              <a:buSzPct val="100000"/>
-              <a:buChar char="•"/>
-            </a:pPr>
-            <a:r>
-              <a:rPr lang="en-US" sz="1100" dirty="0">
-                <a:solidFill>
-                  <a:srgbClr val="1F2A30"/>
-                </a:solidFill>
-                <a:latin typeface="Calibri" pitchFamily="34" charset="0"/>
-                <a:ea typeface="Calibri" pitchFamily="34" charset="-122"/>
-                <a:cs typeface="Calibri" pitchFamily="34" charset="-120"/>
-              </a:rPr>
-              <a:t>Le SSO Engage suit sa propre trajectoire, fenêtre cible T1 2027.</a:t>
-            </a:r>
-            <a:endParaRPr lang="en-US" sz="1100" dirty="0"/>
-          </a:p>
-        </p:txBody>
-      </p:sp>
-      <p:sp>
-        <p:nvSpPr>
-          <p:cNvPr id="32" name="Shape 25"/>
-          <p:cNvSpPr/>
-          <p:nvPr/>
-        </p:nvSpPr>
-        <p:spPr>
-          <a:xfrm>
-            <a:off x="502920" y="5303520"/>
-            <a:ext cx="11185855" cy="1051560"/>
-          </a:xfrm>
-          <a:prstGeom prst="roundRect">
-            <a:avLst>
-              <a:gd name="adj" fmla="val 10435"/>
-            </a:avLst>
-          </a:prstGeom>
-          <a:solidFill>
-            <a:srgbClr val="F2F8F9"/>
-          </a:solidFill>
-          <a:ln w="12700">
-            <a:solidFill>
-              <a:srgbClr val="F2F8F9"/>
-            </a:solidFill>
-            <a:prstDash val="solid"/>
-          </a:ln>
-        </p:spPr>
-      </p:sp>
-      <p:sp>
-        <p:nvSpPr>
-          <p:cNvPr id="33" name="Shape 26"/>
-          <p:cNvSpPr/>
-          <p:nvPr/>
-        </p:nvSpPr>
-        <p:spPr>
-          <a:xfrm>
-            <a:off x="777240" y="5577840"/>
-            <a:ext cx="502920" cy="502920"/>
-          </a:xfrm>
-          <a:prstGeom prst="ellipse">
-            <a:avLst/>
-          </a:prstGeom>
-          <a:solidFill>
-            <a:srgbClr val="06404F"/>
-          </a:solidFill>
-          <a:ln w="12700">
-            <a:solidFill>
-              <a:srgbClr val="06404F"/>
-            </a:solidFill>
-            <a:prstDash val="solid"/>
-          </a:ln>
-        </p:spPr>
-      </p:sp>
-      <p:pic>
-        <p:nvPicPr>
-          <p:cNvPr id="34" name="Image 5" descr="preencoded.png">    </p:cNvPr>
+          <p:cNvPr id="39" name="Image 5" descr="preencoded.png">    </p:cNvPr>
           <p:cNvPicPr>
             <a:picLocks noChangeAspect="1"/>
           </p:cNvPicPr>
@@ -31547,8 +31370,8 @@
         </p:blipFill>
         <p:spPr>
           <a:xfrm>
-            <a:off x="907999" y="5708599"/>
-            <a:ext cx="241402" cy="241402"/>
+            <a:off x="10518983" y="2565806"/>
+            <a:ext cx="263347" cy="263347"/>
           </a:xfrm>
           <a:prstGeom prst="rect">
             <a:avLst/>
@@ -31557,119 +31380,174 @@
       </p:pic>
       <p:sp>
         <p:nvSpPr>
-          <p:cNvPr id="35" name="Text 27"/>
-          <p:cNvSpPr txBox="1"/>
-          <p:nvPr/>
-        </p:nvSpPr>
-        <p:spPr>
-          <a:xfrm>
-            <a:off x="1463040" y="5303520"/>
-            <a:ext cx="1097280" cy="1051560"/>
-          </a:xfrm>
-          <a:prstGeom prst="rect">
-            <a:avLst/>
-          </a:prstGeom>
-          <a:noFill/>
-          <a:ln/>
-        </p:spPr>
-        <p:txBody>
-          <a:bodyPr wrap="square" lIns="0" tIns="0" rIns="0" bIns="0" rtlCol="0" anchor="ctr"/>
-          <a:lstStyle/>
-          <a:p>
-            <a:pPr indent="0" marL="0">
-              <a:buNone/>
-            </a:pPr>
-            <a:r>
-              <a:rPr lang="en-US" sz="1300" b="1" dirty="0">
-                <a:solidFill>
-                  <a:srgbClr val="06404F"/>
-                </a:solidFill>
-                <a:latin typeface="Calibri" pitchFamily="34" charset="0"/>
-                <a:ea typeface="Calibri" pitchFamily="34" charset="-122"/>
-                <a:cs typeface="Calibri" pitchFamily="34" charset="-120"/>
-              </a:rPr>
-              <a:t>Statut</a:t>
-            </a:r>
-            <a:endParaRPr lang="en-US" sz="1300" dirty="0"/>
-          </a:p>
-        </p:txBody>
-      </p:sp>
-      <p:sp>
-        <p:nvSpPr>
-          <p:cNvPr id="36" name="Text 28"/>
-          <p:cNvSpPr txBox="1"/>
-          <p:nvPr/>
-        </p:nvSpPr>
-        <p:spPr>
-          <a:xfrm>
-            <a:off x="2606040" y="5303520"/>
-            <a:ext cx="6613855" cy="1051560"/>
-          </a:xfrm>
-          <a:prstGeom prst="rect">
-            <a:avLst/>
-          </a:prstGeom>
-          <a:noFill/>
-          <a:ln/>
-        </p:spPr>
-        <p:txBody>
-          <a:bodyPr wrap="square" lIns="0" tIns="0" rIns="0" bIns="0" rtlCol="0" anchor="ctr"/>
-          <a:lstStyle/>
-          <a:p>
-            <a:pPr indent="0" marL="0">
-              <a:buNone/>
-            </a:pPr>
-            <a:r>
-              <a:rPr lang="en-US" sz="1200" dirty="0">
-                <a:solidFill>
-                  <a:srgbClr val="1F2A30"/>
-                </a:solidFill>
-                <a:latin typeface="Calibri" pitchFamily="34" charset="0"/>
-                <a:ea typeface="Calibri" pitchFamily="34" charset="-122"/>
-                <a:cs typeface="Calibri" pitchFamily="34" charset="-120"/>
-              </a:rPr>
-              <a:t>Correctif en cours de résolution. Nous vous confirmons la mise en production et son résultat dès la clôture du sujet.</a:t>
-            </a:r>
-            <a:endParaRPr lang="en-US" sz="1200" dirty="0"/>
-          </a:p>
-        </p:txBody>
-      </p:sp>
-      <p:sp>
-        <p:nvSpPr>
-          <p:cNvPr id="37" name="Shape 29"/>
+          <p:cNvPr id="40" name="Shape 32"/>
           <p:cNvSpPr/>
           <p:nvPr/>
         </p:nvSpPr>
         <p:spPr>
           <a:xfrm>
-            <a:off x="9311335" y="5669280"/>
-            <a:ext cx="2103120" cy="329184"/>
+            <a:off x="9612539" y="3383280"/>
+            <a:ext cx="2076237" cy="2286000"/>
           </a:xfrm>
           <a:prstGeom prst="roundRect">
             <a:avLst>
-              <a:gd name="adj" fmla="val 50000"/>
+              <a:gd name="adj" fmla="val 5285"/>
             </a:avLst>
           </a:prstGeom>
           <a:solidFill>
-            <a:srgbClr val="FFF3D6"/>
+            <a:srgbClr val="FFFFFF"/>
           </a:solidFill>
           <a:ln w="12700">
             <a:solidFill>
-              <a:srgbClr val="FFF3D6"/>
+              <a:srgbClr val="FFFFFF"/>
             </a:solidFill>
             <a:prstDash val="solid"/>
           </a:ln>
-        </p:spPr>
-      </p:sp>
-      <p:sp>
-        <p:nvSpPr>
-          <p:cNvPr id="38" name="Text 30"/>
+          <a:effectLst>
+            <a:outerShdw sx="100000" sy="100000" kx="0" ky="0" algn="bl" rotWithShape="0" blurRad="76200" dist="25400" dir="5400000">
+              <a:srgbClr val="000000">
+                <a:alpha val="10000"/>
+              </a:srgbClr>
+            </a:outerShdw>
+          </a:effectLst>
+        </p:spPr>
+      </p:sp>
+      <p:sp>
+        <p:nvSpPr>
+          <p:cNvPr id="41" name="Text 33"/>
           <p:cNvSpPr txBox="1"/>
           <p:nvPr/>
         </p:nvSpPr>
         <p:spPr>
           <a:xfrm>
-            <a:off x="9311335" y="5669280"/>
-            <a:ext cx="2103120" cy="329184"/>
+            <a:off x="9813707" y="3566160"/>
+            <a:ext cx="1673901" cy="566928"/>
+          </a:xfrm>
+          <a:prstGeom prst="rect">
+            <a:avLst/>
+          </a:prstGeom>
+          <a:noFill/>
+          <a:ln/>
+        </p:spPr>
+        <p:txBody>
+          <a:bodyPr wrap="square" lIns="0" tIns="0" rIns="0" bIns="0" rtlCol="0" anchor="ctr"/>
+          <a:lstStyle/>
+          <a:p>
+            <a:pPr indent="0" marL="0">
+              <a:buNone/>
+            </a:pPr>
+            <a:r>
+              <a:rPr lang="en-US" sz="1400" b="1" dirty="0">
+                <a:solidFill>
+                  <a:srgbClr val="06404F"/>
+                </a:solidFill>
+                <a:latin typeface="Calibri" pitchFamily="34" charset="0"/>
+                <a:ea typeface="Calibri" pitchFamily="34" charset="-122"/>
+                <a:cs typeface="Calibri" pitchFamily="34" charset="-120"/>
+              </a:rPr>
+              <a:t>Intelligence artificielle</a:t>
+            </a:r>
+            <a:endParaRPr lang="en-US" sz="1400" dirty="0"/>
+          </a:p>
+        </p:txBody>
+      </p:sp>
+      <p:sp>
+        <p:nvSpPr>
+          <p:cNvPr id="42" name="Shape 34"/>
+          <p:cNvSpPr/>
+          <p:nvPr/>
+        </p:nvSpPr>
+        <p:spPr>
+          <a:xfrm>
+            <a:off x="9813707" y="4187952"/>
+            <a:ext cx="1673901" cy="0"/>
+          </a:xfrm>
+          <a:prstGeom prst="line">
+            <a:avLst/>
+          </a:prstGeom>
+          <a:noFill/>
+          <a:ln w="9525">
+            <a:solidFill>
+              <a:srgbClr val="D6E0E3"/>
+            </a:solidFill>
+            <a:prstDash val="solid"/>
+          </a:ln>
+        </p:spPr>
+      </p:sp>
+      <p:sp>
+        <p:nvSpPr>
+          <p:cNvPr id="43" name="Text 35"/>
+          <p:cNvSpPr txBox="1"/>
+          <p:nvPr/>
+        </p:nvSpPr>
+        <p:spPr>
+          <a:xfrm>
+            <a:off x="9813707" y="4297680"/>
+            <a:ext cx="1673901" cy="1234440"/>
+          </a:xfrm>
+          <a:prstGeom prst="rect">
+            <a:avLst/>
+          </a:prstGeom>
+          <a:noFill/>
+          <a:ln/>
+        </p:spPr>
+        <p:txBody>
+          <a:bodyPr wrap="square" lIns="0" tIns="0" rIns="0" bIns="0" rtlCol="0" anchor="t"/>
+          <a:lstStyle/>
+          <a:p>
+            <a:pPr marL="152400" indent="-152400">
+              <a:spcAft>
+                <a:spcPts val="500"/>
+              </a:spcAft>
+              <a:buSzPct val="100000"/>
+              <a:buChar char="•"/>
+            </a:pPr>
+            <a:r>
+              <a:rPr lang="en-US" sz="1050" dirty="0">
+                <a:solidFill>
+                  <a:srgbClr val="1F2A30"/>
+                </a:solidFill>
+                <a:latin typeface="Calibri" pitchFamily="34" charset="0"/>
+                <a:ea typeface="Calibri" pitchFamily="34" charset="-122"/>
+                <a:cs typeface="Calibri" pitchFamily="34" charset="-120"/>
+              </a:rPr>
+              <a:t>Suggestions d’actions et priorisation des tâches</a:t>
+            </a:r>
+            <a:endParaRPr lang="en-US" sz="1050" dirty="0"/>
+          </a:p>
+          <a:p>
+            <a:pPr marL="152400" indent="-152400">
+              <a:spcAft>
+                <a:spcPts val="500"/>
+              </a:spcAft>
+              <a:buSzPct val="100000"/>
+              <a:buChar char="•"/>
+            </a:pPr>
+            <a:r>
+              <a:rPr lang="en-US" sz="1050" dirty="0">
+                <a:solidFill>
+                  <a:srgbClr val="1F2A30"/>
+                </a:solidFill>
+                <a:latin typeface="Calibri" pitchFamily="34" charset="0"/>
+                <a:ea typeface="Calibri" pitchFamily="34" charset="-122"/>
+                <a:cs typeface="Calibri" pitchFamily="34" charset="-120"/>
+              </a:rPr>
+              <a:t>Aide à la rédaction, auto-complétion, recherche intelligente</a:t>
+            </a:r>
+            <a:endParaRPr lang="en-US" sz="1050" dirty="0"/>
+          </a:p>
+        </p:txBody>
+      </p:sp>
+      <p:sp>
+        <p:nvSpPr>
+          <p:cNvPr id="44" name="Text 36"/>
+          <p:cNvSpPr txBox="1"/>
+          <p:nvPr/>
+        </p:nvSpPr>
+        <p:spPr>
+          <a:xfrm>
+            <a:off x="502920" y="5897880"/>
+            <a:ext cx="11185855" cy="320040"/>
           </a:xfrm>
           <a:prstGeom prst="rect">
             <a:avLst/>
@@ -31685,17 +31563,17 @@
               <a:buNone/>
             </a:pPr>
             <a:r>
-              <a:rPr lang="en-US" sz="950" b="1" spc="100" kern="0" dirty="0">
-                <a:solidFill>
-                  <a:srgbClr val="D99A00"/>
-                </a:solidFill>
-                <a:latin typeface="Calibri" pitchFamily="34" charset="0"/>
-                <a:ea typeface="Calibri" pitchFamily="34" charset="-122"/>
-                <a:cs typeface="Calibri" pitchFamily="34" charset="-120"/>
-              </a:rPr>
-              <a:t>EN COURS DE RÉSOLUTION</a:t>
-            </a:r>
-            <a:endParaRPr lang="en-US" sz="950" dirty="0"/>
+              <a:rPr lang="en-US" sz="1250" b="1" dirty="0">
+                <a:solidFill>
+                  <a:srgbClr val="06404F"/>
+                </a:solidFill>
+                <a:latin typeface="Calibri" pitchFamily="34" charset="0"/>
+                <a:ea typeface="Calibri" pitchFamily="34" charset="-122"/>
+                <a:cs typeface="Calibri" pitchFamily="34" charset="-120"/>
+              </a:rPr>
+              <a:t>Quelles étapes sont prioritaires pour vos équipes ?</a:t>
+            </a:r>
+            <a:endParaRPr lang="en-US" sz="1250" dirty="0"/>
           </a:p>
         </p:txBody>
       </p:sp>
